--- a/conception/5. Pitch/OffrIA.pptx
+++ b/conception/5. Pitch/OffrIA.pptx
@@ -2,25 +2,25 @@
 <file path=ppt/presentation.xml><?xml version="1.0" encoding="utf-8"?>
 <p:presentation xmlns:a="http://schemas.openxmlformats.org/drawingml/2006/main" xmlns:r="http://schemas.openxmlformats.org/officeDocument/2006/relationships" xmlns:p="http://schemas.openxmlformats.org/presentationml/2006/main" saveSubsetFonts="1" autoCompressPictures="0">
   <p:sldMasterIdLst>
-    <p:sldMasterId id="2147483648" r:id="rId1"/>
+    <p:sldMasterId id="2147483648" r:id="rId4"/>
   </p:sldMasterIdLst>
+  <p:notesMasterIdLst>
+    <p:notesMasterId r:id="rId16"/>
+  </p:notesMasterIdLst>
   <p:sldIdLst>
-    <p:sldId id="256" r:id="rId2"/>
-    <p:sldId id="257" r:id="rId3"/>
-    <p:sldId id="258" r:id="rId4"/>
-    <p:sldId id="259" r:id="rId5"/>
-    <p:sldId id="260" r:id="rId6"/>
-    <p:sldId id="261" r:id="rId7"/>
-    <p:sldId id="262" r:id="rId8"/>
-    <p:sldId id="263" r:id="rId9"/>
-    <p:sldId id="264" r:id="rId10"/>
-    <p:sldId id="265" r:id="rId11"/>
-    <p:sldId id="266" r:id="rId12"/>
+    <p:sldId id="256" r:id="rId5"/>
+    <p:sldId id="257" r:id="rId6"/>
+    <p:sldId id="258" r:id="rId7"/>
+    <p:sldId id="259" r:id="rId8"/>
+    <p:sldId id="260" r:id="rId9"/>
+    <p:sldId id="261" r:id="rId10"/>
+    <p:sldId id="262" r:id="rId11"/>
+    <p:sldId id="263" r:id="rId12"/>
+    <p:sldId id="264" r:id="rId13"/>
+    <p:sldId id="265" r:id="rId14"/>
+    <p:sldId id="266" r:id="rId15"/>
   </p:sldIdLst>
-  <p:notesMasterIdLst>
-    <p:notesMasterId r:id="rId13"/>
-  </p:notesMasterIdLst>
-  <p:sldSz cx="9144000" cy="5143500"/>
+  <p:sldSz cx="9144000" cy="5143500" type="screen16x9"/>
   <p:notesSz cx="5143500" cy="9144000"/>
   <p:defaultTextStyle>
     <a:lvl1pPr marL="0" algn="l" defTabSz="914400" rtl="0" eaLnBrk="1" latinLnBrk="0" hangingPunct="1">
@@ -114,6 +114,11 @@
       </a:defRPr>
     </a:lvl9pPr>
   </p:defaultTextStyle>
+  <p:extLst>
+    <p:ext uri="{EFAFB233-063F-42B5-8137-9DF3F51BA10A}">
+      <p15:sldGuideLst xmlns:p15="http://schemas.microsoft.com/office/powerpoint/2012/main"/>
+    </p:ext>
+  </p:extLst>
 </p:presentation>
 </file>
 
@@ -139,234 +144,10 @@
           <a:chExt cx="0" cy="0"/>
         </a:xfrm>
       </p:grpSpPr>
-      <p:sp>
-        <p:nvSpPr>
-          <p:cNvPr id="2" name="Header Placeholder 1"/>
-          <p:cNvSpPr>
-            <a:spLocks noGrp="1"/>
-          </p:cNvSpPr>
-          <p:nvPr>
-            <p:ph type="hdr" sz="quarter"/>
-          </p:nvPr>
-        </p:nvSpPr>
-        <p:spPr>
-          <a:xfrm>
-            <a:off x="0" y="0"/>
-            <a:ext cx="2971800" cy="458788"/>
-          </a:xfrm>
-          <a:prstGeom prst="rect">
-            <a:avLst/>
-          </a:prstGeom>
-        </p:spPr>
-        <p:txBody>
-          <a:bodyPr vert="horz" lIns="91440" tIns="45720" rIns="91440" bIns="45720" rtlCol="0"/>
-          <a:lstStyle>
-            <a:lvl1pPr algn="l">
-              <a:defRPr sz="1200"/>
-            </a:lvl1pPr>
-          </a:lstStyle>
-          <a:p>
-            <a:endParaRPr lang="en-US"/>
-          </a:p>
-        </p:txBody>
-      </p:sp>
-      <p:sp>
-        <p:nvSpPr>
-          <p:cNvPr id="3" name="Date Placeholder 2"/>
-          <p:cNvSpPr>
-            <a:spLocks noGrp="1"/>
-          </p:cNvSpPr>
-          <p:nvPr>
-            <p:ph type="dt" idx="1"/>
-          </p:nvPr>
-        </p:nvSpPr>
-        <p:spPr>
-          <a:xfrm>
-            <a:off x="3884613" y="0"/>
-            <a:ext cx="2971800" cy="458788"/>
-          </a:xfrm>
-          <a:prstGeom prst="rect">
-            <a:avLst/>
-          </a:prstGeom>
-        </p:spPr>
-        <p:txBody>
-          <a:bodyPr vert="horz" lIns="91440" tIns="45720" rIns="91440" bIns="45720" rtlCol="0"/>
-          <a:lstStyle>
-            <a:lvl1pPr algn="r">
-              <a:defRPr sz="1200"/>
-            </a:lvl1pPr>
-          </a:lstStyle>
-          <a:p>
-            <a:fld id="{5282F153-3F37-0F45-9E97-73ACFA13230C}" type="datetimeFigureOut">
-              <a:rPr lang="en-US"/>
-              <a:t>7/23/19</a:t>
-            </a:fld>
-            <a:endParaRPr lang="en-US"/>
-          </a:p>
-        </p:txBody>
-      </p:sp>
-      <p:sp>
-        <p:nvSpPr>
-          <p:cNvPr id="4" name="Slide Image Placeholder 3"/>
-          <p:cNvSpPr>
-            <a:spLocks noGrp="1" noRot="1" noChangeAspect="1"/>
-          </p:cNvSpPr>
-          <p:nvPr>
-            <p:ph type="sldImg" idx="2"/>
-          </p:nvPr>
-        </p:nvSpPr>
-        <p:spPr>
-          <a:xfrm>
-            <a:off x="685800" y="1143000"/>
-            <a:ext cx="5486400" cy="3086100"/>
-          </a:xfrm>
-          <a:prstGeom prst="rect">
-            <a:avLst/>
-          </a:prstGeom>
-          <a:noFill/>
-          <a:ln w="12700">
-            <a:solidFill>
-              <a:prstClr val="black"/>
-            </a:solidFill>
-          </a:ln>
-        </p:spPr>
-        <p:txBody>
-          <a:bodyPr vert="horz" lIns="91440" tIns="45720" rIns="91440" bIns="45720" rtlCol="0" anchor="ctr"/>
-          <a:lstStyle/>
-          <a:p>
-            <a:endParaRPr lang="en-US"/>
-          </a:p>
-        </p:txBody>
-      </p:sp>
-      <p:sp>
-        <p:nvSpPr>
-          <p:cNvPr id="5" name="Notes Placeholder 4"/>
-          <p:cNvSpPr>
-            <a:spLocks noGrp="1"/>
-          </p:cNvSpPr>
-          <p:nvPr>
-            <p:ph type="body" sz="quarter" idx="3"/>
-          </p:nvPr>
-        </p:nvSpPr>
-        <p:spPr>
-          <a:xfrm>
-            <a:off x="685800" y="4400550"/>
-            <a:ext cx="5486400" cy="3600450"/>
-          </a:xfrm>
-          <a:prstGeom prst="rect">
-            <a:avLst/>
-          </a:prstGeom>
-        </p:spPr>
-        <p:txBody>
-          <a:bodyPr vert="horz" lIns="91440" tIns="45720" rIns="91440" bIns="45720" rtlCol="0"/>
-          <a:lstStyle/>
-          <a:p>
-            <a:pPr lvl="0"/>
-            <a:r>
-              <a:rPr lang="en-US"/>
-              <a:t>Click to edit Master text styles</a:t>
-            </a:r>
-          </a:p>
-          <a:p>
-            <a:pPr lvl="1"/>
-            <a:r>
-              <a:rPr lang="en-US"/>
-              <a:t>Second level</a:t>
-            </a:r>
-          </a:p>
-          <a:p>
-            <a:pPr lvl="2"/>
-            <a:r>
-              <a:rPr lang="en-US"/>
-              <a:t>Third level</a:t>
-            </a:r>
-          </a:p>
-          <a:p>
-            <a:pPr lvl="3"/>
-            <a:r>
-              <a:rPr lang="en-US"/>
-              <a:t>Fourth level</a:t>
-            </a:r>
-          </a:p>
-          <a:p>
-            <a:pPr lvl="4"/>
-            <a:r>
-              <a:rPr lang="en-US"/>
-              <a:t>Fifth level</a:t>
-            </a:r>
-          </a:p>
-        </p:txBody>
-      </p:sp>
-      <p:sp>
-        <p:nvSpPr>
-          <p:cNvPr id="6" name="Footer Placeholder 5"/>
-          <p:cNvSpPr>
-            <a:spLocks noGrp="1"/>
-          </p:cNvSpPr>
-          <p:nvPr>
-            <p:ph type="ftr" sz="quarter" idx="4"/>
-          </p:nvPr>
-        </p:nvSpPr>
-        <p:spPr>
-          <a:xfrm>
-            <a:off x="0" y="8685213"/>
-            <a:ext cx="2971800" cy="458787"/>
-          </a:xfrm>
-          <a:prstGeom prst="rect">
-            <a:avLst/>
-          </a:prstGeom>
-        </p:spPr>
-        <p:txBody>
-          <a:bodyPr vert="horz" lIns="91440" tIns="45720" rIns="91440" bIns="45720" rtlCol="0" anchor="b"/>
-          <a:lstStyle>
-            <a:lvl1pPr algn="l">
-              <a:defRPr sz="1200"/>
-            </a:lvl1pPr>
-          </a:lstStyle>
-          <a:p>
-            <a:endParaRPr lang="en-US"/>
-          </a:p>
-        </p:txBody>
-      </p:sp>
-      <p:sp>
-        <p:nvSpPr>
-          <p:cNvPr id="7" name="Slide Number Placeholder 6"/>
-          <p:cNvSpPr>
-            <a:spLocks noGrp="1"/>
-          </p:cNvSpPr>
-          <p:nvPr>
-            <p:ph type="sldNum" sz="quarter" idx="5"/>
-          </p:nvPr>
-        </p:nvSpPr>
-        <p:spPr>
-          <a:xfrm>
-            <a:off x="3884613" y="8685213"/>
-            <a:ext cx="2971800" cy="458787"/>
-          </a:xfrm>
-          <a:prstGeom prst="rect">
-            <a:avLst/>
-          </a:prstGeom>
-        </p:spPr>
-        <p:txBody>
-          <a:bodyPr vert="horz" lIns="91440" tIns="45720" rIns="91440" bIns="45720" rtlCol="0" anchor="b"/>
-          <a:lstStyle>
-            <a:lvl1pPr algn="r">
-              <a:defRPr sz="1200"/>
-            </a:lvl1pPr>
-          </a:lstStyle>
-          <a:p>
-            <a:fld id="{CE5E9CC1-C706-0F49-92D6-E571CC5EEA8F}" type="slidenum">
-              <a:rPr lang="en-US"/>
-              <a:t>‹#›</a:t>
-            </a:fld>
-            <a:endParaRPr lang="en-US"/>
-          </a:p>
-        </p:txBody>
-      </p:sp>
     </p:spTree>
     <p:extLst>
       <p:ext uri="{BB962C8B-B14F-4D97-AF65-F5344CB8AC3E}">
-        <p14:creationId xmlns:p14="http://schemas.microsoft.com/office/powerpoint/2010/main" val="1024086991"/>
+        <p14:creationId xmlns:p14="http://schemas.microsoft.com/office/powerpoint/2010/main" val="90761407"/>
       </p:ext>
     </p:extLst>
   </p:cSld>
@@ -514,7 +295,6 @@
               <a:rPr lang="en-US" dirty="0"/>
               <a:t>Bonjour à toutes et à tous. Aujourd'hui, je vous présente OffrIA, une solution qui va transformer votre approche des marchés publics. Nous ne parlons pas d'un simple outil, mais d'un véritable avantage concurrentiel. Mon objectif n'était pas de créer un chatbot, mais un commercial infatigable. Imaginez un collaborateur qui travaille sans relâche, répondant à des dizaines d'appels d'offres pendant que vous vous concentrez sur l'essentiel. OffrIA, c'est l'intelligence artificielle qui remporte vos marchés, en vous offrant une capacité de réponse inégalée. Passons maintenant au problème que nous résolvons.</a:t>
             </a:r>
-            <a:endParaRPr lang="en-US" dirty="0"/>
           </a:p>
         </p:txBody>
       </p:sp>
@@ -602,7 +382,6 @@
               <a:rPr lang="en-US" dirty="0"/>
               <a:t>Après avoir exploré notre vision et notre feuille de route, il est temps de passer à l'action et de transformer votre approche des marchés publics. Démarrer avec OffrIA est incroyablement simple et rapide. En quelques lignes de commande, vous pouvez cloner notre dépôt et lancer votre premier appel d'offres généré en moins de 90 secondes. C'est la promesse d'OffrIA : une efficacité immédiate, une capacité décuplée. Je suis Mohamed Echcharif EL JAZOULI, l'architecte derrière cette solution, et je suis convaincu que chaque appel d'offres mérite une réponse de qualité. Ne laissez plus de marchés vous échapper. Contactez-nous dès aujourd'hui pour une démonstration personnalisée et découvrez comment OffrIA peut révolutionner votre business.</a:t>
             </a:r>
-            <a:endParaRPr lang="en-US" dirty="0"/>
           </a:p>
         </p:txBody>
       </p:sp>
@@ -690,7 +469,6 @@
               <a:rPr lang="en-US" dirty="0"/>
               <a:t>Pour ceux qui souhaitent approfondir les données et les tendances du marché public marocain, nous avons compilé une liste de sources fiables. Ces références confirment l'ampleur de l'investissement public de 335 MMDH et la modernisation en cours. Elles attestent de la percée des PME, du vaste marché de plus de 20 000 appels d'offres annuels, et de l'amélioration des délais de paiement et de traitement. Ces données soulignent l'opportunité immense que représente le marché marocain, et pourquoi une solution comme OffrIA est plus pertinente que jamais pour naviguer ce paysage dynamique.</a:t>
             </a:r>
-            <a:endParaRPr lang="en-US" dirty="0"/>
           </a:p>
         </p:txBody>
       </p:sp>
@@ -778,7 +556,6 @@
               <a:rPr lang="en-US" dirty="0"/>
               <a:t>Le Maroc est un marché en pleine transformation, offrant une opportunité unique pour l'investissement public. En 2024, l'investissement public atteindra un volume record de 335 milliards de dirhams, en hausse de 11,6% par rapport à 2023. Cette dynamique est soutenue par une percée des PME, qui ont obtenu 35% des marchés en 2023, dépassant l'objectif légal de 30%. Le marché est vaste, avec plus de 20 000 appels d'offres publiés annuellement via le Portail Marocain des Marchés Publics. La modernisation est également visible dans l'efficacité des processus, avec des délais de paiement réduits à 17,5 jours et des délais de traitement optimisés à 33,9 jours. Ce contexte spécifique rend notre solution encore plus pertinente. Maintenant, imaginez une transformation radicale de ce processus.</a:t>
             </a:r>
-            <a:endParaRPr lang="en-US" dirty="0"/>
           </a:p>
         </p:txBody>
       </p:sp>
@@ -866,7 +643,6 @@
               <a:rPr lang="en-US" dirty="0"/>
               <a:t>Notre vision est simple et audacieuse : et si une IA pouvait lire l'appel d'offres à votre place ? OffrIA transforme 38 heures de travail en moins de deux minutes. Vous nous donnez un PDF, notre IA l'analyse, le comprend, et génère une réponse structurée et professionnelle. Elle ne se contente pas de lire, elle intègre le contexte métier, vos références, et vos atouts. C'est une réponse sur-mesure, prête à être soumise en un temps record. Voyons comment nous y parvenons avec notre solution.</a:t>
             </a:r>
-            <a:endParaRPr lang="en-US" dirty="0"/>
           </a:p>
         </p:txBody>
       </p:sp>
@@ -954,7 +730,6 @@
               <a:rPr lang="en-US" dirty="0"/>
               <a:t>Notre solution est un moteur intelligent qui transforme la façon dont vous répondez aux appels d'offres. Nous commençons par un parsing intelligent, extrayant automatiquement toutes les informations clés de l'AO. Ensuite, notre prompt engineering métier construit des requêtes ultra-contextualisées pour les modèles d'IA. Mais ce qui nous distingue vraiment, c'est l'intégration de la Récupération Augmentée de Génération, ou RAG. Cela signifie que chaque réponse est enrichie par votre propre base de connaissances, garantissant une précision et une cohérence inégalées. Et avec notre architecture multi-LLM, vous choisissez le modèle d'IA le plus adapté à chaque situation, que ce soit pour la complexité, la créativité ou la souveraineté des données. C'est une approche sur mesure pour chaque appel d'offres. Voyons maintenant pourquoi OffrIA se démarque vraiment de la concurrence.</a:t>
             </a:r>
-            <a:endParaRPr lang="en-US" dirty="0"/>
           </a:p>
         </p:txBody>
       </p:sp>
@@ -1042,7 +817,6 @@
               <a:rPr lang="en-US" dirty="0"/>
               <a:t>OffrIA n'est pas juste une autre solution d'IA; c'est une longueur d'avance stratégique. Nous avons délibérément conçu OffrIA pour surpasser la concurrence sur des critères essentiels. Nous offrons une flexibilité inégalée avec le multi-provider LLM, vous permettant de choisir le meilleur modèle pour chaque situation. Notre parsing automatique des appels d'offres est le plus avancé du marché, et nous contextualisons chaque réponse avec votre profil d'entreprise unique. De plus, notre API intégrable et l'hébergement souverain avec Mistral garantissent sécurité et adaptabilité. Et tout ça, avec un cœur open-source. C'est pourquoi McKinsey prévoit que les entreprises comme la vôtre, qui adoptent l'IA, capteront 30% de parts de marché supplémentaires d'ici 2026. Ce n'est pas une option, c'est une nécessité. Et les résultats concrets de cette avance, vous allez les voir tout de suite.</a:t>
             </a:r>
-            <a:endParaRPr lang="en-US" dirty="0"/>
           </a:p>
         </p:txBody>
       </p:sp>
@@ -1130,7 +904,6 @@
               <a:rPr lang="en-US" dirty="0"/>
               <a:t>Ces différenciateurs se traduisent par un impact direct et mesurable sur votre activité. Nous parlons d'une transformation radicale de votre capacité à répondre aux appels d'offres. Imaginez passer de 38 heures à moins de 2 minutes par réponse. Cela signifie que vous pouvez traiter jusqu'à 25 fois plus d'appels d'offres chaque mois. Et le coût ? Il passe de 3 000 euros à quelques centimes. OffrIA ne remplace pas vos équipes; elle démultiplie leur efficacité. Nous visons un taux de réponse de plus de 80%, vous ouvrant des marchés que vous n'auriez jamais pu envisager auparavant. Mais comment tout cela est-il possible ? C'est grâce à une architecture technique pensée pour la performance et la simplicité.</a:t>
             </a:r>
-            <a:endParaRPr lang="en-US" dirty="0"/>
           </a:p>
         </p:txBody>
       </p:sp>
@@ -1218,7 +991,6 @@
               <a:rPr lang="en-US" dirty="0"/>
               <a:t>Après avoir vu l'impact, parlons argent. La transparence des coûts est essentielle avec OffrIA. Vous choisissez votre fournisseur et voyez exactement ce que vous payez. Un rédacteur humain coûte environ 908 MAD pour une réponse à un appel d'offres. OffrIA, elle, ne coûte que 1,65 MAD pour la même tâche. C'est une réduction de coût de 545 fois. Cela vous permet de scaler vos réponses sans augmenter vos effectifs. La vraie question n'est pas combien OffrIA coûte, mais combien elle vous rapporte. Un seul marché remporté grâce à OffrIA rembourse des années d'utilisation. Cette efficacité est rendue possible par une architecture technique robuste et intelligente.</a:t>
             </a:r>
-            <a:endParaRPr lang="en-US" dirty="0"/>
           </a:p>
         </p:txBody>
       </p:sp>
@@ -1306,7 +1078,6 @@
               <a:rPr lang="en-US" dirty="0"/>
               <a:t>Derrière ces chiffres impressionnants se cache une architecture technique robuste et élégante, conçue pour être à la fois puissante et facile à déployer. Nous avons bâti OffrIA sur une stack moderne et éprouvée, avec Python, FastAPI et Docker. Le cœur de notre système est un pipeline intelligent qui prend votre appel d'offres, le parse, construit un prompt métier ultra-contextualisé, puis le soumet au meilleur LLM pour générer une réponse structurée. Cette architecture est entièrement basée sur une API REST, ce qui signifie que vous pouvez l'intégrer sans effort dans vos systèmes existants, qu'il s'agisse de votre ERP ou de votre CRM. Et le meilleur ? Grâce à Docker, vous pouvez déployer cette puissance en moins de 5 minutes, que ce soit sur vos serveurs ou dans le cloud. Mais ce n'est que le début de l'aventure.</a:t>
             </a:r>
-            <a:endParaRPr lang="en-US" dirty="0"/>
           </a:p>
         </p:txBody>
       </p:sp>
@@ -1394,7 +1165,6 @@
               <a:rPr lang="en-US" dirty="0"/>
               <a:t>Notre architecture robuste n'est que le point de départ; notre feuille de route ambitieuse démontre notre engagement envers l'innovation continue. La version 1.0, déjà disponible, pose les bases avec une API REST performante, le parsing automatique des appels d'offres et la flexibilité du multi-LLM. Mais nous ne nous arrêtons pas là. Le prochain trimestre, la version 1.5 introduira une interface web intuitive et un historique des réponses, rendant OffrIA encore plus accessible. En 2025, la version 2.0 permettra le fine-tuning sur vos corpus d'appels d'offres remportés et un scoring prédictif, maximisant vos chances de succès. Chaque étape de cette feuille de route est conçue pour renforcer votre avantage concurrentiel. Êtes-vous prêt à nous rejoindre dans cette transformation ?</a:t>
             </a:r>
-            <a:endParaRPr lang="en-US" dirty="0"/>
           </a:p>
         </p:txBody>
       </p:sp>
@@ -1467,6 +1237,11 @@
 <file path=ppt/slideMasters/slideMaster1.xml><?xml version="1.0" encoding="utf-8"?>
 <p:sldMaster xmlns:a="http://schemas.openxmlformats.org/drawingml/2006/main" xmlns:r="http://schemas.openxmlformats.org/officeDocument/2006/relationships" xmlns:p="http://schemas.openxmlformats.org/presentationml/2006/main">
   <p:cSld>
+    <p:bg>
+      <p:bgRef idx="1001">
+        <a:schemeClr val="bg1"/>
+      </p:bgRef>
+    </p:bg>
     <p:spTree>
       <p:nvGrpSpPr>
         <p:cNvPr id="1" name=""/>
@@ -1760,14 +1535,14 @@
       </p:grpSpPr>
       <p:pic>
         <p:nvPicPr>
-          <p:cNvPr id="3" name="Image 0" descr="preencoded.png">    </p:cNvPr>
+          <p:cNvPr id="3" name="Image 0" descr="preencoded.png"/>
           <p:cNvPicPr>
             <a:picLocks noChangeAspect="1"/>
           </p:cNvPicPr>
           <p:nvPr/>
         </p:nvPicPr>
         <p:blipFill>
-          <a:blip r:embed="rId1"/>
+          <a:blip r:embed="rId3"/>
           <a:stretch>
             <a:fillRect/>
           </a:stretch>
@@ -1803,6 +1578,13 @@
           </a:solidFill>
           <a:ln/>
         </p:spPr>
+        <p:txBody>
+          <a:bodyPr/>
+          <a:lstStyle/>
+          <a:p>
+            <a:endParaRPr lang="fr-FR"/>
+          </a:p>
+        </p:txBody>
       </p:sp>
       <p:sp>
         <p:nvSpPr>
@@ -1823,6 +1605,13 @@
           </a:solidFill>
           <a:ln/>
         </p:spPr>
+        <p:txBody>
+          <a:bodyPr/>
+          <a:lstStyle/>
+          <a:p>
+            <a:endParaRPr lang="fr-FR"/>
+          </a:p>
+        </p:txBody>
       </p:sp>
       <p:sp>
         <p:nvSpPr>
@@ -1847,14 +1636,14 @@
           </a:bodyPr>
           <a:lstStyle/>
           <a:p>
-            <a:pPr algn="l" indent="0" marL="0">
+            <a:pPr marL="0" indent="0" algn="l">
               <a:lnSpc>
                 <a:spcPts val="6100"/>
               </a:lnSpc>
               <a:buNone/>
             </a:pPr>
             <a:r>
-              <a:rPr lang="en-US" sz="6218" b="1" spc="-2" kern="0" dirty="0">
+              <a:rPr lang="en-US" sz="6218" b="1" kern="0" spc="-2" dirty="0">
                 <a:solidFill>
                   <a:srgbClr val="1A1A1A"/>
                 </a:solidFill>
@@ -1891,7 +1680,7 @@
           </a:bodyPr>
           <a:lstStyle/>
           <a:p>
-            <a:pPr algn="l" indent="0" marL="0">
+            <a:pPr marL="0" indent="0" algn="l">
               <a:lnSpc>
                 <a:spcPts val="1600"/>
               </a:lnSpc>
@@ -1935,7 +1724,7 @@
           </a:bodyPr>
           <a:lstStyle/>
           <a:p>
-            <a:pPr algn="l" indent="0" marL="0">
+            <a:pPr marL="0" indent="0" algn="l">
               <a:lnSpc>
                 <a:spcPts val="2200"/>
               </a:lnSpc>
@@ -1979,14 +1768,14 @@
           </a:bodyPr>
           <a:lstStyle/>
           <a:p>
-            <a:pPr algn="l" indent="0" marL="0">
+            <a:pPr marL="0" indent="0" algn="l">
               <a:lnSpc>
                 <a:spcPts val="1100"/>
               </a:lnSpc>
               <a:buNone/>
             </a:pPr>
             <a:r>
-              <a:rPr lang="en-US" sz="834" spc="1" kern="0" dirty="0">
+              <a:rPr lang="en-US" sz="834" kern="0" spc="1" dirty="0">
                 <a:solidFill>
                   <a:srgbClr val="666666"/>
                 </a:solidFill>
@@ -2019,6 +1808,13 @@
           </a:solidFill>
           <a:ln/>
         </p:spPr>
+        <p:txBody>
+          <a:bodyPr/>
+          <a:lstStyle/>
+          <a:p>
+            <a:endParaRPr lang="fr-FR"/>
+          </a:p>
+        </p:txBody>
       </p:sp>
       <p:sp>
         <p:nvSpPr>
@@ -2043,7 +1839,7 @@
           </a:bodyPr>
           <a:lstStyle/>
           <a:p>
-            <a:pPr algn="l" indent="0" marL="0">
+            <a:pPr marL="0" indent="0" algn="l">
               <a:lnSpc>
                 <a:spcPts val="8100"/>
               </a:lnSpc>
@@ -2087,7 +1883,7 @@
           </a:bodyPr>
           <a:lstStyle/>
           <a:p>
-            <a:pPr algn="l" indent="0" marL="0">
+            <a:pPr marL="0" indent="0" algn="l">
               <a:lnSpc>
                 <a:spcPts val="1600"/>
               </a:lnSpc>
@@ -2135,14 +1931,14 @@
       </p:grpSpPr>
       <p:pic>
         <p:nvPicPr>
-          <p:cNvPr id="3" name="Image 0" descr="preencoded.png">    </p:cNvPr>
+          <p:cNvPr id="3" name="Image 0" descr="preencoded.png"/>
           <p:cNvPicPr>
             <a:picLocks noChangeAspect="1"/>
           </p:cNvPicPr>
           <p:nvPr/>
         </p:nvPicPr>
         <p:blipFill>
-          <a:blip r:embed="rId1"/>
+          <a:blip r:embed="rId3"/>
           <a:stretch>
             <a:fillRect/>
           </a:stretch>
@@ -2178,6 +1974,13 @@
           </a:solidFill>
           <a:ln/>
         </p:spPr>
+        <p:txBody>
+          <a:bodyPr/>
+          <a:lstStyle/>
+          <a:p>
+            <a:endParaRPr lang="fr-FR"/>
+          </a:p>
+        </p:txBody>
       </p:sp>
       <p:sp>
         <p:nvSpPr>
@@ -2198,6 +2001,13 @@
           </a:solidFill>
           <a:ln/>
         </p:spPr>
+        <p:txBody>
+          <a:bodyPr/>
+          <a:lstStyle/>
+          <a:p>
+            <a:endParaRPr lang="fr-FR"/>
+          </a:p>
+        </p:txBody>
       </p:sp>
       <p:sp>
         <p:nvSpPr>
@@ -2222,7 +2032,7 @@
           </a:bodyPr>
           <a:lstStyle/>
           <a:p>
-            <a:pPr algn="l" indent="0" marL="0">
+            <a:pPr marL="0" indent="0" algn="l">
               <a:lnSpc>
                 <a:spcPts val="3500"/>
               </a:lnSpc>
@@ -2266,7 +2076,7 @@
           </a:bodyPr>
           <a:lstStyle/>
           <a:p>
-            <a:pPr algn="l" indent="0" marL="0">
+            <a:pPr marL="0" indent="0" algn="l">
               <a:lnSpc>
                 <a:spcPts val="1200"/>
               </a:lnSpc>
@@ -2306,6 +2116,13 @@
           </a:solidFill>
           <a:ln/>
         </p:spPr>
+        <p:txBody>
+          <a:bodyPr/>
+          <a:lstStyle/>
+          <a:p>
+            <a:endParaRPr lang="fr-FR"/>
+          </a:p>
+        </p:txBody>
       </p:sp>
       <p:sp>
         <p:nvSpPr>
@@ -2330,18 +2147,12 @@
           </a:bodyPr>
           <a:lstStyle/>
           <a:p>
-            <a:pPr algn="l" indent="0" marL="0">
+            <a:pPr marL="0" indent="0" algn="l">
               <a:lnSpc>
                 <a:spcPts val="1600"/>
               </a:lnSpc>
               <a:buNone/>
             </a:pPr>
-            <a:pPr algn="l" indent="0" marL="0">
-              <a:lnSpc>
-                <a:spcPts val="1600"/>
-              </a:lnSpc>
-              <a:buNone/>
-            </a:pPr>
             <a:r>
               <a:rPr lang="en-US" sz="784" b="1" dirty="0">
                 <a:solidFill>
@@ -2353,12 +2164,6 @@
               </a:rPr>
               <a:t>git clone</a:t>
             </a:r>
-            <a:pPr algn="l" indent="0" marL="0">
-              <a:lnSpc>
-                <a:spcPts val="1600"/>
-              </a:lnSpc>
-              <a:buNone/>
-            </a:pPr>
             <a:r>
               <a:rPr lang="en-US" sz="834" dirty="0">
                 <a:solidFill>
@@ -2370,12 +2175,6 @@
               </a:rPr>
               <a:t> </a:t>
             </a:r>
-            <a:pPr algn="l" indent="0" marL="0">
-              <a:lnSpc>
-                <a:spcPts val="1600"/>
-              </a:lnSpc>
-              <a:buNone/>
-            </a:pPr>
             <a:r>
               <a:rPr lang="en-US" sz="834" dirty="0">
                 <a:solidFill>
@@ -2387,12 +2186,6 @@
               </a:rPr>
               <a:t>https://github.com/offria/offria-api</a:t>
             </a:r>
-            <a:pPr algn="l" indent="0" marL="0">
-              <a:lnSpc>
-                <a:spcPts val="1600"/>
-              </a:lnSpc>
-              <a:buNone/>
-            </a:pPr>
             <a:r>
               <a:rPr lang="en-US" sz="834" dirty="0">
                 <a:solidFill>
@@ -2403,14 +2196,19 @@
                 <a:cs typeface="JetBrains Mono" pitchFamily="34" charset="-120"/>
               </a:rPr>
               <a:t>
-</a:t>
-            </a:r>
-            <a:pPr algn="l" indent="0" marL="0">
-              <a:lnSpc>
-                <a:spcPts val="1600"/>
-              </a:lnSpc>
-              <a:buNone/>
-            </a:pPr>
+ </a:t>
+            </a:r>
+            <a:r>
+              <a:rPr lang="en-US" sz="784" b="1" dirty="0">
+                <a:solidFill>
+                  <a:srgbClr val="FFFFFF"/>
+                </a:solidFill>
+                <a:latin typeface="JetBrains Mono" pitchFamily="34" charset="0"/>
+                <a:ea typeface="JetBrains Mono" pitchFamily="34" charset="-122"/>
+                <a:cs typeface="JetBrains Mono" pitchFamily="34" charset="-120"/>
+              </a:rPr>
+              <a:t>docker compose up</a:t>
+            </a:r>
             <a:r>
               <a:rPr lang="en-US" sz="834" dirty="0">
                 <a:solidFill>
@@ -2420,101 +2218,9 @@
                 <a:ea typeface="JetBrains Mono" pitchFamily="34" charset="-122"/>
                 <a:cs typeface="JetBrains Mono" pitchFamily="34" charset="-120"/>
               </a:rPr>
-              <a:t> </a:t>
-            </a:r>
-            <a:pPr algn="l" indent="0" marL="0">
-              <a:lnSpc>
-                <a:spcPts val="1600"/>
-              </a:lnSpc>
-              <a:buNone/>
-            </a:pPr>
-            <a:r>
-              <a:rPr lang="en-US" sz="784" b="1" dirty="0">
-                <a:solidFill>
-                  <a:srgbClr val="FFFFFF"/>
-                </a:solidFill>
-                <a:latin typeface="JetBrains Mono" pitchFamily="34" charset="0"/>
-                <a:ea typeface="JetBrains Mono" pitchFamily="34" charset="-122"/>
-                <a:cs typeface="JetBrains Mono" pitchFamily="34" charset="-120"/>
-              </a:rPr>
-              <a:t>docker compose up</a:t>
-            </a:r>
-            <a:pPr algn="l" indent="0" marL="0">
-              <a:lnSpc>
-                <a:spcPts val="1600"/>
-              </a:lnSpc>
-              <a:buNone/>
-            </a:pPr>
-            <a:r>
-              <a:rPr lang="en-US" sz="834" dirty="0">
-                <a:solidFill>
-                  <a:srgbClr val="E5E5E5"/>
-                </a:solidFill>
-                <a:latin typeface="JetBrains Mono" pitchFamily="34" charset="0"/>
-                <a:ea typeface="JetBrains Mono" pitchFamily="34" charset="-122"/>
-                <a:cs typeface="JetBrains Mono" pitchFamily="34" charset="-120"/>
-              </a:rPr>
               <a:t>
-</a:t>
-            </a:r>
-            <a:pPr algn="l" indent="0" marL="0">
-              <a:lnSpc>
-                <a:spcPts val="1600"/>
-              </a:lnSpc>
-              <a:buNone/>
-            </a:pPr>
-            <a:r>
-              <a:rPr lang="en-US" sz="834" dirty="0">
-                <a:solidFill>
-                  <a:srgbClr val="E5E5E5"/>
-                </a:solidFill>
-                <a:latin typeface="JetBrains Mono" pitchFamily="34" charset="0"/>
-                <a:ea typeface="JetBrains Mono" pitchFamily="34" charset="-122"/>
-                <a:cs typeface="JetBrains Mono" pitchFamily="34" charset="-120"/>
-              </a:rPr>
-              <a:t> </a:t>
-            </a:r>
-            <a:pPr algn="l" indent="0" marL="0">
-              <a:lnSpc>
-                <a:spcPts val="1600"/>
-              </a:lnSpc>
-              <a:buNone/>
-            </a:pPr>
-            <a:r>
-              <a:rPr lang="en-US" sz="834" dirty="0">
-                <a:solidFill>
-                  <a:srgbClr val="E5E5E5"/>
-                </a:solidFill>
-                <a:latin typeface="JetBrains Mono" pitchFamily="34" charset="0"/>
-                <a:ea typeface="JetBrains Mono" pitchFamily="34" charset="-122"/>
-                <a:cs typeface="JetBrains Mono" pitchFamily="34" charset="-120"/>
-              </a:rPr>
-              <a:t>
-</a:t>
-            </a:r>
-            <a:pPr algn="l" indent="0" marL="0">
-              <a:lnSpc>
-                <a:spcPts val="1600"/>
-              </a:lnSpc>
-              <a:buNone/>
-            </a:pPr>
-            <a:r>
-              <a:rPr lang="en-US" sz="834" dirty="0">
-                <a:solidFill>
-                  <a:srgbClr val="E5E5E5"/>
-                </a:solidFill>
-                <a:latin typeface="JetBrains Mono" pitchFamily="34" charset="0"/>
-                <a:ea typeface="JetBrains Mono" pitchFamily="34" charset="-122"/>
-                <a:cs typeface="JetBrains Mono" pitchFamily="34" charset="-120"/>
-              </a:rPr>
-              <a:t> </a:t>
-            </a:r>
-            <a:pPr algn="l" indent="0" marL="0">
-              <a:lnSpc>
-                <a:spcPts val="1600"/>
-              </a:lnSpc>
-              <a:buNone/>
-            </a:pPr>
+ </a:t>
+            </a:r>
             <a:r>
               <a:rPr lang="en-US" sz="834" i="1" dirty="0">
                 <a:solidFill>
@@ -2526,12 +2232,6 @@
               </a:rPr>
               <a:t># Votre premier AO généré en 90 secondes.</a:t>
             </a:r>
-            <a:pPr algn="l" indent="0" marL="0">
-              <a:lnSpc>
-                <a:spcPts val="1600"/>
-              </a:lnSpc>
-              <a:buNone/>
-            </a:pPr>
             <a:endParaRPr lang="en-US" sz="834" dirty="0"/>
           </a:p>
         </p:txBody>
@@ -2555,6 +2255,13 @@
           </a:solidFill>
           <a:ln/>
         </p:spPr>
+        <p:txBody>
+          <a:bodyPr/>
+          <a:lstStyle/>
+          <a:p>
+            <a:endParaRPr lang="fr-FR"/>
+          </a:p>
+        </p:txBody>
       </p:sp>
       <p:sp>
         <p:nvSpPr>
@@ -2579,7 +2286,7 @@
           </a:bodyPr>
           <a:lstStyle/>
           <a:p>
-            <a:pPr algn="l" indent="0" marL="0">
+            <a:pPr marL="0" indent="0" algn="l">
               <a:lnSpc>
                 <a:spcPts val="2200"/>
               </a:lnSpc>
@@ -2623,14 +2330,14 @@
           </a:bodyPr>
           <a:lstStyle/>
           <a:p>
-            <a:pPr algn="l" indent="0" marL="0">
+            <a:pPr marL="0" indent="0" algn="l">
               <a:lnSpc>
                 <a:spcPts val="1100"/>
               </a:lnSpc>
               <a:buNone/>
             </a:pPr>
             <a:r>
-              <a:rPr lang="en-US" sz="834" spc="1" kern="0" dirty="0">
+              <a:rPr lang="en-US" sz="834" kern="0" spc="1" dirty="0">
                 <a:solidFill>
                   <a:srgbClr val="666666"/>
                 </a:solidFill>
@@ -2667,7 +2374,7 @@
           </a:bodyPr>
           <a:lstStyle/>
           <a:p>
-            <a:pPr algn="l" indent="0" marL="0">
+            <a:pPr marL="0" indent="0" algn="l">
               <a:lnSpc>
                 <a:spcPts val="2200"/>
               </a:lnSpc>
@@ -2712,17 +2419,24 @@
             <a:prstDash val="solid"/>
           </a:ln>
         </p:spPr>
+        <p:txBody>
+          <a:bodyPr/>
+          <a:lstStyle/>
+          <a:p>
+            <a:endParaRPr lang="fr-FR"/>
+          </a:p>
+        </p:txBody>
       </p:sp>
       <p:pic>
         <p:nvPicPr>
-          <p:cNvPr id="15" name="Image 1" descr="preencoded.png">    </p:cNvPr>
+          <p:cNvPr id="15" name="Image 1" descr="preencoded.png"/>
           <p:cNvPicPr>
             <a:picLocks noChangeAspect="1"/>
           </p:cNvPicPr>
           <p:nvPr/>
         </p:nvPicPr>
         <p:blipFill>
-          <a:blip r:embed="rId2"/>
+          <a:blip r:embed="rId4"/>
           <a:stretch>
             <a:fillRect/>
           </a:stretch>
@@ -2760,7 +2474,7 @@
           </a:bodyPr>
           <a:lstStyle/>
           <a:p>
-            <a:pPr algn="ctr" indent="0" marL="0">
+            <a:pPr marL="0" indent="0" algn="ctr">
               <a:lnSpc>
                 <a:spcPts val="1200"/>
               </a:lnSpc>
@@ -2808,14 +2522,14 @@
       </p:grpSpPr>
       <p:pic>
         <p:nvPicPr>
-          <p:cNvPr id="3" name="Image 0" descr="preencoded.png">    </p:cNvPr>
+          <p:cNvPr id="3" name="Image 0" descr="preencoded.png"/>
           <p:cNvPicPr>
             <a:picLocks noChangeAspect="1"/>
           </p:cNvPicPr>
           <p:nvPr/>
         </p:nvPicPr>
         <p:blipFill>
-          <a:blip r:embed="rId1"/>
+          <a:blip r:embed="rId3"/>
           <a:stretch>
             <a:fillRect/>
           </a:stretch>
@@ -2851,6 +2565,13 @@
           </a:solidFill>
           <a:ln/>
         </p:spPr>
+        <p:txBody>
+          <a:bodyPr/>
+          <a:lstStyle/>
+          <a:p>
+            <a:endParaRPr lang="fr-FR"/>
+          </a:p>
+        </p:txBody>
       </p:sp>
       <p:sp>
         <p:nvSpPr>
@@ -2871,6 +2592,13 @@
           </a:solidFill>
           <a:ln/>
         </p:spPr>
+        <p:txBody>
+          <a:bodyPr/>
+          <a:lstStyle/>
+          <a:p>
+            <a:endParaRPr lang="fr-FR"/>
+          </a:p>
+        </p:txBody>
       </p:sp>
       <p:sp>
         <p:nvSpPr>
@@ -2895,7 +2623,7 @@
           </a:bodyPr>
           <a:lstStyle/>
           <a:p>
-            <a:pPr algn="l" indent="0" marL="0">
+            <a:pPr marL="0" indent="0" algn="l">
               <a:lnSpc>
                 <a:spcPts val="3200"/>
               </a:lnSpc>
@@ -2939,7 +2667,7 @@
           </a:bodyPr>
           <a:lstStyle/>
           <a:p>
-            <a:pPr algn="l" indent="0" marL="0">
+            <a:pPr marL="0" indent="0" algn="l">
               <a:lnSpc>
                 <a:spcPts val="1200"/>
               </a:lnSpc>
@@ -2983,7 +2711,7 @@
           </a:bodyPr>
           <a:lstStyle/>
           <a:p>
-            <a:pPr algn="l" indent="0" marL="0">
+            <a:pPr marL="0" indent="0" algn="l">
               <a:lnSpc>
                 <a:spcPts val="1300"/>
               </a:lnSpc>
@@ -3027,7 +2755,7 @@
           </a:bodyPr>
           <a:lstStyle/>
           <a:p>
-            <a:pPr algn="l" indent="0" marL="0">
+            <a:pPr marL="0" indent="0" algn="l">
               <a:lnSpc>
                 <a:spcPts val="1300"/>
               </a:lnSpc>
@@ -3071,7 +2799,7 @@
           </a:bodyPr>
           <a:lstStyle/>
           <a:p>
-            <a:pPr algn="l" indent="0" marL="0">
+            <a:pPr marL="0" indent="0" algn="l">
               <a:lnSpc>
                 <a:spcPts val="1300"/>
               </a:lnSpc>
@@ -3115,7 +2843,7 @@
           </a:bodyPr>
           <a:lstStyle/>
           <a:p>
-            <a:pPr algn="l" indent="0" marL="0">
+            <a:pPr marL="0" indent="0" algn="l">
               <a:lnSpc>
                 <a:spcPts val="1200"/>
               </a:lnSpc>
@@ -3159,7 +2887,7 @@
           </a:bodyPr>
           <a:lstStyle/>
           <a:p>
-            <a:pPr algn="l" indent="0" marL="0">
+            <a:pPr marL="0" indent="0" algn="l">
               <a:lnSpc>
                 <a:spcPts val="1300"/>
               </a:lnSpc>
@@ -3203,7 +2931,7 @@
           </a:bodyPr>
           <a:lstStyle/>
           <a:p>
-            <a:pPr algn="l" indent="0" marL="0">
+            <a:pPr marL="0" indent="0" algn="l">
               <a:lnSpc>
                 <a:spcPts val="1300"/>
               </a:lnSpc>
@@ -3247,7 +2975,7 @@
           </a:bodyPr>
           <a:lstStyle/>
           <a:p>
-            <a:pPr algn="l" indent="0" marL="0">
+            <a:pPr marL="0" indent="0" algn="l">
               <a:lnSpc>
                 <a:spcPts val="1300"/>
               </a:lnSpc>
@@ -3291,7 +3019,7 @@
           </a:bodyPr>
           <a:lstStyle/>
           <a:p>
-            <a:pPr algn="l" indent="0" marL="0">
+            <a:pPr marL="0" indent="0" algn="l">
               <a:lnSpc>
                 <a:spcPts val="1200"/>
               </a:lnSpc>
@@ -3335,7 +3063,7 @@
           </a:bodyPr>
           <a:lstStyle/>
           <a:p>
-            <a:pPr algn="l" indent="0" marL="0">
+            <a:pPr marL="0" indent="0" algn="l">
               <a:lnSpc>
                 <a:spcPts val="1300"/>
               </a:lnSpc>
@@ -3379,7 +3107,7 @@
           </a:bodyPr>
           <a:lstStyle/>
           <a:p>
-            <a:pPr algn="l" indent="0" marL="0">
+            <a:pPr marL="0" indent="0" algn="l">
               <a:lnSpc>
                 <a:spcPts val="1300"/>
               </a:lnSpc>
@@ -3423,7 +3151,7 @@
           </a:bodyPr>
           <a:lstStyle/>
           <a:p>
-            <a:pPr algn="l" indent="0" marL="0">
+            <a:pPr marL="0" indent="0" algn="l">
               <a:lnSpc>
                 <a:spcPts val="1300"/>
               </a:lnSpc>
@@ -3467,7 +3195,7 @@
           </a:bodyPr>
           <a:lstStyle/>
           <a:p>
-            <a:pPr algn="l" indent="0" marL="0">
+            <a:pPr marL="0" indent="0" algn="l">
               <a:lnSpc>
                 <a:spcPts val="1200"/>
               </a:lnSpc>
@@ -3511,7 +3239,7 @@
           </a:bodyPr>
           <a:lstStyle/>
           <a:p>
-            <a:pPr algn="l" indent="0" marL="0">
+            <a:pPr marL="0" indent="0" algn="l">
               <a:lnSpc>
                 <a:spcPts val="1300"/>
               </a:lnSpc>
@@ -3555,7 +3283,7 @@
           </a:bodyPr>
           <a:lstStyle/>
           <a:p>
-            <a:pPr algn="l" indent="0" marL="0">
+            <a:pPr marL="0" indent="0" algn="l">
               <a:lnSpc>
                 <a:spcPts val="1300"/>
               </a:lnSpc>
@@ -3599,7 +3327,7 @@
           </a:bodyPr>
           <a:lstStyle/>
           <a:p>
-            <a:pPr algn="l" indent="0" marL="0">
+            <a:pPr marL="0" indent="0" algn="l">
               <a:lnSpc>
                 <a:spcPts val="1300"/>
               </a:lnSpc>
@@ -3643,7 +3371,7 @@
           </a:bodyPr>
           <a:lstStyle/>
           <a:p>
-            <a:pPr algn="l" indent="0" marL="0">
+            <a:pPr marL="0" indent="0" algn="l">
               <a:lnSpc>
                 <a:spcPts val="1200"/>
               </a:lnSpc>
@@ -3687,7 +3415,7 @@
           </a:bodyPr>
           <a:lstStyle/>
           <a:p>
-            <a:pPr algn="l" indent="0" marL="0">
+            <a:pPr marL="0" indent="0" algn="l">
               <a:lnSpc>
                 <a:spcPts val="1300"/>
               </a:lnSpc>
@@ -3731,7 +3459,7 @@
           </a:bodyPr>
           <a:lstStyle/>
           <a:p>
-            <a:pPr algn="l" indent="0" marL="0">
+            <a:pPr marL="0" indent="0" algn="l">
               <a:lnSpc>
                 <a:spcPts val="1300"/>
               </a:lnSpc>
@@ -3775,7 +3503,7 @@
           </a:bodyPr>
           <a:lstStyle/>
           <a:p>
-            <a:pPr algn="l" indent="0" marL="0">
+            <a:pPr marL="0" indent="0" algn="l">
               <a:lnSpc>
                 <a:spcPts val="1300"/>
               </a:lnSpc>
@@ -3819,7 +3547,7 @@
           </a:bodyPr>
           <a:lstStyle/>
           <a:p>
-            <a:pPr algn="l" indent="0" marL="0">
+            <a:pPr marL="0" indent="0" algn="l">
               <a:lnSpc>
                 <a:spcPts val="1200"/>
               </a:lnSpc>
@@ -3863,7 +3591,7 @@
           </a:bodyPr>
           <a:lstStyle/>
           <a:p>
-            <a:pPr algn="l" indent="0" marL="0">
+            <a:pPr marL="0" indent="0" algn="l">
               <a:lnSpc>
                 <a:spcPts val="1300"/>
               </a:lnSpc>
@@ -3907,7 +3635,7 @@
           </a:bodyPr>
           <a:lstStyle/>
           <a:p>
-            <a:pPr algn="l" indent="0" marL="0">
+            <a:pPr marL="0" indent="0" algn="l">
               <a:lnSpc>
                 <a:spcPts val="1300"/>
               </a:lnSpc>
@@ -3951,7 +3679,7 @@
           </a:bodyPr>
           <a:lstStyle/>
           <a:p>
-            <a:pPr algn="l" indent="0" marL="0">
+            <a:pPr marL="0" indent="0" algn="l">
               <a:lnSpc>
                 <a:spcPts val="1300"/>
               </a:lnSpc>
@@ -3999,14 +3727,14 @@
       </p:grpSpPr>
       <p:pic>
         <p:nvPicPr>
-          <p:cNvPr id="3" name="Image 0" descr="preencoded.png">    </p:cNvPr>
+          <p:cNvPr id="3" name="Image 0" descr="preencoded.png"/>
           <p:cNvPicPr>
             <a:picLocks noChangeAspect="1"/>
           </p:cNvPicPr>
           <p:nvPr/>
         </p:nvPicPr>
         <p:blipFill>
-          <a:blip r:embed="rId1"/>
+          <a:blip r:embed="rId3"/>
           <a:stretch>
             <a:fillRect/>
           </a:stretch>
@@ -4042,6 +3770,13 @@
           </a:solidFill>
           <a:ln/>
         </p:spPr>
+        <p:txBody>
+          <a:bodyPr/>
+          <a:lstStyle/>
+          <a:p>
+            <a:endParaRPr lang="fr-FR"/>
+          </a:p>
+        </p:txBody>
       </p:sp>
       <p:sp>
         <p:nvSpPr>
@@ -4062,6 +3797,13 @@
           </a:solidFill>
           <a:ln/>
         </p:spPr>
+        <p:txBody>
+          <a:bodyPr/>
+          <a:lstStyle/>
+          <a:p>
+            <a:endParaRPr lang="fr-FR"/>
+          </a:p>
+        </p:txBody>
       </p:sp>
       <p:sp>
         <p:nvSpPr>
@@ -4086,7 +3828,7 @@
           </a:bodyPr>
           <a:lstStyle/>
           <a:p>
-            <a:pPr algn="l" indent="0" marL="0">
+            <a:pPr marL="0" indent="0" algn="l">
               <a:lnSpc>
                 <a:spcPts val="2400"/>
               </a:lnSpc>
@@ -4130,7 +3872,7 @@
           </a:bodyPr>
           <a:lstStyle/>
           <a:p>
-            <a:pPr algn="l" indent="0" marL="0">
+            <a:pPr marL="0" indent="0" algn="l">
               <a:lnSpc>
                 <a:spcPts val="3200"/>
               </a:lnSpc>
@@ -4174,14 +3916,14 @@
           </a:bodyPr>
           <a:lstStyle/>
           <a:p>
-            <a:pPr algn="l" indent="0" marL="0">
+            <a:pPr marL="0" indent="0" algn="l">
               <a:lnSpc>
                 <a:spcPts val="900"/>
               </a:lnSpc>
               <a:buNone/>
             </a:pPr>
             <a:r>
-              <a:rPr lang="en-US" sz="727" spc="1" kern="0" dirty="0">
+              <a:rPr lang="en-US" sz="727" kern="0" spc="1" dirty="0">
                 <a:solidFill>
                   <a:srgbClr val="666666"/>
                 </a:solidFill>
@@ -4218,7 +3960,7 @@
           </a:bodyPr>
           <a:lstStyle/>
           <a:p>
-            <a:pPr algn="l" indent="0" marL="0">
+            <a:pPr marL="0" indent="0" algn="l">
               <a:lnSpc>
                 <a:spcPts val="800"/>
               </a:lnSpc>
@@ -4262,7 +4004,7 @@
           </a:bodyPr>
           <a:lstStyle/>
           <a:p>
-            <a:pPr algn="l" indent="0" marL="0">
+            <a:pPr marL="0" indent="0" algn="l">
               <a:lnSpc>
                 <a:spcPts val="800"/>
               </a:lnSpc>
@@ -4306,7 +4048,7 @@
           </a:bodyPr>
           <a:lstStyle/>
           <a:p>
-            <a:pPr algn="l" indent="0" marL="0">
+            <a:pPr marL="0" indent="0" algn="l">
               <a:lnSpc>
                 <a:spcPts val="800"/>
               </a:lnSpc>
@@ -4350,7 +4092,7 @@
           </a:bodyPr>
           <a:lstStyle/>
           <a:p>
-            <a:pPr algn="l" indent="0" marL="0">
+            <a:pPr marL="0" indent="0" algn="l">
               <a:lnSpc>
                 <a:spcPts val="800"/>
               </a:lnSpc>
@@ -4394,7 +4136,7 @@
           </a:bodyPr>
           <a:lstStyle/>
           <a:p>
-            <a:pPr algn="l" indent="0" marL="0">
+            <a:pPr marL="0" indent="0" algn="l">
               <a:lnSpc>
                 <a:spcPts val="800"/>
               </a:lnSpc>
@@ -4438,7 +4180,7 @@
           </a:bodyPr>
           <a:lstStyle/>
           <a:p>
-            <a:pPr algn="l" indent="0" marL="0">
+            <a:pPr marL="0" indent="0" algn="l">
               <a:lnSpc>
                 <a:spcPts val="800"/>
               </a:lnSpc>
@@ -4482,7 +4224,7 @@
           </a:bodyPr>
           <a:lstStyle/>
           <a:p>
-            <a:pPr algn="l" indent="0" marL="0">
+            <a:pPr marL="0" indent="0" algn="l">
               <a:lnSpc>
                 <a:spcPts val="800"/>
               </a:lnSpc>
@@ -4526,7 +4268,7 @@
           </a:bodyPr>
           <a:lstStyle/>
           <a:p>
-            <a:pPr algn="l" indent="0" marL="0">
+            <a:pPr marL="0" indent="0" algn="l">
               <a:lnSpc>
                 <a:spcPts val="800"/>
               </a:lnSpc>
@@ -4570,7 +4312,7 @@
           </a:bodyPr>
           <a:lstStyle/>
           <a:p>
-            <a:pPr algn="l" indent="0" marL="0">
+            <a:pPr marL="0" indent="0" algn="l">
               <a:lnSpc>
                 <a:spcPts val="800"/>
               </a:lnSpc>
@@ -4614,7 +4356,7 @@
           </a:bodyPr>
           <a:lstStyle/>
           <a:p>
-            <a:pPr algn="l" indent="0" marL="0">
+            <a:pPr marL="0" indent="0" algn="l">
               <a:lnSpc>
                 <a:spcPts val="800"/>
               </a:lnSpc>
@@ -4658,7 +4400,7 @@
           </a:bodyPr>
           <a:lstStyle/>
           <a:p>
-            <a:pPr algn="l" indent="0" marL="0">
+            <a:pPr marL="0" indent="0" algn="l">
               <a:lnSpc>
                 <a:spcPts val="800"/>
               </a:lnSpc>
@@ -4702,7 +4444,7 @@
           </a:bodyPr>
           <a:lstStyle/>
           <a:p>
-            <a:pPr algn="l" indent="0" marL="0">
+            <a:pPr marL="0" indent="0" algn="l">
               <a:lnSpc>
                 <a:spcPts val="800"/>
               </a:lnSpc>
@@ -4746,7 +4488,7 @@
           </a:bodyPr>
           <a:lstStyle/>
           <a:p>
-            <a:pPr algn="l" indent="0" marL="0">
+            <a:pPr marL="0" indent="0" algn="l">
               <a:lnSpc>
                 <a:spcPts val="800"/>
               </a:lnSpc>
@@ -4790,7 +4532,7 @@
           </a:bodyPr>
           <a:lstStyle/>
           <a:p>
-            <a:pPr algn="l" indent="0" marL="0">
+            <a:pPr marL="0" indent="0" algn="l">
               <a:lnSpc>
                 <a:spcPts val="800"/>
               </a:lnSpc>
@@ -4834,7 +4576,7 @@
           </a:bodyPr>
           <a:lstStyle/>
           <a:p>
-            <a:pPr algn="l" indent="0" marL="0">
+            <a:pPr marL="0" indent="0" algn="l">
               <a:lnSpc>
                 <a:spcPts val="800"/>
               </a:lnSpc>
@@ -4874,6 +4616,13 @@
           </a:solidFill>
           <a:ln/>
         </p:spPr>
+        <p:txBody>
+          <a:bodyPr/>
+          <a:lstStyle/>
+          <a:p>
+            <a:endParaRPr lang="fr-FR"/>
+          </a:p>
+        </p:txBody>
       </p:sp>
       <p:sp>
         <p:nvSpPr>
@@ -4898,7 +4647,7 @@
           </a:bodyPr>
           <a:lstStyle/>
           <a:p>
-            <a:pPr algn="l" indent="0" marL="0">
+            <a:pPr marL="0" indent="0" algn="l">
               <a:lnSpc>
                 <a:spcPts val="1900"/>
               </a:lnSpc>
@@ -4942,7 +4691,7 @@
           </a:bodyPr>
           <a:lstStyle/>
           <a:p>
-            <a:pPr algn="l" indent="0" marL="0">
+            <a:pPr marL="0" indent="0" algn="l">
               <a:lnSpc>
                 <a:spcPts val="1000"/>
               </a:lnSpc>
@@ -4986,7 +4735,7 @@
           </a:bodyPr>
           <a:lstStyle/>
           <a:p>
-            <a:pPr algn="l" indent="0" marL="0">
+            <a:pPr marL="0" indent="0" algn="l">
               <a:lnSpc>
                 <a:spcPts val="1900"/>
               </a:lnSpc>
@@ -5030,7 +4779,7 @@
           </a:bodyPr>
           <a:lstStyle/>
           <a:p>
-            <a:pPr algn="l" indent="0" marL="0">
+            <a:pPr marL="0" indent="0" algn="l">
               <a:lnSpc>
                 <a:spcPts val="1000"/>
               </a:lnSpc>
@@ -5074,7 +4823,7 @@
           </a:bodyPr>
           <a:lstStyle/>
           <a:p>
-            <a:pPr algn="l" indent="0" marL="0">
+            <a:pPr marL="0" indent="0" algn="l">
               <a:lnSpc>
                 <a:spcPts val="1900"/>
               </a:lnSpc>
@@ -5118,7 +4867,7 @@
           </a:bodyPr>
           <a:lstStyle/>
           <a:p>
-            <a:pPr algn="l" indent="0" marL="0">
+            <a:pPr marL="0" indent="0" algn="l">
               <a:lnSpc>
                 <a:spcPts val="1000"/>
               </a:lnSpc>
@@ -5162,7 +4911,7 @@
           </a:bodyPr>
           <a:lstStyle/>
           <a:p>
-            <a:pPr algn="l" indent="0" marL="0">
+            <a:pPr marL="0" indent="0" algn="l">
               <a:lnSpc>
                 <a:spcPts val="1900"/>
               </a:lnSpc>
@@ -5206,7 +4955,7 @@
           </a:bodyPr>
           <a:lstStyle/>
           <a:p>
-            <a:pPr algn="l" indent="0" marL="0">
+            <a:pPr marL="0" indent="0" algn="l">
               <a:lnSpc>
                 <a:spcPts val="1000"/>
               </a:lnSpc>
@@ -5251,6 +5000,13 @@
             <a:prstDash val="solid"/>
           </a:ln>
         </p:spPr>
+        <p:txBody>
+          <a:bodyPr/>
+          <a:lstStyle/>
+          <a:p>
+            <a:endParaRPr lang="fr-FR"/>
+          </a:p>
+        </p:txBody>
       </p:sp>
       <p:sp>
         <p:nvSpPr>
@@ -5275,7 +5031,7 @@
           </a:bodyPr>
           <a:lstStyle/>
           <a:p>
-            <a:pPr algn="l" indent="0" marL="0">
+            <a:pPr marL="0" indent="0" algn="l">
               <a:lnSpc>
                 <a:spcPts val="1500"/>
               </a:lnSpc>
@@ -5319,7 +5075,7 @@
           </a:bodyPr>
           <a:lstStyle/>
           <a:p>
-            <a:pPr algn="l" indent="0" marL="0">
+            <a:pPr marL="0" indent="0" algn="l">
               <a:lnSpc>
                 <a:spcPts val="1900"/>
               </a:lnSpc>
@@ -5363,7 +5119,7 @@
           </a:bodyPr>
           <a:lstStyle/>
           <a:p>
-            <a:pPr algn="l" indent="0" marL="0">
+            <a:pPr marL="0" indent="0" algn="l">
               <a:lnSpc>
                 <a:spcPts val="1000"/>
               </a:lnSpc>
@@ -5407,7 +5163,7 @@
           </a:bodyPr>
           <a:lstStyle/>
           <a:p>
-            <a:pPr algn="l" indent="0" marL="0">
+            <a:pPr marL="0" indent="0" algn="l">
               <a:lnSpc>
                 <a:spcPts val="1900"/>
               </a:lnSpc>
@@ -5451,7 +5207,7 @@
           </a:bodyPr>
           <a:lstStyle/>
           <a:p>
-            <a:pPr algn="l" indent="0" marL="0">
+            <a:pPr marL="0" indent="0" algn="l">
               <a:lnSpc>
                 <a:spcPts val="1000"/>
               </a:lnSpc>
@@ -5499,14 +5255,14 @@
       </p:grpSpPr>
       <p:pic>
         <p:nvPicPr>
-          <p:cNvPr id="3" name="Image 0" descr="preencoded.png">    </p:cNvPr>
+          <p:cNvPr id="3" name="Image 0" descr="preencoded.png"/>
           <p:cNvPicPr>
             <a:picLocks noChangeAspect="1"/>
           </p:cNvPicPr>
           <p:nvPr/>
         </p:nvPicPr>
         <p:blipFill>
-          <a:blip r:embed="rId1"/>
+          <a:blip r:embed="rId3"/>
           <a:stretch>
             <a:fillRect/>
           </a:stretch>
@@ -5542,6 +5298,13 @@
           </a:solidFill>
           <a:ln/>
         </p:spPr>
+        <p:txBody>
+          <a:bodyPr/>
+          <a:lstStyle/>
+          <a:p>
+            <a:endParaRPr lang="fr-FR"/>
+          </a:p>
+        </p:txBody>
       </p:sp>
       <p:sp>
         <p:nvSpPr>
@@ -5562,6 +5325,13 @@
           </a:solidFill>
           <a:ln/>
         </p:spPr>
+        <p:txBody>
+          <a:bodyPr/>
+          <a:lstStyle/>
+          <a:p>
+            <a:endParaRPr lang="fr-FR"/>
+          </a:p>
+        </p:txBody>
       </p:sp>
       <p:sp>
         <p:nvSpPr>
@@ -5586,7 +5356,7 @@
           </a:bodyPr>
           <a:lstStyle/>
           <a:p>
-            <a:pPr algn="l" indent="0" marL="0">
+            <a:pPr marL="0" indent="0" algn="l">
               <a:lnSpc>
                 <a:spcPts val="3500"/>
               </a:lnSpc>
@@ -5601,42 +5371,8 @@
                 <a:ea typeface="Playfair Display" pitchFamily="34" charset="-122"/>
                 <a:cs typeface="Playfair Display" pitchFamily="34" charset="-120"/>
               </a:rPr>
-              <a:t>La vision : et si une IA</a:t>
-            </a:r>
-            <a:pPr algn="l" indent="0" marL="0">
-              <a:lnSpc>
-                <a:spcPts val="3500"/>
-              </a:lnSpc>
-              <a:buNone/>
-            </a:pPr>
-            <a:r>
-              <a:rPr lang="en-US" sz="2862" b="1" dirty="0">
-                <a:solidFill>
-                  <a:srgbClr val="1A1A1A"/>
-                </a:solidFill>
-                <a:latin typeface="Playfair Display" pitchFamily="34" charset="0"/>
-                <a:ea typeface="Playfair Display" pitchFamily="34" charset="-122"/>
-                <a:cs typeface="Playfair Display" pitchFamily="34" charset="-120"/>
-              </a:rPr>
-              <a:t>
-</a:t>
-            </a:r>
-            <a:pPr algn="l" indent="0" marL="0">
-              <a:lnSpc>
-                <a:spcPts val="3500"/>
-              </a:lnSpc>
-              <a:buNone/>
-            </a:pPr>
-            <a:r>
-              <a:rPr lang="en-US" sz="2862" b="1" dirty="0">
-                <a:solidFill>
-                  <a:srgbClr val="1A1A1A"/>
-                </a:solidFill>
-                <a:latin typeface="Playfair Display" pitchFamily="34" charset="0"/>
-                <a:ea typeface="Playfair Display" pitchFamily="34" charset="-122"/>
-                <a:cs typeface="Playfair Display" pitchFamily="34" charset="-120"/>
-              </a:rPr>
-              <a:t>lisait l'AO à votre place ?</a:t>
+              <a:t>La vision : et si une IA
+lisait l'AO à votre place ?</a:t>
             </a:r>
             <a:endParaRPr lang="en-US" sz="2862" dirty="0"/>
           </a:p>
@@ -5665,7 +5401,7 @@
           </a:bodyPr>
           <a:lstStyle/>
           <a:p>
-            <a:pPr algn="l" indent="0" marL="0">
+            <a:pPr marL="0" indent="0" algn="l">
               <a:lnSpc>
                 <a:spcPts val="1400"/>
               </a:lnSpc>
@@ -5710,17 +5446,24 @@
             <a:prstDash val="solid"/>
           </a:ln>
         </p:spPr>
+        <p:txBody>
+          <a:bodyPr/>
+          <a:lstStyle/>
+          <a:p>
+            <a:endParaRPr lang="fr-FR"/>
+          </a:p>
+        </p:txBody>
       </p:sp>
       <p:pic>
         <p:nvPicPr>
-          <p:cNvPr id="9" name="Image 1" descr="preencoded.png">    </p:cNvPr>
+          <p:cNvPr id="9" name="Image 1" descr="preencoded.png"/>
           <p:cNvPicPr>
             <a:picLocks noChangeAspect="1"/>
           </p:cNvPicPr>
           <p:nvPr/>
         </p:nvPicPr>
         <p:blipFill>
-          <a:blip r:embed="rId2"/>
+          <a:blip r:embed="rId4"/>
           <a:stretch>
             <a:fillRect/>
           </a:stretch>
@@ -5758,7 +5501,7 @@
           </a:bodyPr>
           <a:lstStyle/>
           <a:p>
-            <a:pPr algn="ctr" indent="0" marL="0">
+            <a:pPr marL="0" indent="0" algn="ctr">
               <a:lnSpc>
                 <a:spcPts val="1600"/>
               </a:lnSpc>
@@ -5802,7 +5545,7 @@
           </a:bodyPr>
           <a:lstStyle/>
           <a:p>
-            <a:pPr algn="ctr" indent="0" marL="0">
+            <a:pPr marL="0" indent="0" algn="ctr">
               <a:lnSpc>
                 <a:spcPts val="1100"/>
               </a:lnSpc>
@@ -5817,42 +5560,8 @@
                 <a:ea typeface="JetBrains Mono" pitchFamily="34" charset="-122"/>
                 <a:cs typeface="JetBrains Mono" pitchFamily="34" charset="-120"/>
               </a:rPr>
-              <a:t>Document PDF brut</a:t>
-            </a:r>
-            <a:pPr algn="ctr" indent="0" marL="0">
-              <a:lnSpc>
-                <a:spcPts val="1100"/>
-              </a:lnSpc>
-              <a:buNone/>
-            </a:pPr>
-            <a:r>
-              <a:rPr lang="en-US" sz="727" dirty="0">
-                <a:solidFill>
-                  <a:srgbClr val="666666"/>
-                </a:solidFill>
-                <a:latin typeface="JetBrains Mono" pitchFamily="34" charset="0"/>
-                <a:ea typeface="JetBrains Mono" pitchFamily="34" charset="-122"/>
-                <a:cs typeface="JetBrains Mono" pitchFamily="34" charset="-120"/>
-              </a:rPr>
-              <a:t>
-</a:t>
-            </a:r>
-            <a:pPr algn="ctr" indent="0" marL="0">
-              <a:lnSpc>
-                <a:spcPts val="1100"/>
-              </a:lnSpc>
-              <a:buNone/>
-            </a:pPr>
-            <a:r>
-              <a:rPr lang="en-US" sz="727" dirty="0">
-                <a:solidFill>
-                  <a:srgbClr val="666666"/>
-                </a:solidFill>
-                <a:latin typeface="JetBrains Mono" pitchFamily="34" charset="0"/>
-                <a:ea typeface="JetBrains Mono" pitchFamily="34" charset="-122"/>
-                <a:cs typeface="JetBrains Mono" pitchFamily="34" charset="-120"/>
-              </a:rPr>
-              <a:t>Cahier des charges</a:t>
+              <a:t>Document PDF brut
+Cahier des charges</a:t>
             </a:r>
             <a:endParaRPr lang="en-US" sz="727" dirty="0"/>
           </a:p>
@@ -5882,17 +5591,24 @@
             <a:prstDash val="solid"/>
           </a:ln>
         </p:spPr>
+        <p:txBody>
+          <a:bodyPr/>
+          <a:lstStyle/>
+          <a:p>
+            <a:endParaRPr lang="fr-FR"/>
+          </a:p>
+        </p:txBody>
       </p:sp>
       <p:pic>
         <p:nvPicPr>
-          <p:cNvPr id="13" name="Image 2" descr="preencoded.png">    </p:cNvPr>
+          <p:cNvPr id="13" name="Image 2" descr="preencoded.png"/>
           <p:cNvPicPr>
             <a:picLocks noChangeAspect="1"/>
           </p:cNvPicPr>
           <p:nvPr/>
         </p:nvPicPr>
         <p:blipFill>
-          <a:blip r:embed="rId3"/>
+          <a:blip r:embed="rId5"/>
           <a:stretch>
             <a:fillRect/>
           </a:stretch>
@@ -5930,7 +5646,7 @@
           </a:bodyPr>
           <a:lstStyle/>
           <a:p>
-            <a:pPr algn="ctr" indent="0" marL="0">
+            <a:pPr marL="0" indent="0" algn="ctr">
               <a:lnSpc>
                 <a:spcPts val="1600"/>
               </a:lnSpc>
@@ -5974,7 +5690,7 @@
           </a:bodyPr>
           <a:lstStyle/>
           <a:p>
-            <a:pPr algn="ctr" indent="0" marL="0">
+            <a:pPr marL="0" indent="0" algn="ctr">
               <a:lnSpc>
                 <a:spcPts val="1100"/>
               </a:lnSpc>
@@ -5991,46 +5707,8 @@
                 <a:ea typeface="JetBrains Mono" pitchFamily="34" charset="-122"/>
                 <a:cs typeface="JetBrains Mono" pitchFamily="34" charset="-120"/>
               </a:rPr>
-              <a:t>Analyse · Comprend · Rédige</a:t>
-            </a:r>
-            <a:pPr algn="ctr" indent="0" marL="0">
-              <a:lnSpc>
-                <a:spcPts val="1100"/>
-              </a:lnSpc>
-              <a:buNone/>
-            </a:pPr>
-            <a:r>
-              <a:rPr lang="en-US" sz="727" dirty="0">
-                <a:solidFill>
-                  <a:srgbClr val="FFFFFF">
-                    <a:alpha val="90000"/>
-                  </a:srgbClr>
-                </a:solidFill>
-                <a:latin typeface="JetBrains Mono" pitchFamily="34" charset="0"/>
-                <a:ea typeface="JetBrains Mono" pitchFamily="34" charset="-122"/>
-                <a:cs typeface="JetBrains Mono" pitchFamily="34" charset="-120"/>
-              </a:rPr>
-              <a:t>
-</a:t>
-            </a:r>
-            <a:pPr algn="ctr" indent="0" marL="0">
-              <a:lnSpc>
-                <a:spcPts val="1100"/>
-              </a:lnSpc>
-              <a:buNone/>
-            </a:pPr>
-            <a:r>
-              <a:rPr lang="en-US" sz="727" dirty="0">
-                <a:solidFill>
-                  <a:srgbClr val="FFFFFF">
-                    <a:alpha val="90000"/>
-                  </a:srgbClr>
-                </a:solidFill>
-                <a:latin typeface="JetBrains Mono" pitchFamily="34" charset="0"/>
-                <a:ea typeface="JetBrains Mono" pitchFamily="34" charset="-122"/>
-                <a:cs typeface="JetBrains Mono" pitchFamily="34" charset="-120"/>
-              </a:rPr>
-              <a:t>Extraction intelligente</a:t>
+              <a:t>Analyse · Comprend · Rédige
+Extraction intelligente</a:t>
             </a:r>
             <a:endParaRPr lang="en-US" sz="727" dirty="0"/>
           </a:p>
@@ -6060,17 +5738,24 @@
             <a:prstDash val="solid"/>
           </a:ln>
         </p:spPr>
+        <p:txBody>
+          <a:bodyPr/>
+          <a:lstStyle/>
+          <a:p>
+            <a:endParaRPr lang="fr-FR"/>
+          </a:p>
+        </p:txBody>
       </p:sp>
       <p:pic>
         <p:nvPicPr>
-          <p:cNvPr id="17" name="Image 3" descr="preencoded.png">    </p:cNvPr>
+          <p:cNvPr id="17" name="Image 3" descr="preencoded.png"/>
           <p:cNvPicPr>
             <a:picLocks noChangeAspect="1"/>
           </p:cNvPicPr>
           <p:nvPr/>
         </p:nvPicPr>
         <p:blipFill>
-          <a:blip r:embed="rId4"/>
+          <a:blip r:embed="rId6"/>
           <a:stretch>
             <a:fillRect/>
           </a:stretch>
@@ -6108,7 +5793,7 @@
           </a:bodyPr>
           <a:lstStyle/>
           <a:p>
-            <a:pPr algn="ctr" indent="0" marL="0">
+            <a:pPr marL="0" indent="0" algn="ctr">
               <a:lnSpc>
                 <a:spcPts val="1600"/>
               </a:lnSpc>
@@ -6152,7 +5837,7 @@
           </a:bodyPr>
           <a:lstStyle/>
           <a:p>
-            <a:pPr algn="ctr" indent="0" marL="0">
+            <a:pPr marL="0" indent="0" algn="ctr">
               <a:lnSpc>
                 <a:spcPts val="1100"/>
               </a:lnSpc>
@@ -6167,42 +5852,8 @@
                 <a:ea typeface="JetBrains Mono" pitchFamily="34" charset="-122"/>
                 <a:cs typeface="JetBrains Mono" pitchFamily="34" charset="-120"/>
               </a:rPr>
-              <a:t>Structurée &amp; Professionnelle</a:t>
-            </a:r>
-            <a:pPr algn="ctr" indent="0" marL="0">
-              <a:lnSpc>
-                <a:spcPts val="1100"/>
-              </a:lnSpc>
-              <a:buNone/>
-            </a:pPr>
-            <a:r>
-              <a:rPr lang="en-US" sz="727" dirty="0">
-                <a:solidFill>
-                  <a:srgbClr val="666666"/>
-                </a:solidFill>
-                <a:latin typeface="JetBrains Mono" pitchFamily="34" charset="0"/>
-                <a:ea typeface="JetBrains Mono" pitchFamily="34" charset="-122"/>
-                <a:cs typeface="JetBrains Mono" pitchFamily="34" charset="-120"/>
-              </a:rPr>
-              <a:t>
-</a:t>
-            </a:r>
-            <a:pPr algn="ctr" indent="0" marL="0">
-              <a:lnSpc>
-                <a:spcPts val="1100"/>
-              </a:lnSpc>
-              <a:buNone/>
-            </a:pPr>
-            <a:r>
-              <a:rPr lang="en-US" sz="727" dirty="0">
-                <a:solidFill>
-                  <a:srgbClr val="666666"/>
-                </a:solidFill>
-                <a:latin typeface="JetBrains Mono" pitchFamily="34" charset="0"/>
-                <a:ea typeface="JetBrains Mono" pitchFamily="34" charset="-122"/>
-                <a:cs typeface="JetBrains Mono" pitchFamily="34" charset="-120"/>
-              </a:rPr>
-              <a:t>Prête à soumettre</a:t>
+              <a:t>Structurée &amp; Professionnelle
+Prête à soumettre</a:t>
             </a:r>
             <a:endParaRPr lang="en-US" sz="727" dirty="0"/>
           </a:p>
@@ -6227,6 +5878,13 @@
           </a:solidFill>
           <a:ln/>
         </p:spPr>
+        <p:txBody>
+          <a:bodyPr/>
+          <a:lstStyle/>
+          <a:p>
+            <a:endParaRPr lang="fr-FR"/>
+          </a:p>
+        </p:txBody>
       </p:sp>
       <p:sp>
         <p:nvSpPr>
@@ -6251,7 +5909,7 @@
           </a:bodyPr>
           <a:lstStyle/>
           <a:p>
-            <a:pPr algn="ctr" indent="0" marL="0">
+            <a:pPr marL="0" indent="0" algn="ctr">
               <a:lnSpc>
                 <a:spcPts val="800"/>
               </a:lnSpc>
@@ -6293,6 +5951,13 @@
           </a:solidFill>
           <a:ln/>
         </p:spPr>
+        <p:txBody>
+          <a:bodyPr/>
+          <a:lstStyle/>
+          <a:p>
+            <a:endParaRPr lang="fr-FR"/>
+          </a:p>
+        </p:txBody>
       </p:sp>
       <p:sp>
         <p:nvSpPr>
@@ -6313,6 +5978,13 @@
           </a:solidFill>
           <a:ln/>
         </p:spPr>
+        <p:txBody>
+          <a:bodyPr/>
+          <a:lstStyle/>
+          <a:p>
+            <a:endParaRPr lang="fr-FR"/>
+          </a:p>
+        </p:txBody>
       </p:sp>
       <p:sp>
         <p:nvSpPr>
@@ -6337,18 +6009,12 @@
           </a:bodyPr>
           <a:lstStyle/>
           <a:p>
-            <a:pPr algn="l" indent="0" marL="0">
+            <a:pPr marL="0" indent="0" algn="l">
               <a:lnSpc>
                 <a:spcPts val="1400"/>
               </a:lnSpc>
               <a:buNone/>
             </a:pPr>
-            <a:pPr algn="l" indent="0" marL="0">
-              <a:lnSpc>
-                <a:spcPts val="1400"/>
-              </a:lnSpc>
-              <a:buNone/>
-            </a:pPr>
             <a:r>
               <a:rPr lang="en-US" sz="784" b="1" dirty="0">
                 <a:solidFill>
@@ -6360,12 +6026,6 @@
               </a:rPr>
               <a:t>OffrIA</a:t>
             </a:r>
-            <a:pPr algn="l" indent="0" marL="0">
-              <a:lnSpc>
-                <a:spcPts val="1400"/>
-              </a:lnSpc>
-              <a:buNone/>
-            </a:pPr>
             <a:r>
               <a:rPr lang="en-US" sz="834" dirty="0">
                 <a:solidFill>
@@ -6375,58 +6035,7 @@
                 <a:ea typeface="JetBrains Mono" pitchFamily="34" charset="-122"/>
                 <a:cs typeface="JetBrains Mono" pitchFamily="34" charset="-120"/>
               </a:rPr>
-              <a:t> est une plateforme d'IA générative spécialisée. </a:t>
-            </a:r>
-            <a:pPr algn="l" indent="0" marL="0">
-              <a:lnSpc>
-                <a:spcPts val="1400"/>
-              </a:lnSpc>
-              <a:buNone/>
-            </a:pPr>
-            <a:r>
-              <a:rPr lang="en-US" sz="834" dirty="0">
-                <a:solidFill>
-                  <a:srgbClr val="1A1A1A"/>
-                </a:solidFill>
-                <a:latin typeface="JetBrains Mono" pitchFamily="34" charset="0"/>
-                <a:ea typeface="JetBrains Mono" pitchFamily="34" charset="-122"/>
-                <a:cs typeface="JetBrains Mono" pitchFamily="34" charset="-120"/>
-              </a:rPr>
-              <a:t>Elle ne se contente pas de lire : elle comprend le </a:t>
-            </a:r>
-            <a:pPr algn="l" indent="0" marL="0">
-              <a:lnSpc>
-                <a:spcPts val="1400"/>
-              </a:lnSpc>
-              <a:buNone/>
-            </a:pPr>
-            <a:r>
-              <a:rPr lang="en-US" sz="834" dirty="0">
-                <a:solidFill>
-                  <a:srgbClr val="1A1A1A"/>
-                </a:solidFill>
-                <a:latin typeface="JetBrains Mono" pitchFamily="34" charset="0"/>
-                <a:ea typeface="JetBrains Mono" pitchFamily="34" charset="-122"/>
-                <a:cs typeface="JetBrains Mono" pitchFamily="34" charset="-120"/>
-              </a:rPr>
-              <a:t>contexte métier, les exigences techniques et les critères </a:t>
-            </a:r>
-            <a:pPr algn="l" indent="0" marL="0">
-              <a:lnSpc>
-                <a:spcPts val="1400"/>
-              </a:lnSpc>
-              <a:buNone/>
-            </a:pPr>
-            <a:r>
-              <a:rPr lang="en-US" sz="834" dirty="0">
-                <a:solidFill>
-                  <a:srgbClr val="1A1A1A"/>
-                </a:solidFill>
-                <a:latin typeface="JetBrains Mono" pitchFamily="34" charset="0"/>
-                <a:ea typeface="JetBrains Mono" pitchFamily="34" charset="-122"/>
-                <a:cs typeface="JetBrains Mono" pitchFamily="34" charset="-120"/>
-              </a:rPr>
-              <a:t>d'évaluation.</a:t>
+              <a:t> est une plateforme d'IA générative spécialisée. Elle ne se contente pas de lire : elle comprend le contexte métier, les exigences techniques et les critères d'évaluation.</a:t>
             </a:r>
             <a:endParaRPr lang="en-US" sz="834" dirty="0"/>
           </a:p>
@@ -6455,7 +6064,7 @@
           </a:bodyPr>
           <a:lstStyle/>
           <a:p>
-            <a:pPr algn="l" indent="0" marL="0">
+            <a:pPr marL="0" indent="0" algn="l">
               <a:lnSpc>
                 <a:spcPts val="1400"/>
               </a:lnSpc>
@@ -6472,12 +6081,6 @@
               </a:rPr>
               <a:t>Elle génère une réponse </a:t>
             </a:r>
-            <a:pPr algn="l" indent="0" marL="0">
-              <a:lnSpc>
-                <a:spcPts val="1400"/>
-              </a:lnSpc>
-              <a:buNone/>
-            </a:pPr>
             <a:r>
               <a:rPr lang="en-US" sz="784" b="1" dirty="0">
                 <a:solidFill>
@@ -6489,12 +6092,6 @@
               </a:rPr>
               <a:t>sur-mesure</a:t>
             </a:r>
-            <a:pPr algn="l" indent="0" marL="0">
-              <a:lnSpc>
-                <a:spcPts val="1400"/>
-              </a:lnSpc>
-              <a:buNone/>
-            </a:pPr>
             <a:r>
               <a:rPr lang="en-US" sz="834" dirty="0">
                 <a:solidFill>
@@ -6504,41 +6101,7 @@
                 <a:ea typeface="JetBrains Mono" pitchFamily="34" charset="-122"/>
                 <a:cs typeface="JetBrains Mono" pitchFamily="34" charset="-120"/>
               </a:rPr>
-              <a:t>, intégrant vos </a:t>
-            </a:r>
-            <a:pPr algn="l" indent="0" marL="0">
-              <a:lnSpc>
-                <a:spcPts val="1400"/>
-              </a:lnSpc>
-              <a:buNone/>
-            </a:pPr>
-            <a:r>
-              <a:rPr lang="en-US" sz="834" dirty="0">
-                <a:solidFill>
-                  <a:srgbClr val="1A1A1A"/>
-                </a:solidFill>
-                <a:latin typeface="JetBrains Mono" pitchFamily="34" charset="0"/>
-                <a:ea typeface="JetBrains Mono" pitchFamily="34" charset="-122"/>
-                <a:cs typeface="JetBrains Mono" pitchFamily="34" charset="-120"/>
-              </a:rPr>
-              <a:t>références et votre savoir-faire, structurée exactement </a:t>
-            </a:r>
-            <a:pPr algn="l" indent="0" marL="0">
-              <a:lnSpc>
-                <a:spcPts val="1400"/>
-              </a:lnSpc>
-              <a:buNone/>
-            </a:pPr>
-            <a:r>
-              <a:rPr lang="en-US" sz="834" dirty="0">
-                <a:solidFill>
-                  <a:srgbClr val="1A1A1A"/>
-                </a:solidFill>
-                <a:latin typeface="JetBrains Mono" pitchFamily="34" charset="0"/>
-                <a:ea typeface="JetBrains Mono" pitchFamily="34" charset="-122"/>
-                <a:cs typeface="JetBrains Mono" pitchFamily="34" charset="-120"/>
-              </a:rPr>
-              <a:t>selon les attentes du donneur d'ordre.</a:t>
+              <a:t>, intégrant vos références et votre savoir-faire, structurée exactement selon les attentes du donneur d'ordre.</a:t>
             </a:r>
             <a:endParaRPr lang="en-US" sz="834" dirty="0"/>
           </a:p>
@@ -6571,14 +6134,14 @@
       </p:grpSpPr>
       <p:pic>
         <p:nvPicPr>
-          <p:cNvPr id="3" name="Image 0" descr="preencoded.png">    </p:cNvPr>
+          <p:cNvPr id="3" name="Image 0" descr="preencoded.png"/>
           <p:cNvPicPr>
             <a:picLocks noChangeAspect="1"/>
           </p:cNvPicPr>
           <p:nvPr/>
         </p:nvPicPr>
         <p:blipFill>
-          <a:blip r:embed="rId1"/>
+          <a:blip r:embed="rId3"/>
           <a:stretch>
             <a:fillRect/>
           </a:stretch>
@@ -6614,6 +6177,13 @@
           </a:solidFill>
           <a:ln/>
         </p:spPr>
+        <p:txBody>
+          <a:bodyPr/>
+          <a:lstStyle/>
+          <a:p>
+            <a:endParaRPr lang="fr-FR"/>
+          </a:p>
+        </p:txBody>
       </p:sp>
       <p:sp>
         <p:nvSpPr>
@@ -6634,6 +6204,13 @@
           </a:solidFill>
           <a:ln/>
         </p:spPr>
+        <p:txBody>
+          <a:bodyPr/>
+          <a:lstStyle/>
+          <a:p>
+            <a:endParaRPr lang="fr-FR"/>
+          </a:p>
+        </p:txBody>
       </p:sp>
       <p:sp>
         <p:nvSpPr>
@@ -6658,7 +6235,7 @@
           </a:bodyPr>
           <a:lstStyle/>
           <a:p>
-            <a:pPr algn="l" indent="0" marL="0">
+            <a:pPr marL="0" indent="0" algn="l">
               <a:lnSpc>
                 <a:spcPts val="2400"/>
               </a:lnSpc>
@@ -6702,7 +6279,7 @@
           </a:bodyPr>
           <a:lstStyle/>
           <a:p>
-            <a:pPr algn="l" indent="0" marL="0">
+            <a:pPr marL="0" indent="0" algn="l">
               <a:lnSpc>
                 <a:spcPts val="1400"/>
               </a:lnSpc>
@@ -6746,7 +6323,7 @@
           </a:bodyPr>
           <a:lstStyle/>
           <a:p>
-            <a:pPr algn="l" indent="0" marL="0">
+            <a:pPr marL="0" indent="0" algn="l">
               <a:lnSpc>
                 <a:spcPts val="1000"/>
               </a:lnSpc>
@@ -6790,7 +6367,7 @@
           </a:bodyPr>
           <a:lstStyle/>
           <a:p>
-            <a:pPr algn="l" indent="0" marL="0">
+            <a:pPr marL="0" indent="0" algn="l">
               <a:lnSpc>
                 <a:spcPts val="1400"/>
               </a:lnSpc>
@@ -6834,7 +6411,7 @@
           </a:bodyPr>
           <a:lstStyle/>
           <a:p>
-            <a:pPr algn="l" indent="0" marL="0">
+            <a:pPr marL="0" indent="0" algn="l">
               <a:lnSpc>
                 <a:spcPts val="1000"/>
               </a:lnSpc>
@@ -6878,7 +6455,7 @@
           </a:bodyPr>
           <a:lstStyle/>
           <a:p>
-            <a:pPr algn="l" indent="0" marL="0">
+            <a:pPr marL="0" indent="0" algn="l">
               <a:lnSpc>
                 <a:spcPts val="1400"/>
               </a:lnSpc>
@@ -6922,7 +6499,7 @@
           </a:bodyPr>
           <a:lstStyle/>
           <a:p>
-            <a:pPr algn="l" indent="0" marL="0">
+            <a:pPr marL="0" indent="0" algn="l">
               <a:lnSpc>
                 <a:spcPts val="1000"/>
               </a:lnSpc>
@@ -6966,7 +6543,7 @@
           </a:bodyPr>
           <a:lstStyle/>
           <a:p>
-            <a:pPr algn="l" indent="0" marL="0">
+            <a:pPr marL="0" indent="0" algn="l">
               <a:lnSpc>
                 <a:spcPts val="1400"/>
               </a:lnSpc>
@@ -7010,7 +6587,7 @@
           </a:bodyPr>
           <a:lstStyle/>
           <a:p>
-            <a:pPr algn="l" indent="0" marL="0">
+            <a:pPr marL="0" indent="0" algn="l">
               <a:lnSpc>
                 <a:spcPts val="1000"/>
               </a:lnSpc>
@@ -7050,6 +6627,13 @@
           </a:solidFill>
           <a:ln/>
         </p:spPr>
+        <p:txBody>
+          <a:bodyPr/>
+          <a:lstStyle/>
+          <a:p>
+            <a:endParaRPr lang="fr-FR"/>
+          </a:p>
+        </p:txBody>
       </p:sp>
       <p:sp>
         <p:nvSpPr>
@@ -7074,14 +6658,14 @@
           </a:bodyPr>
           <a:lstStyle/>
           <a:p>
-            <a:pPr algn="l" indent="0" marL="0">
+            <a:pPr marL="0" indent="0" algn="l">
               <a:lnSpc>
                 <a:spcPts val="900"/>
               </a:lnSpc>
               <a:buNone/>
             </a:pPr>
             <a:r>
-              <a:rPr lang="en-US" sz="683" b="1" spc="1" kern="0" dirty="0">
+              <a:rPr lang="en-US" sz="683" b="1" kern="0" spc="1" dirty="0">
                 <a:solidFill>
                   <a:srgbClr val="FF4D4D"/>
                 </a:solidFill>
@@ -7118,7 +6702,7 @@
           </a:bodyPr>
           <a:lstStyle/>
           <a:p>
-            <a:pPr algn="l" indent="0" marL="0">
+            <a:pPr marL="0" indent="0" algn="l">
               <a:lnSpc>
                 <a:spcPts val="2200"/>
               </a:lnSpc>
@@ -7162,7 +6746,7 @@
           </a:bodyPr>
           <a:lstStyle/>
           <a:p>
-            <a:pPr algn="l" indent="0" marL="0">
+            <a:pPr marL="0" indent="0" algn="l">
               <a:lnSpc>
                 <a:spcPts val="900"/>
               </a:lnSpc>
@@ -7206,7 +6790,7 @@
           </a:bodyPr>
           <a:lstStyle/>
           <a:p>
-            <a:pPr algn="l" indent="0" marL="0">
+            <a:pPr marL="0" indent="0" algn="l">
               <a:lnSpc>
                 <a:spcPts val="900"/>
               </a:lnSpc>
@@ -7250,7 +6834,7 @@
           </a:bodyPr>
           <a:lstStyle/>
           <a:p>
-            <a:pPr algn="l" indent="0" marL="0">
+            <a:pPr marL="0" indent="0" algn="l">
               <a:lnSpc>
                 <a:spcPts val="900"/>
               </a:lnSpc>
@@ -7294,7 +6878,7 @@
           </a:bodyPr>
           <a:lstStyle/>
           <a:p>
-            <a:pPr algn="l" indent="0" marL="0">
+            <a:pPr marL="0" indent="0" algn="l">
               <a:lnSpc>
                 <a:spcPts val="900"/>
               </a:lnSpc>
@@ -7338,7 +6922,7 @@
           </a:bodyPr>
           <a:lstStyle/>
           <a:p>
-            <a:pPr algn="l" indent="0" marL="0">
+            <a:pPr marL="0" indent="0" algn="l">
               <a:lnSpc>
                 <a:spcPts val="900"/>
               </a:lnSpc>
@@ -7382,7 +6966,7 @@
           </a:bodyPr>
           <a:lstStyle/>
           <a:p>
-            <a:pPr algn="l" indent="0" marL="0">
+            <a:pPr marL="0" indent="0" algn="l">
               <a:lnSpc>
                 <a:spcPts val="900"/>
               </a:lnSpc>
@@ -7426,7 +7010,7 @@
           </a:bodyPr>
           <a:lstStyle/>
           <a:p>
-            <a:pPr algn="l" indent="0" marL="0">
+            <a:pPr marL="0" indent="0" algn="l">
               <a:lnSpc>
                 <a:spcPts val="900"/>
               </a:lnSpc>
@@ -7470,7 +7054,7 @@
           </a:bodyPr>
           <a:lstStyle/>
           <a:p>
-            <a:pPr algn="l" indent="0" marL="0">
+            <a:pPr marL="0" indent="0" algn="l">
               <a:lnSpc>
                 <a:spcPts val="900"/>
               </a:lnSpc>
@@ -7514,7 +7098,7 @@
           </a:bodyPr>
           <a:lstStyle/>
           <a:p>
-            <a:pPr algn="l" indent="0" marL="0">
+            <a:pPr marL="0" indent="0" algn="l">
               <a:lnSpc>
                 <a:spcPts val="900"/>
               </a:lnSpc>
@@ -7558,7 +7142,7 @@
           </a:bodyPr>
           <a:lstStyle/>
           <a:p>
-            <a:pPr algn="l" indent="0" marL="0">
+            <a:pPr marL="0" indent="0" algn="l">
               <a:lnSpc>
                 <a:spcPts val="900"/>
               </a:lnSpc>
@@ -7602,7 +7186,7 @@
           </a:bodyPr>
           <a:lstStyle/>
           <a:p>
-            <a:pPr algn="l" indent="0" marL="0">
+            <a:pPr marL="0" indent="0" algn="l">
               <a:lnSpc>
                 <a:spcPts val="900"/>
               </a:lnSpc>
@@ -7632,7 +7216,7 @@
         <p:spPr>
           <a:xfrm>
             <a:off x="6529388" y="3571875"/>
-            <a:ext cx="2185988" cy="557213"/>
+            <a:ext cx="2185988" cy="570028"/>
           </a:xfrm>
           <a:prstGeom prst="rect">
             <a:avLst/>
@@ -7646,7 +7230,7 @@
           </a:bodyPr>
           <a:lstStyle/>
           <a:p>
-            <a:pPr algn="l" indent="0" marL="0">
+            <a:pPr marL="0" indent="0" algn="l">
               <a:lnSpc>
                 <a:spcPts val="900"/>
               </a:lnSpc>
@@ -7661,9 +7245,53 @@
                 <a:ea typeface="JetBrains Mono" pitchFamily="34" charset="-122"/>
                 <a:cs typeface="JetBrains Mono" pitchFamily="34" charset="-120"/>
               </a:rPr>
-              <a:t>Souveraineté des données, hébergement EU</a:t>
-            </a:r>
-            <a:endParaRPr lang="en-US" sz="727" dirty="0"/>
+              <a:t>Souveraineté des données, </a:t>
+            </a:r>
+            <a:r>
+              <a:rPr lang="en-US" sz="727" dirty="0" err="1">
+                <a:solidFill>
+                  <a:srgbClr val="1A1A1A"/>
+                </a:solidFill>
+                <a:latin typeface="JetBrains Mono" pitchFamily="34" charset="0"/>
+                <a:ea typeface="JetBrains Mono" pitchFamily="34" charset="-122"/>
+                <a:cs typeface="JetBrains Mono" pitchFamily="34" charset="-120"/>
+              </a:rPr>
+              <a:t>hébergement</a:t>
+            </a:r>
+            <a:r>
+              <a:rPr lang="en-US" sz="727" dirty="0">
+                <a:solidFill>
+                  <a:srgbClr val="1A1A1A"/>
+                </a:solidFill>
+                <a:latin typeface="JetBrains Mono" pitchFamily="34" charset="0"/>
+                <a:ea typeface="JetBrains Mono" pitchFamily="34" charset="-122"/>
+                <a:cs typeface="JetBrains Mono" pitchFamily="34" charset="-120"/>
+              </a:rPr>
+              <a:t> EU, </a:t>
+            </a:r>
+            <a:r>
+              <a:rPr lang="en-US" sz="727" b="1" i="1" dirty="0" err="1">
+                <a:solidFill>
+                  <a:srgbClr val="1A1A1A"/>
+                </a:solidFill>
+                <a:latin typeface="JetBrains Mono" pitchFamily="34" charset="0"/>
+                <a:ea typeface="JetBrains Mono" pitchFamily="34" charset="-122"/>
+                <a:cs typeface="JetBrains Mono" pitchFamily="34" charset="-120"/>
+              </a:rPr>
+              <a:t>Partenaire</a:t>
+            </a:r>
+            <a:r>
+              <a:rPr lang="en-US" sz="727" b="1" i="1" dirty="0">
+                <a:solidFill>
+                  <a:srgbClr val="1A1A1A"/>
+                </a:solidFill>
+                <a:latin typeface="JetBrains Mono" pitchFamily="34" charset="0"/>
+                <a:ea typeface="JetBrains Mono" pitchFamily="34" charset="-122"/>
+                <a:cs typeface="JetBrains Mono" pitchFamily="34" charset="-120"/>
+              </a:rPr>
+              <a:t> du Maroc</a:t>
+            </a:r>
+            <a:endParaRPr lang="en-US" sz="727" b="1" i="1" dirty="0"/>
           </a:p>
         </p:txBody>
       </p:sp>
@@ -7694,441 +7322,7 @@
       </p:grpSpPr>
       <p:pic>
         <p:nvPicPr>
-          <p:cNvPr id="3" name="Image 0" descr="preencoded.png">    </p:cNvPr>
-          <p:cNvPicPr>
-            <a:picLocks noChangeAspect="1"/>
-          </p:cNvPicPr>
-          <p:nvPr/>
-        </p:nvPicPr>
-        <p:blipFill>
-          <a:blip r:embed="rId1"/>
-          <a:stretch>
-            <a:fillRect/>
-          </a:stretch>
-        </p:blipFill>
-        <p:spPr>
-          <a:xfrm>
-            <a:off x="0" y="0"/>
-            <a:ext cx="9144000" cy="5183125"/>
-          </a:xfrm>
-          <a:prstGeom prst="rect">
-            <a:avLst/>
-          </a:prstGeom>
-        </p:spPr>
-      </p:pic>
-      <p:sp>
-        <p:nvSpPr>
-          <p:cNvPr id="4" name="Shape 0"/>
-          <p:cNvSpPr/>
-          <p:nvPr/>
-        </p:nvSpPr>
-        <p:spPr>
-          <a:xfrm>
-            <a:off x="428625" y="428625"/>
-            <a:ext cx="8286750" cy="768288"/>
-          </a:xfrm>
-          <a:prstGeom prst="rect">
-            <a:avLst/>
-          </a:prstGeom>
-          <a:solidFill>
-            <a:srgbClr val="000000">
-              <a:alpha val="0"/>
-            </a:srgbClr>
-          </a:solidFill>
-          <a:ln/>
-        </p:spPr>
-      </p:sp>
-      <p:sp>
-        <p:nvSpPr>
-          <p:cNvPr id="5" name="Shape 1"/>
-          <p:cNvSpPr/>
-          <p:nvPr/>
-        </p:nvSpPr>
-        <p:spPr>
-          <a:xfrm>
-            <a:off x="428625" y="1189769"/>
-            <a:ext cx="8286750" cy="7144"/>
-          </a:xfrm>
-          <a:prstGeom prst="rect">
-            <a:avLst/>
-          </a:prstGeom>
-          <a:solidFill>
-            <a:srgbClr val="E5E5E5"/>
-          </a:solidFill>
-          <a:ln/>
-        </p:spPr>
-      </p:sp>
-      <p:sp>
-        <p:nvSpPr>
-          <p:cNvPr id="6" name="Text 2"/>
-          <p:cNvSpPr/>
-          <p:nvPr/>
-        </p:nvSpPr>
-        <p:spPr>
-          <a:xfrm>
-            <a:off x="428625" y="428625"/>
-            <a:ext cx="8286750" cy="377168"/>
-          </a:xfrm>
-          <a:prstGeom prst="rect">
-            <a:avLst/>
-          </a:prstGeom>
-          <a:noFill/>
-          <a:ln/>
-        </p:spPr>
-        <p:txBody>
-          <a:bodyPr wrap="none" lIns="0" tIns="0" rIns="0" bIns="0" rtlCol="0" anchor="t">
-            <a:spAutoFit/>
-          </a:bodyPr>
-          <a:lstStyle/>
-          <a:p>
-            <a:pPr algn="l" indent="0" marL="0">
-              <a:lnSpc>
-                <a:spcPts val="3000"/>
-              </a:lnSpc>
-              <a:buNone/>
-            </a:pPr>
-            <a:r>
-              <a:rPr lang="en-US" sz="2436" b="1" dirty="0">
-                <a:solidFill>
-                  <a:srgbClr val="1A1A1A"/>
-                </a:solidFill>
-                <a:latin typeface="Playfair Display" pitchFamily="34" charset="0"/>
-                <a:ea typeface="Playfair Display" pitchFamily="34" charset="-122"/>
-                <a:cs typeface="Playfair Display" pitchFamily="34" charset="-120"/>
-              </a:rPr>
-              <a:t>Pourquoi OffrIA ?</a:t>
-            </a:r>
-            <a:endParaRPr lang="en-US" sz="2436" dirty="0"/>
-          </a:p>
-        </p:txBody>
-      </p:sp>
-      <p:sp>
-        <p:nvSpPr>
-          <p:cNvPr id="7" name="Text 3"/>
-          <p:cNvSpPr/>
-          <p:nvPr/>
-        </p:nvSpPr>
-        <p:spPr>
-          <a:xfrm>
-            <a:off x="428625" y="877230"/>
-            <a:ext cx="2518172" cy="169664"/>
-          </a:xfrm>
-          <a:prstGeom prst="rect">
-            <a:avLst/>
-          </a:prstGeom>
-          <a:noFill/>
-          <a:ln/>
-        </p:spPr>
-        <p:txBody>
-          <a:bodyPr wrap="none" lIns="0" tIns="0" rIns="0" bIns="0" rtlCol="0" anchor="t">
-            <a:spAutoFit/>
-          </a:bodyPr>
-          <a:lstStyle/>
-          <a:p>
-            <a:pPr algn="l" indent="0" marL="0">
-              <a:lnSpc>
-                <a:spcPts val="1200"/>
-              </a:lnSpc>
-              <a:buNone/>
-            </a:pPr>
-            <a:r>
-              <a:rPr lang="en-US" sz="942" spc="1" kern="0" dirty="0">
-                <a:solidFill>
-                  <a:srgbClr val="666666"/>
-                </a:solidFill>
-                <a:latin typeface="JetBrains Mono" pitchFamily="34" charset="0"/>
-                <a:ea typeface="JetBrains Mono" pitchFamily="34" charset="-122"/>
-                <a:cs typeface="JetBrains Mono" pitchFamily="34" charset="-120"/>
-              </a:rPr>
-              <a:t>UNE LONGUEUR D'AVANCE DÉCISIVE</a:t>
-            </a:r>
-            <a:endParaRPr lang="en-US" sz="942" dirty="0"/>
-          </a:p>
-        </p:txBody>
-      </p:sp>
-      <p:sp>
-        <p:nvSpPr>
-          <p:cNvPr id="8" name="Text 4"/>
-          <p:cNvSpPr/>
-          <p:nvPr/>
-        </p:nvSpPr>
-        <p:spPr>
-          <a:xfrm>
-            <a:off x="428625" y="1304069"/>
-            <a:ext cx="3314700" cy="371475"/>
-          </a:xfrm>
-          <a:prstGeom prst="rect">
-            <a:avLst/>
-          </a:prstGeom>
-          <a:noFill/>
-          <a:ln/>
-        </p:spPr>
-        <p:txBody>
-          <a:bodyPr wrap="square" lIns="170053" tIns="127508" rIns="170053" bIns="127508" rtlCol="0" anchor="ctr">
-            <a:spAutoFit/>
-          </a:bodyPr>
-          <a:lstStyle/>
-          <a:p>
-            <a:pPr algn="l" indent="0" marL="0">
-              <a:lnSpc>
-                <a:spcPts val="1100"/>
-              </a:lnSpc>
-              <a:buNone/>
-            </a:pPr>
-            <a:r>
-              <a:rPr lang="en-US" sz="784" b="1" dirty="0">
-                <a:solidFill>
-                  <a:srgbClr val="999999"/>
-                </a:solidFill>
-                <a:latin typeface="JetBrains Mono" pitchFamily="34" charset="0"/>
-                <a:ea typeface="JetBrains Mono" pitchFamily="34" charset="-122"/>
-                <a:cs typeface="JetBrains Mono" pitchFamily="34" charset="-120"/>
-              </a:rPr>
-              <a:t>FONCTIONNALITÉ</a:t>
-            </a:r>
-            <a:endParaRPr lang="en-US" sz="784" dirty="0"/>
-          </a:p>
-        </p:txBody>
-      </p:sp>
-      <p:sp>
-        <p:nvSpPr>
-          <p:cNvPr id="9" name="Text 5"/>
-          <p:cNvSpPr/>
-          <p:nvPr/>
-        </p:nvSpPr>
-        <p:spPr>
-          <a:xfrm>
-            <a:off x="3743325" y="1304069"/>
-            <a:ext cx="2486025" cy="371475"/>
-          </a:xfrm>
-          <a:prstGeom prst="rect">
-            <a:avLst/>
-          </a:prstGeom>
-          <a:noFill/>
-          <a:ln/>
-        </p:spPr>
-        <p:txBody>
-          <a:bodyPr wrap="square" lIns="170053" tIns="127508" rIns="170053" bIns="127508" rtlCol="0" anchor="ctr">
-            <a:spAutoFit/>
-          </a:bodyPr>
-          <a:lstStyle/>
-          <a:p>
-            <a:pPr algn="ctr" indent="0" marL="0">
-              <a:lnSpc>
-                <a:spcPts val="1100"/>
-              </a:lnSpc>
-              <a:buNone/>
-            </a:pPr>
-            <a:r>
-              <a:rPr lang="en-US" sz="784" b="1" dirty="0">
-                <a:solidFill>
-                  <a:srgbClr val="999999"/>
-                </a:solidFill>
-                <a:latin typeface="JetBrains Mono" pitchFamily="34" charset="0"/>
-                <a:ea typeface="JetBrains Mono" pitchFamily="34" charset="-122"/>
-                <a:cs typeface="JetBrains Mono" pitchFamily="34" charset="-120"/>
-              </a:rPr>
-              <a:t>CONCURRENTS</a:t>
-            </a:r>
-            <a:endParaRPr lang="en-US" sz="784" dirty="0"/>
-          </a:p>
-        </p:txBody>
-      </p:sp>
-      <p:sp>
-        <p:nvSpPr>
-          <p:cNvPr id="10" name="Shape 6"/>
-          <p:cNvSpPr/>
-          <p:nvPr/>
-        </p:nvSpPr>
-        <p:spPr>
-          <a:xfrm>
-            <a:off x="6229350" y="1304069"/>
-            <a:ext cx="2486025" cy="371475"/>
-          </a:xfrm>
-          <a:prstGeom prst="rect">
-            <a:avLst/>
-          </a:prstGeom>
-          <a:solidFill>
-            <a:srgbClr val="FAFAFA"/>
-          </a:solidFill>
-          <a:ln/>
-        </p:spPr>
-      </p:sp>
-      <p:sp>
-        <p:nvSpPr>
-          <p:cNvPr id="11" name="Shape 7"/>
-          <p:cNvSpPr/>
-          <p:nvPr/>
-        </p:nvSpPr>
-        <p:spPr>
-          <a:xfrm>
-            <a:off x="6229350" y="1661257"/>
-            <a:ext cx="2486025" cy="14288"/>
-          </a:xfrm>
-          <a:prstGeom prst="rect">
-            <a:avLst/>
-          </a:prstGeom>
-          <a:solidFill>
-            <a:srgbClr val="1A1A1A"/>
-          </a:solidFill>
-          <a:ln/>
-        </p:spPr>
-      </p:sp>
-      <p:sp>
-        <p:nvSpPr>
-          <p:cNvPr id="12" name="Text 8"/>
-          <p:cNvSpPr/>
-          <p:nvPr/>
-        </p:nvSpPr>
-        <p:spPr>
-          <a:xfrm>
-            <a:off x="6229350" y="1304069"/>
-            <a:ext cx="2486025" cy="371475"/>
-          </a:xfrm>
-          <a:prstGeom prst="rect">
-            <a:avLst/>
-          </a:prstGeom>
-          <a:noFill/>
-          <a:ln/>
-        </p:spPr>
-        <p:txBody>
-          <a:bodyPr wrap="square" lIns="170053" tIns="127508" rIns="170053" bIns="127508" rtlCol="0" anchor="ctr">
-            <a:spAutoFit/>
-          </a:bodyPr>
-          <a:lstStyle/>
-          <a:p>
-            <a:pPr algn="ctr" indent="0" marL="0">
-              <a:lnSpc>
-                <a:spcPts val="1100"/>
-              </a:lnSpc>
-              <a:buNone/>
-            </a:pPr>
-            <a:r>
-              <a:rPr lang="en-US" sz="784" b="1" dirty="0">
-                <a:solidFill>
-                  <a:srgbClr val="FF4D4D"/>
-                </a:solidFill>
-                <a:latin typeface="JetBrains Mono" pitchFamily="34" charset="0"/>
-                <a:ea typeface="JetBrains Mono" pitchFamily="34" charset="-122"/>
-                <a:cs typeface="JetBrains Mono" pitchFamily="34" charset="-120"/>
-              </a:rPr>
-              <a:t>OFFRIA</a:t>
-            </a:r>
-            <a:endParaRPr lang="en-US" sz="784" dirty="0"/>
-          </a:p>
-        </p:txBody>
-      </p:sp>
-      <p:sp>
-        <p:nvSpPr>
-          <p:cNvPr id="13" name="Text 9"/>
-          <p:cNvSpPr/>
-          <p:nvPr/>
-        </p:nvSpPr>
-        <p:spPr>
-          <a:xfrm>
-            <a:off x="428625" y="1675544"/>
-            <a:ext cx="3314700" cy="394692"/>
-          </a:xfrm>
-          <a:prstGeom prst="rect">
-            <a:avLst/>
-          </a:prstGeom>
-          <a:noFill/>
-          <a:ln/>
-        </p:spPr>
-        <p:txBody>
-          <a:bodyPr wrap="square" lIns="170053" tIns="127508" rIns="170053" bIns="127508" rtlCol="0" anchor="ctr">
-            <a:spAutoFit/>
-          </a:bodyPr>
-          <a:lstStyle/>
-          <a:p>
-            <a:pPr algn="l" indent="0" marL="0">
-              <a:lnSpc>
-                <a:spcPts val="1200"/>
-              </a:lnSpc>
-              <a:buNone/>
-            </a:pPr>
-            <a:r>
-              <a:rPr lang="en-US" sz="942" dirty="0">
-                <a:solidFill>
-                  <a:srgbClr val="1A1A1A"/>
-                </a:solidFill>
-                <a:latin typeface="JetBrains Mono" pitchFamily="34" charset="0"/>
-                <a:ea typeface="JetBrains Mono" pitchFamily="34" charset="-122"/>
-                <a:cs typeface="JetBrains Mono" pitchFamily="34" charset="-120"/>
-              </a:rPr>
-              <a:t>Multi-provider LLM</a:t>
-            </a:r>
-            <a:endParaRPr lang="en-US" sz="942" dirty="0"/>
-          </a:p>
-        </p:txBody>
-      </p:sp>
-      <p:pic>
-        <p:nvPicPr>
-          <p:cNvPr id="14" name="Image 1" descr="preencoded.png">    </p:cNvPr>
-          <p:cNvPicPr>
-            <a:picLocks noChangeAspect="1"/>
-          </p:cNvPicPr>
-          <p:nvPr/>
-        </p:nvPicPr>
-        <p:blipFill>
-          <a:blip r:embed="rId2"/>
-          <a:stretch>
-            <a:fillRect/>
-          </a:stretch>
-        </p:blipFill>
-        <p:spPr>
-          <a:xfrm>
-            <a:off x="4955084" y="1832707"/>
-            <a:ext cx="62508" cy="100013"/>
-          </a:xfrm>
-          <a:prstGeom prst="rect">
-            <a:avLst/>
-          </a:prstGeom>
-        </p:spPr>
-      </p:pic>
-      <p:sp>
-        <p:nvSpPr>
-          <p:cNvPr id="15" name="Shape 10"/>
-          <p:cNvSpPr/>
-          <p:nvPr/>
-        </p:nvSpPr>
-        <p:spPr>
-          <a:xfrm>
-            <a:off x="6229350" y="1675544"/>
-            <a:ext cx="2486025" cy="394692"/>
-          </a:xfrm>
-          <a:prstGeom prst="rect">
-            <a:avLst/>
-          </a:prstGeom>
-          <a:solidFill>
-            <a:srgbClr val="FAFAFA"/>
-          </a:solidFill>
-          <a:ln/>
-        </p:spPr>
-      </p:sp>
-      <p:sp>
-        <p:nvSpPr>
-          <p:cNvPr id="16" name="Shape 11"/>
-          <p:cNvSpPr/>
-          <p:nvPr/>
-        </p:nvSpPr>
-        <p:spPr>
-          <a:xfrm>
-            <a:off x="6229350" y="2063093"/>
-            <a:ext cx="2486025" cy="7144"/>
-          </a:xfrm>
-          <a:prstGeom prst="rect">
-            <a:avLst/>
-          </a:prstGeom>
-          <a:solidFill>
-            <a:srgbClr val="E5E5E5"/>
-          </a:solidFill>
-          <a:ln/>
-        </p:spPr>
-      </p:sp>
-      <p:pic>
-        <p:nvPicPr>
-          <p:cNvPr id="17" name="Image 2" descr="preencoded.png">    </p:cNvPr>
+          <p:cNvPr id="3" name="Image 0" descr="preencoded.png"/>
           <p:cNvPicPr>
             <a:picLocks noChangeAspect="1"/>
           </p:cNvPicPr>
@@ -8142,8 +7336,8 @@
         </p:blipFill>
         <p:spPr>
           <a:xfrm>
-            <a:off x="7408069" y="1805918"/>
-            <a:ext cx="128588" cy="128588"/>
+            <a:off x="0" y="0"/>
+            <a:ext cx="9144000" cy="5183125"/>
           </a:xfrm>
           <a:prstGeom prst="rect">
             <a:avLst/>
@@ -8152,14 +7346,158 @@
       </p:pic>
       <p:sp>
         <p:nvSpPr>
-          <p:cNvPr id="18" name="Text 12"/>
-          <p:cNvSpPr/>
-          <p:nvPr/>
-        </p:nvSpPr>
-        <p:spPr>
-          <a:xfrm>
-            <a:off x="428625" y="2070236"/>
-            <a:ext cx="3314700" cy="391120"/>
+          <p:cNvPr id="4" name="Shape 0"/>
+          <p:cNvSpPr/>
+          <p:nvPr/>
+        </p:nvSpPr>
+        <p:spPr>
+          <a:xfrm>
+            <a:off x="428625" y="428625"/>
+            <a:ext cx="8286750" cy="768288"/>
+          </a:xfrm>
+          <a:prstGeom prst="rect">
+            <a:avLst/>
+          </a:prstGeom>
+          <a:solidFill>
+            <a:srgbClr val="000000">
+              <a:alpha val="0"/>
+            </a:srgbClr>
+          </a:solidFill>
+          <a:ln/>
+        </p:spPr>
+        <p:txBody>
+          <a:bodyPr/>
+          <a:lstStyle/>
+          <a:p>
+            <a:endParaRPr lang="fr-FR"/>
+          </a:p>
+        </p:txBody>
+      </p:sp>
+      <p:sp>
+        <p:nvSpPr>
+          <p:cNvPr id="5" name="Shape 1"/>
+          <p:cNvSpPr/>
+          <p:nvPr/>
+        </p:nvSpPr>
+        <p:spPr>
+          <a:xfrm>
+            <a:off x="428625" y="1189769"/>
+            <a:ext cx="8286750" cy="7144"/>
+          </a:xfrm>
+          <a:prstGeom prst="rect">
+            <a:avLst/>
+          </a:prstGeom>
+          <a:solidFill>
+            <a:srgbClr val="E5E5E5"/>
+          </a:solidFill>
+          <a:ln/>
+        </p:spPr>
+        <p:txBody>
+          <a:bodyPr/>
+          <a:lstStyle/>
+          <a:p>
+            <a:endParaRPr lang="fr-FR"/>
+          </a:p>
+        </p:txBody>
+      </p:sp>
+      <p:sp>
+        <p:nvSpPr>
+          <p:cNvPr id="6" name="Text 2"/>
+          <p:cNvSpPr/>
+          <p:nvPr/>
+        </p:nvSpPr>
+        <p:spPr>
+          <a:xfrm>
+            <a:off x="428625" y="428625"/>
+            <a:ext cx="8286750" cy="377168"/>
+          </a:xfrm>
+          <a:prstGeom prst="rect">
+            <a:avLst/>
+          </a:prstGeom>
+          <a:noFill/>
+          <a:ln/>
+        </p:spPr>
+        <p:txBody>
+          <a:bodyPr wrap="none" lIns="0" tIns="0" rIns="0" bIns="0" rtlCol="0" anchor="t">
+            <a:spAutoFit/>
+          </a:bodyPr>
+          <a:lstStyle/>
+          <a:p>
+            <a:pPr marL="0" indent="0" algn="l">
+              <a:lnSpc>
+                <a:spcPts val="3000"/>
+              </a:lnSpc>
+              <a:buNone/>
+            </a:pPr>
+            <a:r>
+              <a:rPr lang="en-US" sz="2436" b="1" dirty="0">
+                <a:solidFill>
+                  <a:srgbClr val="1A1A1A"/>
+                </a:solidFill>
+                <a:latin typeface="Playfair Display" pitchFamily="34" charset="0"/>
+                <a:ea typeface="Playfair Display" pitchFamily="34" charset="-122"/>
+                <a:cs typeface="Playfair Display" pitchFamily="34" charset="-120"/>
+              </a:rPr>
+              <a:t>Pourquoi OffrIA ?</a:t>
+            </a:r>
+            <a:endParaRPr lang="en-US" sz="2436" dirty="0"/>
+          </a:p>
+        </p:txBody>
+      </p:sp>
+      <p:sp>
+        <p:nvSpPr>
+          <p:cNvPr id="7" name="Text 3"/>
+          <p:cNvSpPr/>
+          <p:nvPr/>
+        </p:nvSpPr>
+        <p:spPr>
+          <a:xfrm>
+            <a:off x="428625" y="877230"/>
+            <a:ext cx="2518172" cy="169664"/>
+          </a:xfrm>
+          <a:prstGeom prst="rect">
+            <a:avLst/>
+          </a:prstGeom>
+          <a:noFill/>
+          <a:ln/>
+        </p:spPr>
+        <p:txBody>
+          <a:bodyPr wrap="none" lIns="0" tIns="0" rIns="0" bIns="0" rtlCol="0" anchor="t">
+            <a:spAutoFit/>
+          </a:bodyPr>
+          <a:lstStyle/>
+          <a:p>
+            <a:pPr marL="0" indent="0" algn="l">
+              <a:lnSpc>
+                <a:spcPts val="1200"/>
+              </a:lnSpc>
+              <a:buNone/>
+            </a:pPr>
+            <a:r>
+              <a:rPr lang="en-US" sz="942" kern="0" spc="1" dirty="0">
+                <a:solidFill>
+                  <a:srgbClr val="666666"/>
+                </a:solidFill>
+                <a:latin typeface="JetBrains Mono" pitchFamily="34" charset="0"/>
+                <a:ea typeface="JetBrains Mono" pitchFamily="34" charset="-122"/>
+                <a:cs typeface="JetBrains Mono" pitchFamily="34" charset="-120"/>
+              </a:rPr>
+              <a:t>UNE LONGUEUR D'AVANCE DÉCISIVE</a:t>
+            </a:r>
+            <a:endParaRPr lang="en-US" sz="942" dirty="0"/>
+          </a:p>
+        </p:txBody>
+      </p:sp>
+      <p:sp>
+        <p:nvSpPr>
+          <p:cNvPr id="8" name="Text 4"/>
+          <p:cNvSpPr/>
+          <p:nvPr/>
+        </p:nvSpPr>
+        <p:spPr>
+          <a:xfrm>
+            <a:off x="428625" y="1304069"/>
+            <a:ext cx="3314700" cy="371475"/>
           </a:xfrm>
           <a:prstGeom prst="rect">
             <a:avLst/>
@@ -8173,37 +7511,37 @@
           </a:bodyPr>
           <a:lstStyle/>
           <a:p>
-            <a:pPr algn="l" indent="0" marL="0">
-              <a:lnSpc>
-                <a:spcPts val="1200"/>
-              </a:lnSpc>
-              <a:buNone/>
-            </a:pPr>
-            <a:r>
-              <a:rPr lang="en-US" sz="942" dirty="0">
-                <a:solidFill>
-                  <a:srgbClr val="1A1A1A"/>
-                </a:solidFill>
-                <a:latin typeface="JetBrains Mono" pitchFamily="34" charset="0"/>
-                <a:ea typeface="JetBrains Mono" pitchFamily="34" charset="-122"/>
-                <a:cs typeface="JetBrains Mono" pitchFamily="34" charset="-120"/>
-              </a:rPr>
-              <a:t>Parsing AO automatique</a:t>
-            </a:r>
-            <a:endParaRPr lang="en-US" sz="942" dirty="0"/>
-          </a:p>
-        </p:txBody>
-      </p:sp>
-      <p:sp>
-        <p:nvSpPr>
-          <p:cNvPr id="19" name="Text 13"/>
-          <p:cNvSpPr/>
-          <p:nvPr/>
-        </p:nvSpPr>
-        <p:spPr>
-          <a:xfrm>
-            <a:off x="3743325" y="2070236"/>
-            <a:ext cx="2486025" cy="391120"/>
+            <a:pPr marL="0" indent="0" algn="l">
+              <a:lnSpc>
+                <a:spcPts val="1100"/>
+              </a:lnSpc>
+              <a:buNone/>
+            </a:pPr>
+            <a:r>
+              <a:rPr lang="en-US" sz="784" b="1" dirty="0">
+                <a:solidFill>
+                  <a:srgbClr val="999999"/>
+                </a:solidFill>
+                <a:latin typeface="JetBrains Mono" pitchFamily="34" charset="0"/>
+                <a:ea typeface="JetBrains Mono" pitchFamily="34" charset="-122"/>
+                <a:cs typeface="JetBrains Mono" pitchFamily="34" charset="-120"/>
+              </a:rPr>
+              <a:t>FONCTIONNALITÉ</a:t>
+            </a:r>
+            <a:endParaRPr lang="en-US" sz="784" dirty="0"/>
+          </a:p>
+        </p:txBody>
+      </p:sp>
+      <p:sp>
+        <p:nvSpPr>
+          <p:cNvPr id="9" name="Text 5"/>
+          <p:cNvSpPr/>
+          <p:nvPr/>
+        </p:nvSpPr>
+        <p:spPr>
+          <a:xfrm>
+            <a:off x="3743325" y="1304069"/>
+            <a:ext cx="2486025" cy="371475"/>
           </a:xfrm>
           <a:prstGeom prst="rect">
             <a:avLst/>
@@ -8217,14 +7555,14 @@
           </a:bodyPr>
           <a:lstStyle/>
           <a:p>
-            <a:pPr algn="ctr" indent="0" marL="0">
-              <a:lnSpc>
-                <a:spcPts val="1200"/>
-              </a:lnSpc>
-              <a:buNone/>
-            </a:pPr>
-            <a:r>
-              <a:rPr lang="en-US" sz="942" dirty="0">
+            <a:pPr marL="0" indent="0" algn="ctr">
+              <a:lnSpc>
+                <a:spcPts val="1100"/>
+              </a:lnSpc>
+              <a:buNone/>
+            </a:pPr>
+            <a:r>
+              <a:rPr lang="en-US" sz="784" b="1" dirty="0">
                 <a:solidFill>
                   <a:srgbClr val="999999"/>
                 </a:solidFill>
@@ -8232,22 +7570,22 @@
                 <a:ea typeface="JetBrains Mono" pitchFamily="34" charset="-122"/>
                 <a:cs typeface="JetBrains Mono" pitchFamily="34" charset="-120"/>
               </a:rPr>
-              <a:t>Partiel</a:t>
-            </a:r>
-            <a:endParaRPr lang="en-US" sz="942" dirty="0"/>
-          </a:p>
-        </p:txBody>
-      </p:sp>
-      <p:sp>
-        <p:nvSpPr>
-          <p:cNvPr id="20" name="Shape 14"/>
-          <p:cNvSpPr/>
-          <p:nvPr/>
-        </p:nvSpPr>
-        <p:spPr>
-          <a:xfrm>
-            <a:off x="6229350" y="2070236"/>
-            <a:ext cx="2486025" cy="391120"/>
+              <a:t>CONCURRENTS</a:t>
+            </a:r>
+            <a:endParaRPr lang="en-US" sz="784" dirty="0"/>
+          </a:p>
+        </p:txBody>
+      </p:sp>
+      <p:sp>
+        <p:nvSpPr>
+          <p:cNvPr id="10" name="Shape 6"/>
+          <p:cNvSpPr/>
+          <p:nvPr/>
+        </p:nvSpPr>
+        <p:spPr>
+          <a:xfrm>
+            <a:off x="6229350" y="1304069"/>
+            <a:ext cx="2486025" cy="371475"/>
           </a:xfrm>
           <a:prstGeom prst="rect">
             <a:avLst/>
@@ -8257,30 +7595,132 @@
           </a:solidFill>
           <a:ln/>
         </p:spPr>
-      </p:sp>
-      <p:sp>
-        <p:nvSpPr>
-          <p:cNvPr id="21" name="Shape 15"/>
-          <p:cNvSpPr/>
-          <p:nvPr/>
-        </p:nvSpPr>
-        <p:spPr>
-          <a:xfrm>
-            <a:off x="6229350" y="2454213"/>
-            <a:ext cx="2486025" cy="7144"/>
+        <p:txBody>
+          <a:bodyPr/>
+          <a:lstStyle/>
+          <a:p>
+            <a:endParaRPr lang="fr-FR"/>
+          </a:p>
+        </p:txBody>
+      </p:sp>
+      <p:sp>
+        <p:nvSpPr>
+          <p:cNvPr id="11" name="Shape 7"/>
+          <p:cNvSpPr/>
+          <p:nvPr/>
+        </p:nvSpPr>
+        <p:spPr>
+          <a:xfrm>
+            <a:off x="6229350" y="1661257"/>
+            <a:ext cx="2486025" cy="14288"/>
           </a:xfrm>
           <a:prstGeom prst="rect">
             <a:avLst/>
           </a:prstGeom>
           <a:solidFill>
-            <a:srgbClr val="E5E5E5"/>
+            <a:srgbClr val="1A1A1A"/>
           </a:solidFill>
           <a:ln/>
         </p:spPr>
+        <p:txBody>
+          <a:bodyPr/>
+          <a:lstStyle/>
+          <a:p>
+            <a:endParaRPr lang="fr-FR"/>
+          </a:p>
+        </p:txBody>
+      </p:sp>
+      <p:sp>
+        <p:nvSpPr>
+          <p:cNvPr id="12" name="Text 8"/>
+          <p:cNvSpPr/>
+          <p:nvPr/>
+        </p:nvSpPr>
+        <p:spPr>
+          <a:xfrm>
+            <a:off x="6229350" y="1304069"/>
+            <a:ext cx="2486025" cy="371475"/>
+          </a:xfrm>
+          <a:prstGeom prst="rect">
+            <a:avLst/>
+          </a:prstGeom>
+          <a:noFill/>
+          <a:ln/>
+        </p:spPr>
+        <p:txBody>
+          <a:bodyPr wrap="square" lIns="170053" tIns="127508" rIns="170053" bIns="127508" rtlCol="0" anchor="ctr">
+            <a:spAutoFit/>
+          </a:bodyPr>
+          <a:lstStyle/>
+          <a:p>
+            <a:pPr marL="0" indent="0" algn="ctr">
+              <a:lnSpc>
+                <a:spcPts val="1100"/>
+              </a:lnSpc>
+              <a:buNone/>
+            </a:pPr>
+            <a:r>
+              <a:rPr lang="en-US" sz="784" b="1" dirty="0">
+                <a:solidFill>
+                  <a:srgbClr val="FF4D4D"/>
+                </a:solidFill>
+                <a:latin typeface="JetBrains Mono" pitchFamily="34" charset="0"/>
+                <a:ea typeface="JetBrains Mono" pitchFamily="34" charset="-122"/>
+                <a:cs typeface="JetBrains Mono" pitchFamily="34" charset="-120"/>
+              </a:rPr>
+              <a:t>OFFRIA</a:t>
+            </a:r>
+            <a:endParaRPr lang="en-US" sz="784" dirty="0"/>
+          </a:p>
+        </p:txBody>
+      </p:sp>
+      <p:sp>
+        <p:nvSpPr>
+          <p:cNvPr id="13" name="Text 9"/>
+          <p:cNvSpPr/>
+          <p:nvPr/>
+        </p:nvSpPr>
+        <p:spPr>
+          <a:xfrm>
+            <a:off x="428625" y="1675544"/>
+            <a:ext cx="3314700" cy="394692"/>
+          </a:xfrm>
+          <a:prstGeom prst="rect">
+            <a:avLst/>
+          </a:prstGeom>
+          <a:noFill/>
+          <a:ln/>
+        </p:spPr>
+        <p:txBody>
+          <a:bodyPr wrap="square" lIns="170053" tIns="127508" rIns="170053" bIns="127508" rtlCol="0" anchor="ctr">
+            <a:spAutoFit/>
+          </a:bodyPr>
+          <a:lstStyle/>
+          <a:p>
+            <a:pPr marL="0" indent="0" algn="l">
+              <a:lnSpc>
+                <a:spcPts val="1200"/>
+              </a:lnSpc>
+              <a:buNone/>
+            </a:pPr>
+            <a:r>
+              <a:rPr lang="en-US" sz="942" dirty="0">
+                <a:solidFill>
+                  <a:srgbClr val="1A1A1A"/>
+                </a:solidFill>
+                <a:latin typeface="JetBrains Mono" pitchFamily="34" charset="0"/>
+                <a:ea typeface="JetBrains Mono" pitchFamily="34" charset="-122"/>
+                <a:cs typeface="JetBrains Mono" pitchFamily="34" charset="-120"/>
+              </a:rPr>
+              <a:t>Multi-provider LLM</a:t>
+            </a:r>
+            <a:endParaRPr lang="en-US" sz="942" dirty="0"/>
+          </a:p>
+        </p:txBody>
       </p:sp>
       <p:pic>
         <p:nvPicPr>
-          <p:cNvPr id="22" name="Image 3" descr="preencoded.png">    </p:cNvPr>
+          <p:cNvPr id="14" name="Image 1" descr="preencoded.png"/>
           <p:cNvPicPr>
             <a:picLocks noChangeAspect="1"/>
           </p:cNvPicPr>
@@ -8294,8 +7734,8 @@
         </p:blipFill>
         <p:spPr>
           <a:xfrm>
-            <a:off x="7408069" y="2198824"/>
-            <a:ext cx="128588" cy="128588"/>
+            <a:off x="4955084" y="1832707"/>
+            <a:ext cx="62508" cy="100013"/>
           </a:xfrm>
           <a:prstGeom prst="rect">
             <a:avLst/>
@@ -8304,51 +7744,61 @@
       </p:pic>
       <p:sp>
         <p:nvSpPr>
-          <p:cNvPr id="23" name="Text 16"/>
-          <p:cNvSpPr/>
-          <p:nvPr/>
-        </p:nvSpPr>
-        <p:spPr>
-          <a:xfrm>
-            <a:off x="428625" y="2461357"/>
-            <a:ext cx="3314700" cy="391120"/>
-          </a:xfrm>
-          <a:prstGeom prst="rect">
-            <a:avLst/>
-          </a:prstGeom>
-          <a:noFill/>
-          <a:ln/>
-        </p:spPr>
-        <p:txBody>
-          <a:bodyPr wrap="square" lIns="170053" tIns="127508" rIns="170053" bIns="127508" rtlCol="0" anchor="ctr">
-            <a:spAutoFit/>
-          </a:bodyPr>
-          <a:lstStyle/>
-          <a:p>
-            <a:pPr algn="l" indent="0" marL="0">
-              <a:lnSpc>
-                <a:spcPts val="1200"/>
-              </a:lnSpc>
-              <a:buNone/>
-            </a:pPr>
-            <a:r>
-              <a:rPr lang="en-US" sz="942" dirty="0">
-                <a:solidFill>
-                  <a:srgbClr val="1A1A1A"/>
-                </a:solidFill>
-                <a:latin typeface="JetBrains Mono" pitchFamily="34" charset="0"/>
-                <a:ea typeface="JetBrains Mono" pitchFamily="34" charset="-122"/>
-                <a:cs typeface="JetBrains Mono" pitchFamily="34" charset="-120"/>
-              </a:rPr>
-              <a:t>Profil entreprise contextualisé</a:t>
-            </a:r>
-            <a:endParaRPr lang="en-US" sz="942" dirty="0"/>
+          <p:cNvPr id="15" name="Shape 10"/>
+          <p:cNvSpPr/>
+          <p:nvPr/>
+        </p:nvSpPr>
+        <p:spPr>
+          <a:xfrm>
+            <a:off x="6229350" y="1675544"/>
+            <a:ext cx="2486025" cy="394692"/>
+          </a:xfrm>
+          <a:prstGeom prst="rect">
+            <a:avLst/>
+          </a:prstGeom>
+          <a:solidFill>
+            <a:srgbClr val="FAFAFA"/>
+          </a:solidFill>
+          <a:ln/>
+        </p:spPr>
+        <p:txBody>
+          <a:bodyPr/>
+          <a:lstStyle/>
+          <a:p>
+            <a:endParaRPr lang="fr-FR"/>
+          </a:p>
+        </p:txBody>
+      </p:sp>
+      <p:sp>
+        <p:nvSpPr>
+          <p:cNvPr id="16" name="Shape 11"/>
+          <p:cNvSpPr/>
+          <p:nvPr/>
+        </p:nvSpPr>
+        <p:spPr>
+          <a:xfrm>
+            <a:off x="6229350" y="2063093"/>
+            <a:ext cx="2486025" cy="7144"/>
+          </a:xfrm>
+          <a:prstGeom prst="rect">
+            <a:avLst/>
+          </a:prstGeom>
+          <a:solidFill>
+            <a:srgbClr val="E5E5E5"/>
+          </a:solidFill>
+          <a:ln/>
+        </p:spPr>
+        <p:txBody>
+          <a:bodyPr/>
+          <a:lstStyle/>
+          <a:p>
+            <a:endParaRPr lang="fr-FR"/>
           </a:p>
         </p:txBody>
       </p:sp>
       <p:pic>
         <p:nvPicPr>
-          <p:cNvPr id="24" name="Image 4" descr="preencoded.png">    </p:cNvPr>
+          <p:cNvPr id="17" name="Image 2" descr="preencoded.png"/>
           <p:cNvPicPr>
             <a:picLocks noChangeAspect="1"/>
           </p:cNvPicPr>
@@ -8362,8 +7812,8 @@
         </p:blipFill>
         <p:spPr>
           <a:xfrm>
-            <a:off x="4955084" y="2614947"/>
-            <a:ext cx="62508" cy="100013"/>
+            <a:off x="7408069" y="1805918"/>
+            <a:ext cx="128588" cy="128588"/>
           </a:xfrm>
           <a:prstGeom prst="rect">
             <a:avLst/>
@@ -8372,13 +7822,101 @@
       </p:pic>
       <p:sp>
         <p:nvSpPr>
-          <p:cNvPr id="25" name="Shape 17"/>
-          <p:cNvSpPr/>
-          <p:nvPr/>
-        </p:nvSpPr>
-        <p:spPr>
-          <a:xfrm>
-            <a:off x="6229350" y="2461357"/>
+          <p:cNvPr id="18" name="Text 12"/>
+          <p:cNvSpPr/>
+          <p:nvPr/>
+        </p:nvSpPr>
+        <p:spPr>
+          <a:xfrm>
+            <a:off x="428625" y="2070236"/>
+            <a:ext cx="3314700" cy="391120"/>
+          </a:xfrm>
+          <a:prstGeom prst="rect">
+            <a:avLst/>
+          </a:prstGeom>
+          <a:noFill/>
+          <a:ln/>
+        </p:spPr>
+        <p:txBody>
+          <a:bodyPr wrap="square" lIns="170053" tIns="127508" rIns="170053" bIns="127508" rtlCol="0" anchor="ctr">
+            <a:spAutoFit/>
+          </a:bodyPr>
+          <a:lstStyle/>
+          <a:p>
+            <a:pPr marL="0" indent="0" algn="l">
+              <a:lnSpc>
+                <a:spcPts val="1200"/>
+              </a:lnSpc>
+              <a:buNone/>
+            </a:pPr>
+            <a:r>
+              <a:rPr lang="en-US" sz="942" dirty="0">
+                <a:solidFill>
+                  <a:srgbClr val="1A1A1A"/>
+                </a:solidFill>
+                <a:latin typeface="JetBrains Mono" pitchFamily="34" charset="0"/>
+                <a:ea typeface="JetBrains Mono" pitchFamily="34" charset="-122"/>
+                <a:cs typeface="JetBrains Mono" pitchFamily="34" charset="-120"/>
+              </a:rPr>
+              <a:t>Parsing AO automatique</a:t>
+            </a:r>
+            <a:endParaRPr lang="en-US" sz="942" dirty="0"/>
+          </a:p>
+        </p:txBody>
+      </p:sp>
+      <p:sp>
+        <p:nvSpPr>
+          <p:cNvPr id="19" name="Text 13"/>
+          <p:cNvSpPr/>
+          <p:nvPr/>
+        </p:nvSpPr>
+        <p:spPr>
+          <a:xfrm>
+            <a:off x="3743325" y="2070236"/>
+            <a:ext cx="2486025" cy="391120"/>
+          </a:xfrm>
+          <a:prstGeom prst="rect">
+            <a:avLst/>
+          </a:prstGeom>
+          <a:noFill/>
+          <a:ln/>
+        </p:spPr>
+        <p:txBody>
+          <a:bodyPr wrap="square" lIns="170053" tIns="127508" rIns="170053" bIns="127508" rtlCol="0" anchor="ctr">
+            <a:spAutoFit/>
+          </a:bodyPr>
+          <a:lstStyle/>
+          <a:p>
+            <a:pPr marL="0" indent="0" algn="ctr">
+              <a:lnSpc>
+                <a:spcPts val="1200"/>
+              </a:lnSpc>
+              <a:buNone/>
+            </a:pPr>
+            <a:r>
+              <a:rPr lang="en-US" sz="942" dirty="0">
+                <a:solidFill>
+                  <a:srgbClr val="999999"/>
+                </a:solidFill>
+                <a:latin typeface="JetBrains Mono" pitchFamily="34" charset="0"/>
+                <a:ea typeface="JetBrains Mono" pitchFamily="34" charset="-122"/>
+                <a:cs typeface="JetBrains Mono" pitchFamily="34" charset="-120"/>
+              </a:rPr>
+              <a:t>Partiel</a:t>
+            </a:r>
+            <a:endParaRPr lang="en-US" sz="942" dirty="0"/>
+          </a:p>
+        </p:txBody>
+      </p:sp>
+      <p:sp>
+        <p:nvSpPr>
+          <p:cNvPr id="20" name="Shape 14"/>
+          <p:cNvSpPr/>
+          <p:nvPr/>
+        </p:nvSpPr>
+        <p:spPr>
+          <a:xfrm>
+            <a:off x="6229350" y="2070236"/>
             <a:ext cx="2486025" cy="391120"/>
           </a:xfrm>
           <a:prstGeom prst="rect">
@@ -8389,16 +7927,23 @@
           </a:solidFill>
           <a:ln/>
         </p:spPr>
-      </p:sp>
-      <p:sp>
-        <p:nvSpPr>
-          <p:cNvPr id="26" name="Shape 18"/>
-          <p:cNvSpPr/>
-          <p:nvPr/>
-        </p:nvSpPr>
-        <p:spPr>
-          <a:xfrm>
-            <a:off x="6229350" y="2845333"/>
+        <p:txBody>
+          <a:bodyPr/>
+          <a:lstStyle/>
+          <a:p>
+            <a:endParaRPr lang="fr-FR"/>
+          </a:p>
+        </p:txBody>
+      </p:sp>
+      <p:sp>
+        <p:nvSpPr>
+          <p:cNvPr id="21" name="Shape 15"/>
+          <p:cNvSpPr/>
+          <p:nvPr/>
+        </p:nvSpPr>
+        <p:spPr>
+          <a:xfrm>
+            <a:off x="6229350" y="2454213"/>
             <a:ext cx="2486025" cy="7144"/>
           </a:xfrm>
           <a:prstGeom prst="rect">
@@ -8409,10 +7954,85 @@
           </a:solidFill>
           <a:ln/>
         </p:spPr>
+        <p:txBody>
+          <a:bodyPr/>
+          <a:lstStyle/>
+          <a:p>
+            <a:endParaRPr lang="fr-FR"/>
+          </a:p>
+        </p:txBody>
       </p:sp>
       <p:pic>
         <p:nvPicPr>
-          <p:cNvPr id="27" name="Image 5" descr="preencoded.png">    </p:cNvPr>
+          <p:cNvPr id="22" name="Image 3" descr="preencoded.png"/>
+          <p:cNvPicPr>
+            <a:picLocks noChangeAspect="1"/>
+          </p:cNvPicPr>
+          <p:nvPr/>
+        </p:nvPicPr>
+        <p:blipFill>
+          <a:blip r:embed="rId5"/>
+          <a:stretch>
+            <a:fillRect/>
+          </a:stretch>
+        </p:blipFill>
+        <p:spPr>
+          <a:xfrm>
+            <a:off x="7408069" y="2198824"/>
+            <a:ext cx="128588" cy="128588"/>
+          </a:xfrm>
+          <a:prstGeom prst="rect">
+            <a:avLst/>
+          </a:prstGeom>
+        </p:spPr>
+      </p:pic>
+      <p:sp>
+        <p:nvSpPr>
+          <p:cNvPr id="23" name="Text 16"/>
+          <p:cNvSpPr/>
+          <p:nvPr/>
+        </p:nvSpPr>
+        <p:spPr>
+          <a:xfrm>
+            <a:off x="428625" y="2461357"/>
+            <a:ext cx="3314700" cy="391120"/>
+          </a:xfrm>
+          <a:prstGeom prst="rect">
+            <a:avLst/>
+          </a:prstGeom>
+          <a:noFill/>
+          <a:ln/>
+        </p:spPr>
+        <p:txBody>
+          <a:bodyPr wrap="square" lIns="170053" tIns="127508" rIns="170053" bIns="127508" rtlCol="0" anchor="ctr">
+            <a:spAutoFit/>
+          </a:bodyPr>
+          <a:lstStyle/>
+          <a:p>
+            <a:pPr marL="0" indent="0" algn="l">
+              <a:lnSpc>
+                <a:spcPts val="1200"/>
+              </a:lnSpc>
+              <a:buNone/>
+            </a:pPr>
+            <a:r>
+              <a:rPr lang="en-US" sz="942" dirty="0">
+                <a:solidFill>
+                  <a:srgbClr val="1A1A1A"/>
+                </a:solidFill>
+                <a:latin typeface="JetBrains Mono" pitchFamily="34" charset="0"/>
+                <a:ea typeface="JetBrains Mono" pitchFamily="34" charset="-122"/>
+                <a:cs typeface="JetBrains Mono" pitchFamily="34" charset="-120"/>
+              </a:rPr>
+              <a:t>Profil entreprise contextualisé</a:t>
+            </a:r>
+            <a:endParaRPr lang="en-US" sz="942" dirty="0"/>
+          </a:p>
+        </p:txBody>
+      </p:sp>
+      <p:pic>
+        <p:nvPicPr>
+          <p:cNvPr id="24" name="Image 4" descr="preencoded.png"/>
           <p:cNvPicPr>
             <a:picLocks noChangeAspect="1"/>
           </p:cNvPicPr>
@@ -8426,8 +8046,8 @@
         </p:blipFill>
         <p:spPr>
           <a:xfrm>
-            <a:off x="7408069" y="2589944"/>
-            <a:ext cx="128588" cy="128588"/>
+            <a:off x="4955084" y="2614947"/>
+            <a:ext cx="62508" cy="100013"/>
           </a:xfrm>
           <a:prstGeom prst="rect">
             <a:avLst/>
@@ -8436,51 +8056,61 @@
       </p:pic>
       <p:sp>
         <p:nvSpPr>
-          <p:cNvPr id="28" name="Text 19"/>
-          <p:cNvSpPr/>
-          <p:nvPr/>
-        </p:nvSpPr>
-        <p:spPr>
-          <a:xfrm>
-            <a:off x="428625" y="2852477"/>
-            <a:ext cx="3314700" cy="391120"/>
-          </a:xfrm>
-          <a:prstGeom prst="rect">
-            <a:avLst/>
-          </a:prstGeom>
-          <a:noFill/>
-          <a:ln/>
-        </p:spPr>
-        <p:txBody>
-          <a:bodyPr wrap="square" lIns="170053" tIns="127508" rIns="170053" bIns="127508" rtlCol="0" anchor="ctr">
-            <a:spAutoFit/>
-          </a:bodyPr>
-          <a:lstStyle/>
-          <a:p>
-            <a:pPr algn="l" indent="0" marL="0">
-              <a:lnSpc>
-                <a:spcPts val="1200"/>
-              </a:lnSpc>
-              <a:buNone/>
-            </a:pPr>
-            <a:r>
-              <a:rPr lang="en-US" sz="942" dirty="0">
-                <a:solidFill>
-                  <a:srgbClr val="1A1A1A"/>
-                </a:solidFill>
-                <a:latin typeface="JetBrains Mono" pitchFamily="34" charset="0"/>
-                <a:ea typeface="JetBrains Mono" pitchFamily="34" charset="-122"/>
-                <a:cs typeface="JetBrains Mono" pitchFamily="34" charset="-120"/>
-              </a:rPr>
-              <a:t>API intégrable (REST)</a:t>
-            </a:r>
-            <a:endParaRPr lang="en-US" sz="942" dirty="0"/>
+          <p:cNvPr id="25" name="Shape 17"/>
+          <p:cNvSpPr/>
+          <p:nvPr/>
+        </p:nvSpPr>
+        <p:spPr>
+          <a:xfrm>
+            <a:off x="6229350" y="2461357"/>
+            <a:ext cx="2486025" cy="391120"/>
+          </a:xfrm>
+          <a:prstGeom prst="rect">
+            <a:avLst/>
+          </a:prstGeom>
+          <a:solidFill>
+            <a:srgbClr val="FAFAFA"/>
+          </a:solidFill>
+          <a:ln/>
+        </p:spPr>
+        <p:txBody>
+          <a:bodyPr/>
+          <a:lstStyle/>
+          <a:p>
+            <a:endParaRPr lang="fr-FR"/>
+          </a:p>
+        </p:txBody>
+      </p:sp>
+      <p:sp>
+        <p:nvSpPr>
+          <p:cNvPr id="26" name="Shape 18"/>
+          <p:cNvSpPr/>
+          <p:nvPr/>
+        </p:nvSpPr>
+        <p:spPr>
+          <a:xfrm>
+            <a:off x="6229350" y="2845333"/>
+            <a:ext cx="2486025" cy="7144"/>
+          </a:xfrm>
+          <a:prstGeom prst="rect">
+            <a:avLst/>
+          </a:prstGeom>
+          <a:solidFill>
+            <a:srgbClr val="E5E5E5"/>
+          </a:solidFill>
+          <a:ln/>
+        </p:spPr>
+        <p:txBody>
+          <a:bodyPr/>
+          <a:lstStyle/>
+          <a:p>
+            <a:endParaRPr lang="fr-FR"/>
           </a:p>
         </p:txBody>
       </p:sp>
       <p:pic>
         <p:nvPicPr>
-          <p:cNvPr id="29" name="Image 6" descr="preencoded.png">    </p:cNvPr>
+          <p:cNvPr id="27" name="Image 5" descr="preencoded.png"/>
           <p:cNvPicPr>
             <a:picLocks noChangeAspect="1"/>
           </p:cNvPicPr>
@@ -8494,8 +8124,8 @@
         </p:blipFill>
         <p:spPr>
           <a:xfrm>
-            <a:off x="4955084" y="3006068"/>
-            <a:ext cx="62508" cy="100013"/>
+            <a:off x="7408069" y="2589944"/>
+            <a:ext cx="128588" cy="128588"/>
           </a:xfrm>
           <a:prstGeom prst="rect">
             <a:avLst/>
@@ -8504,47 +8134,51 @@
       </p:pic>
       <p:sp>
         <p:nvSpPr>
-          <p:cNvPr id="30" name="Shape 20"/>
-          <p:cNvSpPr/>
-          <p:nvPr/>
-        </p:nvSpPr>
-        <p:spPr>
-          <a:xfrm>
-            <a:off x="6229350" y="2852477"/>
-            <a:ext cx="2486025" cy="391120"/>
-          </a:xfrm>
-          <a:prstGeom prst="rect">
-            <a:avLst/>
-          </a:prstGeom>
-          <a:solidFill>
-            <a:srgbClr val="FAFAFA"/>
-          </a:solidFill>
-          <a:ln/>
-        </p:spPr>
-      </p:sp>
-      <p:sp>
-        <p:nvSpPr>
-          <p:cNvPr id="31" name="Shape 21"/>
-          <p:cNvSpPr/>
-          <p:nvPr/>
-        </p:nvSpPr>
-        <p:spPr>
-          <a:xfrm>
-            <a:off x="6229350" y="3236454"/>
-            <a:ext cx="2486025" cy="7144"/>
-          </a:xfrm>
-          <a:prstGeom prst="rect">
-            <a:avLst/>
-          </a:prstGeom>
-          <a:solidFill>
-            <a:srgbClr val="E5E5E5"/>
-          </a:solidFill>
-          <a:ln/>
-        </p:spPr>
+          <p:cNvPr id="28" name="Text 19"/>
+          <p:cNvSpPr/>
+          <p:nvPr/>
+        </p:nvSpPr>
+        <p:spPr>
+          <a:xfrm>
+            <a:off x="428625" y="2852477"/>
+            <a:ext cx="3314700" cy="391120"/>
+          </a:xfrm>
+          <a:prstGeom prst="rect">
+            <a:avLst/>
+          </a:prstGeom>
+          <a:noFill/>
+          <a:ln/>
+        </p:spPr>
+        <p:txBody>
+          <a:bodyPr wrap="square" lIns="170053" tIns="127508" rIns="170053" bIns="127508" rtlCol="0" anchor="ctr">
+            <a:spAutoFit/>
+          </a:bodyPr>
+          <a:lstStyle/>
+          <a:p>
+            <a:pPr marL="0" indent="0" algn="l">
+              <a:lnSpc>
+                <a:spcPts val="1200"/>
+              </a:lnSpc>
+              <a:buNone/>
+            </a:pPr>
+            <a:r>
+              <a:rPr lang="en-US" sz="942" dirty="0">
+                <a:solidFill>
+                  <a:srgbClr val="1A1A1A"/>
+                </a:solidFill>
+                <a:latin typeface="JetBrains Mono" pitchFamily="34" charset="0"/>
+                <a:ea typeface="JetBrains Mono" pitchFamily="34" charset="-122"/>
+                <a:cs typeface="JetBrains Mono" pitchFamily="34" charset="-120"/>
+              </a:rPr>
+              <a:t>API intégrable (REST)</a:t>
+            </a:r>
+            <a:endParaRPr lang="en-US" sz="942" dirty="0"/>
+          </a:p>
+        </p:txBody>
       </p:sp>
       <p:pic>
         <p:nvPicPr>
-          <p:cNvPr id="32" name="Image 7" descr="preencoded.png">    </p:cNvPr>
+          <p:cNvPr id="29" name="Image 6" descr="preencoded.png"/>
           <p:cNvPicPr>
             <a:picLocks noChangeAspect="1"/>
           </p:cNvPicPr>
@@ -8558,8 +8192,8 @@
         </p:blipFill>
         <p:spPr>
           <a:xfrm>
-            <a:off x="7408069" y="2981065"/>
-            <a:ext cx="128588" cy="128588"/>
+            <a:off x="4955084" y="3006068"/>
+            <a:ext cx="62508" cy="100013"/>
           </a:xfrm>
           <a:prstGeom prst="rect">
             <a:avLst/>
@@ -8568,51 +8202,61 @@
       </p:pic>
       <p:sp>
         <p:nvSpPr>
-          <p:cNvPr id="33" name="Text 22"/>
-          <p:cNvSpPr/>
-          <p:nvPr/>
-        </p:nvSpPr>
-        <p:spPr>
-          <a:xfrm>
-            <a:off x="428625" y="3243597"/>
-            <a:ext cx="3314700" cy="391120"/>
-          </a:xfrm>
-          <a:prstGeom prst="rect">
-            <a:avLst/>
-          </a:prstGeom>
-          <a:noFill/>
-          <a:ln/>
-        </p:spPr>
-        <p:txBody>
-          <a:bodyPr wrap="square" lIns="170053" tIns="127508" rIns="170053" bIns="127508" rtlCol="0" anchor="ctr">
-            <a:spAutoFit/>
-          </a:bodyPr>
-          <a:lstStyle/>
-          <a:p>
-            <a:pPr algn="l" indent="0" marL="0">
-              <a:lnSpc>
-                <a:spcPts val="1200"/>
-              </a:lnSpc>
-              <a:buNone/>
-            </a:pPr>
-            <a:r>
-              <a:rPr lang="en-US" sz="942" dirty="0">
-                <a:solidFill>
-                  <a:srgbClr val="1A1A1A"/>
-                </a:solidFill>
-                <a:latin typeface="JetBrains Mono" pitchFamily="34" charset="0"/>
-                <a:ea typeface="JetBrains Mono" pitchFamily="34" charset="-122"/>
-                <a:cs typeface="JetBrains Mono" pitchFamily="34" charset="-120"/>
-              </a:rPr>
-              <a:t>Hébergement souverain (Mistral)</a:t>
-            </a:r>
-            <a:endParaRPr lang="en-US" sz="942" dirty="0"/>
+          <p:cNvPr id="30" name="Shape 20"/>
+          <p:cNvSpPr/>
+          <p:nvPr/>
+        </p:nvSpPr>
+        <p:spPr>
+          <a:xfrm>
+            <a:off x="6229350" y="2852477"/>
+            <a:ext cx="2486025" cy="391120"/>
+          </a:xfrm>
+          <a:prstGeom prst="rect">
+            <a:avLst/>
+          </a:prstGeom>
+          <a:solidFill>
+            <a:srgbClr val="FAFAFA"/>
+          </a:solidFill>
+          <a:ln/>
+        </p:spPr>
+        <p:txBody>
+          <a:bodyPr/>
+          <a:lstStyle/>
+          <a:p>
+            <a:endParaRPr lang="fr-FR"/>
+          </a:p>
+        </p:txBody>
+      </p:sp>
+      <p:sp>
+        <p:nvSpPr>
+          <p:cNvPr id="31" name="Shape 21"/>
+          <p:cNvSpPr/>
+          <p:nvPr/>
+        </p:nvSpPr>
+        <p:spPr>
+          <a:xfrm>
+            <a:off x="6229350" y="3236454"/>
+            <a:ext cx="2486025" cy="7144"/>
+          </a:xfrm>
+          <a:prstGeom prst="rect">
+            <a:avLst/>
+          </a:prstGeom>
+          <a:solidFill>
+            <a:srgbClr val="E5E5E5"/>
+          </a:solidFill>
+          <a:ln/>
+        </p:spPr>
+        <p:txBody>
+          <a:bodyPr/>
+          <a:lstStyle/>
+          <a:p>
+            <a:endParaRPr lang="fr-FR"/>
           </a:p>
         </p:txBody>
       </p:sp>
       <p:pic>
         <p:nvPicPr>
-          <p:cNvPr id="34" name="Image 8" descr="preencoded.png">    </p:cNvPr>
+          <p:cNvPr id="32" name="Image 7" descr="preencoded.png"/>
           <p:cNvPicPr>
             <a:picLocks noChangeAspect="1"/>
           </p:cNvPicPr>
@@ -8626,6 +8270,74 @@
         </p:blipFill>
         <p:spPr>
           <a:xfrm>
+            <a:off x="7408069" y="2981065"/>
+            <a:ext cx="128588" cy="128588"/>
+          </a:xfrm>
+          <a:prstGeom prst="rect">
+            <a:avLst/>
+          </a:prstGeom>
+        </p:spPr>
+      </p:pic>
+      <p:sp>
+        <p:nvSpPr>
+          <p:cNvPr id="33" name="Text 22"/>
+          <p:cNvSpPr/>
+          <p:nvPr/>
+        </p:nvSpPr>
+        <p:spPr>
+          <a:xfrm>
+            <a:off x="428625" y="3243597"/>
+            <a:ext cx="3314700" cy="391120"/>
+          </a:xfrm>
+          <a:prstGeom prst="rect">
+            <a:avLst/>
+          </a:prstGeom>
+          <a:noFill/>
+          <a:ln/>
+        </p:spPr>
+        <p:txBody>
+          <a:bodyPr wrap="square" lIns="170053" tIns="127508" rIns="170053" bIns="127508" rtlCol="0" anchor="ctr">
+            <a:spAutoFit/>
+          </a:bodyPr>
+          <a:lstStyle/>
+          <a:p>
+            <a:pPr marL="0" indent="0" algn="l">
+              <a:lnSpc>
+                <a:spcPts val="1200"/>
+              </a:lnSpc>
+              <a:buNone/>
+            </a:pPr>
+            <a:r>
+              <a:rPr lang="en-US" sz="942" dirty="0">
+                <a:solidFill>
+                  <a:srgbClr val="1A1A1A"/>
+                </a:solidFill>
+                <a:latin typeface="JetBrains Mono" pitchFamily="34" charset="0"/>
+                <a:ea typeface="JetBrains Mono" pitchFamily="34" charset="-122"/>
+                <a:cs typeface="JetBrains Mono" pitchFamily="34" charset="-120"/>
+              </a:rPr>
+              <a:t>Hébergement souverain (Mistral)</a:t>
+            </a:r>
+            <a:endParaRPr lang="en-US" sz="942" dirty="0"/>
+          </a:p>
+        </p:txBody>
+      </p:sp>
+      <p:pic>
+        <p:nvPicPr>
+          <p:cNvPr id="34" name="Image 8" descr="preencoded.png"/>
+          <p:cNvPicPr>
+            <a:picLocks noChangeAspect="1"/>
+          </p:cNvPicPr>
+          <p:nvPr/>
+        </p:nvPicPr>
+        <p:blipFill>
+          <a:blip r:embed="rId4"/>
+          <a:stretch>
+            <a:fillRect/>
+          </a:stretch>
+        </p:blipFill>
+        <p:spPr>
+          <a:xfrm>
             <a:off x="4955084" y="3397188"/>
             <a:ext cx="62508" cy="100013"/>
           </a:xfrm>
@@ -8653,6 +8365,13 @@
           </a:solidFill>
           <a:ln/>
         </p:spPr>
+        <p:txBody>
+          <a:bodyPr/>
+          <a:lstStyle/>
+          <a:p>
+            <a:endParaRPr lang="fr-FR"/>
+          </a:p>
+        </p:txBody>
       </p:sp>
       <p:sp>
         <p:nvSpPr>
@@ -8673,10 +8392,17 @@
           </a:solidFill>
           <a:ln/>
         </p:spPr>
+        <p:txBody>
+          <a:bodyPr/>
+          <a:lstStyle/>
+          <a:p>
+            <a:endParaRPr lang="fr-FR"/>
+          </a:p>
+        </p:txBody>
       </p:sp>
       <p:pic>
         <p:nvPicPr>
-          <p:cNvPr id="37" name="Image 9" descr="preencoded.png">    </p:cNvPr>
+          <p:cNvPr id="37" name="Image 9" descr="preencoded.png"/>
           <p:cNvPicPr>
             <a:picLocks noChangeAspect="1"/>
           </p:cNvPicPr>
@@ -8721,7 +8447,7 @@
           </a:bodyPr>
           <a:lstStyle/>
           <a:p>
-            <a:pPr algn="l" indent="0" marL="0">
+            <a:pPr marL="0" indent="0" algn="l">
               <a:lnSpc>
                 <a:spcPts val="1200"/>
               </a:lnSpc>
@@ -8744,7 +8470,7 @@
       </p:sp>
       <p:pic>
         <p:nvPicPr>
-          <p:cNvPr id="39" name="Image 10" descr="preencoded.png">    </p:cNvPr>
+          <p:cNvPr id="39" name="Image 10" descr="preencoded.png"/>
           <p:cNvPicPr>
             <a:picLocks noChangeAspect="1"/>
           </p:cNvPicPr>
@@ -8785,6 +8511,13 @@
           </a:solidFill>
           <a:ln/>
         </p:spPr>
+        <p:txBody>
+          <a:bodyPr/>
+          <a:lstStyle/>
+          <a:p>
+            <a:endParaRPr lang="fr-FR"/>
+          </a:p>
+        </p:txBody>
       </p:sp>
       <p:sp>
         <p:nvSpPr>
@@ -8805,17 +8538,24 @@
           </a:solidFill>
           <a:ln/>
         </p:spPr>
+        <p:txBody>
+          <a:bodyPr/>
+          <a:lstStyle/>
+          <a:p>
+            <a:endParaRPr lang="fr-FR"/>
+          </a:p>
+        </p:txBody>
       </p:sp>
       <p:pic>
         <p:nvPicPr>
-          <p:cNvPr id="42" name="Image 11" descr="preencoded.png">    </p:cNvPr>
+          <p:cNvPr id="42" name="Image 11" descr="preencoded.png"/>
           <p:cNvPicPr>
             <a:picLocks noChangeAspect="1"/>
           </p:cNvPicPr>
           <p:nvPr/>
         </p:nvPicPr>
         <p:blipFill>
-          <a:blip r:embed="rId12"/>
+          <a:blip r:embed="rId5"/>
           <a:stretch>
             <a:fillRect/>
           </a:stretch>
@@ -8851,6 +8591,13 @@
           </a:solidFill>
           <a:ln/>
         </p:spPr>
+        <p:txBody>
+          <a:bodyPr/>
+          <a:lstStyle/>
+          <a:p>
+            <a:endParaRPr lang="fr-FR"/>
+          </a:p>
+        </p:txBody>
       </p:sp>
       <p:sp>
         <p:nvSpPr>
@@ -8871,6 +8618,13 @@
           </a:solidFill>
           <a:ln/>
         </p:spPr>
+        <p:txBody>
+          <a:bodyPr/>
+          <a:lstStyle/>
+          <a:p>
+            <a:endParaRPr lang="fr-FR"/>
+          </a:p>
+        </p:txBody>
       </p:sp>
       <p:sp>
         <p:nvSpPr>
@@ -8895,7 +8649,7 @@
           </a:bodyPr>
           <a:lstStyle/>
           <a:p>
-            <a:pPr algn="l" indent="0" marL="0">
+            <a:pPr marL="0" indent="0" algn="l">
               <a:lnSpc>
                 <a:spcPts val="1600"/>
               </a:lnSpc>
@@ -8939,7 +8693,7 @@
           </a:bodyPr>
           <a:lstStyle/>
           <a:p>
-            <a:pPr algn="l" indent="0" marL="0">
+            <a:pPr marL="0" indent="0" algn="l">
               <a:lnSpc>
                 <a:spcPts val="900"/>
               </a:lnSpc>
@@ -8987,14 +8741,14 @@
       </p:grpSpPr>
       <p:pic>
         <p:nvPicPr>
-          <p:cNvPr id="3" name="Image 0" descr="preencoded.png">    </p:cNvPr>
+          <p:cNvPr id="3" name="Image 0" descr="preencoded.png"/>
           <p:cNvPicPr>
             <a:picLocks noChangeAspect="1"/>
           </p:cNvPicPr>
           <p:nvPr/>
         </p:nvPicPr>
         <p:blipFill>
-          <a:blip r:embed="rId1"/>
+          <a:blip r:embed="rId3"/>
           <a:stretch>
             <a:fillRect/>
           </a:stretch>
@@ -9030,6 +8784,13 @@
           </a:solidFill>
           <a:ln/>
         </p:spPr>
+        <p:txBody>
+          <a:bodyPr/>
+          <a:lstStyle/>
+          <a:p>
+            <a:endParaRPr lang="fr-FR"/>
+          </a:p>
+        </p:txBody>
       </p:sp>
       <p:sp>
         <p:nvSpPr>
@@ -9050,6 +8811,13 @@
           </a:solidFill>
           <a:ln/>
         </p:spPr>
+        <p:txBody>
+          <a:bodyPr/>
+          <a:lstStyle/>
+          <a:p>
+            <a:endParaRPr lang="fr-FR"/>
+          </a:p>
+        </p:txBody>
       </p:sp>
       <p:sp>
         <p:nvSpPr>
@@ -9074,7 +8842,7 @@
           </a:bodyPr>
           <a:lstStyle/>
           <a:p>
-            <a:pPr algn="l" indent="0" marL="0">
+            <a:pPr marL="0" indent="0" algn="l">
               <a:lnSpc>
                 <a:spcPts val="3000"/>
               </a:lnSpc>
@@ -9089,42 +8857,8 @@
                 <a:ea typeface="Playfair Display" pitchFamily="34" charset="-122"/>
                 <a:cs typeface="Playfair Display" pitchFamily="34" charset="-120"/>
               </a:rPr>
-              <a:t>L'impact : x25 sur le volume,</a:t>
-            </a:r>
-            <a:pPr algn="l" indent="0" marL="0">
-              <a:lnSpc>
-                <a:spcPts val="3000"/>
-              </a:lnSpc>
-              <a:buNone/>
-            </a:pPr>
-            <a:r>
-              <a:rPr lang="en-US" sz="2436" b="1" dirty="0">
-                <a:solidFill>
-                  <a:srgbClr val="1A1A1A"/>
-                </a:solidFill>
-                <a:latin typeface="Playfair Display" pitchFamily="34" charset="0"/>
-                <a:ea typeface="Playfair Display" pitchFamily="34" charset="-122"/>
-                <a:cs typeface="Playfair Display" pitchFamily="34" charset="-120"/>
-              </a:rPr>
-              <a:t>
-</a:t>
-            </a:r>
-            <a:pPr algn="l" indent="0" marL="0">
-              <a:lnSpc>
-                <a:spcPts val="3000"/>
-              </a:lnSpc>
-              <a:buNone/>
-            </a:pPr>
-            <a:r>
-              <a:rPr lang="en-US" sz="2436" b="1" dirty="0">
-                <a:solidFill>
-                  <a:srgbClr val="1A1A1A"/>
-                </a:solidFill>
-                <a:latin typeface="Playfair Display" pitchFamily="34" charset="0"/>
-                <a:ea typeface="Playfair Display" pitchFamily="34" charset="-122"/>
-                <a:cs typeface="Playfair Display" pitchFamily="34" charset="-120"/>
-              </a:rPr>
-              <a:t>coût divisé par 100</a:t>
+              <a:t>L'impact : x25 sur le volume,
+coût divisé par 100</a:t>
             </a:r>
             <a:endParaRPr lang="en-US" sz="2436" dirty="0"/>
           </a:p>
@@ -9153,14 +8887,14 @@
           </a:bodyPr>
           <a:lstStyle/>
           <a:p>
-            <a:pPr algn="l" indent="0" marL="0">
+            <a:pPr marL="0" indent="0" algn="l">
               <a:lnSpc>
                 <a:spcPts val="1200"/>
               </a:lnSpc>
               <a:buNone/>
             </a:pPr>
             <a:r>
-              <a:rPr lang="en-US" sz="942" spc="1" kern="0" dirty="0">
+              <a:rPr lang="en-US" sz="942" kern="0" spc="1" dirty="0">
                 <a:solidFill>
                   <a:srgbClr val="666666"/>
                 </a:solidFill>
@@ -9195,6 +8929,13 @@
           </a:solidFill>
           <a:ln/>
         </p:spPr>
+        <p:txBody>
+          <a:bodyPr/>
+          <a:lstStyle/>
+          <a:p>
+            <a:endParaRPr lang="fr-FR"/>
+          </a:p>
+        </p:txBody>
       </p:sp>
       <p:sp>
         <p:nvSpPr>
@@ -9215,6 +8956,13 @@
           </a:solidFill>
           <a:ln/>
         </p:spPr>
+        <p:txBody>
+          <a:bodyPr/>
+          <a:lstStyle/>
+          <a:p>
+            <a:endParaRPr lang="fr-FR"/>
+          </a:p>
+        </p:txBody>
       </p:sp>
       <p:sp>
         <p:nvSpPr>
@@ -9239,7 +8987,7 @@
           </a:bodyPr>
           <a:lstStyle/>
           <a:p>
-            <a:pPr algn="l" indent="0" marL="0">
+            <a:pPr marL="0" indent="0" algn="l">
               <a:lnSpc>
                 <a:spcPts val="1600"/>
               </a:lnSpc>
@@ -9283,7 +9031,7 @@
           </a:bodyPr>
           <a:lstStyle/>
           <a:p>
-            <a:pPr algn="l" indent="0" marL="0">
+            <a:pPr marL="0" indent="0" algn="l">
               <a:lnSpc>
                 <a:spcPts val="1400"/>
               </a:lnSpc>
@@ -9327,7 +9075,7 @@
           </a:bodyPr>
           <a:lstStyle/>
           <a:p>
-            <a:pPr algn="l" indent="0" marL="0">
+            <a:pPr marL="0" indent="0" algn="l">
               <a:lnSpc>
                 <a:spcPts val="1600"/>
               </a:lnSpc>
@@ -9371,7 +9119,7 @@
           </a:bodyPr>
           <a:lstStyle/>
           <a:p>
-            <a:pPr algn="l" indent="0" marL="0">
+            <a:pPr marL="0" indent="0" algn="l">
               <a:lnSpc>
                 <a:spcPts val="1600"/>
               </a:lnSpc>
@@ -9401,7 +9149,7 @@
         <p:spPr>
           <a:xfrm>
             <a:off x="3980073" y="2146474"/>
-            <a:ext cx="2367651" cy="330398"/>
+            <a:ext cx="2367651" cy="170175"/>
           </a:xfrm>
           <a:prstGeom prst="rect">
             <a:avLst/>
@@ -9415,7 +9163,7 @@
           </a:bodyPr>
           <a:lstStyle/>
           <a:p>
-            <a:pPr algn="l" indent="0" marL="0">
+            <a:pPr marL="0" indent="0" algn="l">
               <a:lnSpc>
                 <a:spcPts val="1400"/>
               </a:lnSpc>
@@ -9430,7 +9178,7 @@
                 <a:ea typeface="JetBrains Mono" pitchFamily="34" charset="-122"/>
                 <a:cs typeface="JetBrains Mono" pitchFamily="34" charset="-120"/>
               </a:rPr>
-              <a:t>1 à 3 AO</a:t>
+              <a:t>3 à 5 AO</a:t>
             </a:r>
             <a:endParaRPr lang="en-US" sz="1050" dirty="0"/>
           </a:p>
@@ -9459,7 +9207,7 @@
           </a:bodyPr>
           <a:lstStyle/>
           <a:p>
-            <a:pPr algn="l" indent="0" marL="0">
+            <a:pPr marL="0" indent="0" algn="l">
               <a:lnSpc>
                 <a:spcPts val="1600"/>
               </a:lnSpc>
@@ -9503,7 +9251,7 @@
           </a:bodyPr>
           <a:lstStyle/>
           <a:p>
-            <a:pPr algn="l" indent="0" marL="0">
+            <a:pPr marL="0" indent="0" algn="l">
               <a:lnSpc>
                 <a:spcPts val="1600"/>
               </a:lnSpc>
@@ -9533,7 +9281,7 @@
         <p:spPr>
           <a:xfrm>
             <a:off x="3980073" y="2664396"/>
-            <a:ext cx="2367651" cy="330398"/>
+            <a:ext cx="2367651" cy="170175"/>
           </a:xfrm>
           <a:prstGeom prst="rect">
             <a:avLst/>
@@ -9547,7 +9295,7 @@
           </a:bodyPr>
           <a:lstStyle/>
           <a:p>
-            <a:pPr algn="l" indent="0" marL="0">
+            <a:pPr marL="0" indent="0" algn="l">
               <a:lnSpc>
                 <a:spcPts val="1400"/>
               </a:lnSpc>
@@ -9562,7 +9310,7 @@
                 <a:ea typeface="JetBrains Mono" pitchFamily="34" charset="-122"/>
                 <a:cs typeface="JetBrains Mono" pitchFamily="34" charset="-120"/>
               </a:rPr>
-              <a:t>3 000 €</a:t>
+              <a:t>10 000 MAD</a:t>
             </a:r>
             <a:endParaRPr lang="en-US" sz="1050" dirty="0"/>
           </a:p>
@@ -9577,7 +9325,7 @@
         <p:spPr>
           <a:xfrm>
             <a:off x="6347724" y="2645643"/>
-            <a:ext cx="2367623" cy="367903"/>
+            <a:ext cx="2367623" cy="194284"/>
           </a:xfrm>
           <a:prstGeom prst="rect">
             <a:avLst/>
@@ -9591,13 +9339,24 @@
           </a:bodyPr>
           <a:lstStyle/>
           <a:p>
-            <a:pPr algn="l" indent="0" marL="0">
+            <a:pPr marL="0" indent="0" algn="l">
               <a:lnSpc>
                 <a:spcPts val="1600"/>
               </a:lnSpc>
               <a:buNone/>
             </a:pPr>
             <a:r>
+              <a:rPr lang="en-US" sz="1193" b="1" dirty="0" err="1">
+                <a:solidFill>
+                  <a:srgbClr val="FF4D4D"/>
+                </a:solidFill>
+                <a:latin typeface="JetBrains Mono" pitchFamily="34" charset="0"/>
+                <a:ea typeface="JetBrains Mono" pitchFamily="34" charset="-122"/>
+                <a:cs typeface="JetBrains Mono" pitchFamily="34" charset="-120"/>
+              </a:rPr>
+              <a:t>Quelques</a:t>
+            </a:r>
+            <a:r>
               <a:rPr lang="en-US" sz="1193" b="1" dirty="0">
                 <a:solidFill>
                   <a:srgbClr val="FF4D4D"/>
@@ -9606,7 +9365,7 @@
                 <a:ea typeface="JetBrains Mono" pitchFamily="34" charset="-122"/>
                 <a:cs typeface="JetBrains Mono" pitchFamily="34" charset="-120"/>
               </a:rPr>
-              <a:t>Quelques centimes</a:t>
+              <a:t> Dirhams</a:t>
             </a:r>
             <a:endParaRPr lang="en-US" sz="1193" dirty="0"/>
           </a:p>
@@ -9635,7 +9394,7 @@
           </a:bodyPr>
           <a:lstStyle/>
           <a:p>
-            <a:pPr algn="l" indent="0" marL="0">
+            <a:pPr marL="0" indent="0" algn="l">
               <a:lnSpc>
                 <a:spcPts val="1600"/>
               </a:lnSpc>
@@ -9679,7 +9438,7 @@
           </a:bodyPr>
           <a:lstStyle/>
           <a:p>
-            <a:pPr algn="l" indent="0" marL="0">
+            <a:pPr marL="0" indent="0" algn="l">
               <a:lnSpc>
                 <a:spcPts val="1400"/>
               </a:lnSpc>
@@ -9723,7 +9482,7 @@
           </a:bodyPr>
           <a:lstStyle/>
           <a:p>
-            <a:pPr algn="l" indent="0" marL="0">
+            <a:pPr marL="0" indent="0" algn="l">
               <a:lnSpc>
                 <a:spcPts val="1600"/>
               </a:lnSpc>
@@ -9763,6 +9522,13 @@
           </a:solidFill>
           <a:ln/>
         </p:spPr>
+        <p:txBody>
+          <a:bodyPr/>
+          <a:lstStyle/>
+          <a:p>
+            <a:endParaRPr lang="fr-FR"/>
+          </a:p>
+        </p:txBody>
       </p:sp>
       <p:sp>
         <p:nvSpPr>
@@ -9773,7 +9539,7 @@
         <p:spPr>
           <a:xfrm>
             <a:off x="542925" y="4446315"/>
-            <a:ext cx="8058150" cy="440010"/>
+            <a:ext cx="8058150" cy="201530"/>
           </a:xfrm>
           <a:prstGeom prst="rect">
             <a:avLst/>
@@ -9787,7 +9553,7 @@
           </a:bodyPr>
           <a:lstStyle/>
           <a:p>
-            <a:pPr algn="l" indent="0" marL="0">
+            <a:pPr marL="0" indent="0" algn="l">
               <a:lnSpc>
                 <a:spcPts val="1700"/>
               </a:lnSpc>
@@ -9804,12 +9570,6 @@
               </a:rPr>
               <a:t>OffrIA ne remplace pas vos équipes — elle leur donne une </a:t>
             </a:r>
-            <a:pPr algn="l" indent="0" marL="0">
-              <a:lnSpc>
-                <a:spcPts val="1700"/>
-              </a:lnSpc>
-              <a:buNone/>
-            </a:pPr>
             <a:r>
               <a:rPr lang="en-US" sz="1090" b="1" dirty="0">
                 <a:solidFill>
@@ -9819,41 +9579,40 @@
                 <a:ea typeface="Playfair Display" pitchFamily="34" charset="-122"/>
                 <a:cs typeface="Playfair Display" pitchFamily="34" charset="-120"/>
               </a:rPr>
-              <a:t>capacité de réponse x25</a:t>
-            </a:r>
-            <a:pPr algn="l" indent="0" marL="0">
-              <a:lnSpc>
-                <a:spcPts val="1700"/>
-              </a:lnSpc>
-              <a:buNone/>
-            </a:pPr>
-            <a:r>
-              <a:rPr lang="en-US" sz="1159" i="1" dirty="0">
-                <a:solidFill>
-                  <a:srgbClr val="1A1A1A"/>
+              <a:t>capacité de </a:t>
+            </a:r>
+            <a:r>
+              <a:rPr lang="en-US" sz="1090" b="1" dirty="0" err="1">
+                <a:solidFill>
+                  <a:srgbClr val="FF4D4D"/>
                 </a:solidFill>
                 <a:latin typeface="Playfair Display" pitchFamily="34" charset="0"/>
                 <a:ea typeface="Playfair Display" pitchFamily="34" charset="-122"/>
                 <a:cs typeface="Playfair Display" pitchFamily="34" charset="-120"/>
               </a:rPr>
-              <a:t>, pour un coût marginal quasi </a:t>
-            </a:r>
-            <a:pPr algn="l" indent="0" marL="0">
-              <a:lnSpc>
-                <a:spcPts val="1700"/>
-              </a:lnSpc>
-              <a:buNone/>
-            </a:pPr>
-            <a:r>
-              <a:rPr lang="en-US" sz="1159" i="1" dirty="0">
-                <a:solidFill>
-                  <a:srgbClr val="1A1A1A"/>
+              <a:t>réponse</a:t>
+            </a:r>
+            <a:r>
+              <a:rPr lang="en-US" sz="1090" b="1" dirty="0">
+                <a:solidFill>
+                  <a:srgbClr val="FF4D4D"/>
                 </a:solidFill>
                 <a:latin typeface="Playfair Display" pitchFamily="34" charset="0"/>
                 <a:ea typeface="Playfair Display" pitchFamily="34" charset="-122"/>
                 <a:cs typeface="Playfair Display" pitchFamily="34" charset="-120"/>
               </a:rPr>
-              <a:t>nul.</a:t>
+              <a:t> x10</a:t>
+            </a:r>
+            <a:r>
+              <a:rPr lang="en-US" sz="1159" i="1" dirty="0">
+                <a:solidFill>
+                  <a:srgbClr val="1A1A1A"/>
+                </a:solidFill>
+                <a:latin typeface="Playfair Display" pitchFamily="34" charset="0"/>
+                <a:ea typeface="Playfair Display" pitchFamily="34" charset="-122"/>
+                <a:cs typeface="Playfair Display" pitchFamily="34" charset="-120"/>
+              </a:rPr>
+              <a:t>, pour un coût marginal quasi nul.</a:t>
             </a:r>
             <a:endParaRPr lang="en-US" sz="1159" dirty="0"/>
           </a:p>
@@ -9886,14 +9645,14 @@
       </p:grpSpPr>
       <p:pic>
         <p:nvPicPr>
-          <p:cNvPr id="3" name="Image 0" descr="preencoded.png">    </p:cNvPr>
+          <p:cNvPr id="3" name="Image 0" descr="preencoded.png"/>
           <p:cNvPicPr>
             <a:picLocks noChangeAspect="1"/>
           </p:cNvPicPr>
           <p:nvPr/>
         </p:nvPicPr>
         <p:blipFill>
-          <a:blip r:embed="rId1"/>
+          <a:blip r:embed="rId3"/>
           <a:stretch>
             <a:fillRect/>
           </a:stretch>
@@ -9929,6 +9688,13 @@
           </a:solidFill>
           <a:ln/>
         </p:spPr>
+        <p:txBody>
+          <a:bodyPr/>
+          <a:lstStyle/>
+          <a:p>
+            <a:endParaRPr lang="fr-FR"/>
+          </a:p>
+        </p:txBody>
       </p:sp>
       <p:sp>
         <p:nvSpPr>
@@ -9949,6 +9715,13 @@
           </a:solidFill>
           <a:ln/>
         </p:spPr>
+        <p:txBody>
+          <a:bodyPr/>
+          <a:lstStyle/>
+          <a:p>
+            <a:endParaRPr lang="fr-FR"/>
+          </a:p>
+        </p:txBody>
       </p:sp>
       <p:sp>
         <p:nvSpPr>
@@ -9973,7 +9746,7 @@
           </a:bodyPr>
           <a:lstStyle/>
           <a:p>
-            <a:pPr algn="l" indent="0" marL="0">
+            <a:pPr marL="0" indent="0" algn="l">
               <a:lnSpc>
                 <a:spcPts val="2400"/>
               </a:lnSpc>
@@ -10017,7 +9790,7 @@
           </a:bodyPr>
           <a:lstStyle/>
           <a:p>
-            <a:pPr algn="l" indent="0" marL="0">
+            <a:pPr marL="0" indent="0" algn="l">
               <a:lnSpc>
                 <a:spcPts val="800"/>
               </a:lnSpc>
@@ -10061,7 +9834,7 @@
           </a:bodyPr>
           <a:lstStyle/>
           <a:p>
-            <a:pPr algn="l" indent="0" marL="0">
+            <a:pPr marL="0" indent="0" algn="l">
               <a:lnSpc>
                 <a:spcPts val="800"/>
               </a:lnSpc>
@@ -10105,7 +9878,7 @@
           </a:bodyPr>
           <a:lstStyle/>
           <a:p>
-            <a:pPr algn="l" indent="0" marL="0">
+            <a:pPr marL="0" indent="0" algn="l">
               <a:lnSpc>
                 <a:spcPts val="800"/>
               </a:lnSpc>
@@ -10149,7 +9922,7 @@
           </a:bodyPr>
           <a:lstStyle/>
           <a:p>
-            <a:pPr algn="l" indent="0" marL="0">
+            <a:pPr marL="0" indent="0" algn="l">
               <a:lnSpc>
                 <a:spcPts val="900"/>
               </a:lnSpc>
@@ -10193,7 +9966,7 @@
           </a:bodyPr>
           <a:lstStyle/>
           <a:p>
-            <a:pPr algn="l" indent="0" marL="0">
+            <a:pPr marL="0" indent="0" algn="l">
               <a:lnSpc>
                 <a:spcPts val="900"/>
               </a:lnSpc>
@@ -10237,7 +10010,7 @@
           </a:bodyPr>
           <a:lstStyle/>
           <a:p>
-            <a:pPr algn="l" indent="0" marL="0">
+            <a:pPr marL="0" indent="0" algn="l">
               <a:lnSpc>
                 <a:spcPts val="900"/>
               </a:lnSpc>
@@ -10281,7 +10054,7 @@
           </a:bodyPr>
           <a:lstStyle/>
           <a:p>
-            <a:pPr algn="l" indent="0" marL="0">
+            <a:pPr marL="0" indent="0" algn="l">
               <a:lnSpc>
                 <a:spcPts val="900"/>
               </a:lnSpc>
@@ -10325,7 +10098,7 @@
           </a:bodyPr>
           <a:lstStyle/>
           <a:p>
-            <a:pPr algn="l" indent="0" marL="0">
+            <a:pPr marL="0" indent="0" algn="l">
               <a:lnSpc>
                 <a:spcPts val="900"/>
               </a:lnSpc>
@@ -10369,7 +10142,7 @@
           </a:bodyPr>
           <a:lstStyle/>
           <a:p>
-            <a:pPr algn="l" indent="0" marL="0">
+            <a:pPr marL="0" indent="0" algn="l">
               <a:lnSpc>
                 <a:spcPts val="900"/>
               </a:lnSpc>
@@ -10413,7 +10186,7 @@
           </a:bodyPr>
           <a:lstStyle/>
           <a:p>
-            <a:pPr algn="l" indent="0" marL="0">
+            <a:pPr marL="0" indent="0" algn="l">
               <a:lnSpc>
                 <a:spcPts val="900"/>
               </a:lnSpc>
@@ -10457,7 +10230,7 @@
           </a:bodyPr>
           <a:lstStyle/>
           <a:p>
-            <a:pPr algn="l" indent="0" marL="0">
+            <a:pPr marL="0" indent="0" algn="l">
               <a:lnSpc>
                 <a:spcPts val="900"/>
               </a:lnSpc>
@@ -10501,7 +10274,7 @@
           </a:bodyPr>
           <a:lstStyle/>
           <a:p>
-            <a:pPr algn="l" indent="0" marL="0">
+            <a:pPr marL="0" indent="0" algn="l">
               <a:lnSpc>
                 <a:spcPts val="900"/>
               </a:lnSpc>
@@ -10545,7 +10318,7 @@
           </a:bodyPr>
           <a:lstStyle/>
           <a:p>
-            <a:pPr algn="l" indent="0" marL="0">
+            <a:pPr marL="0" indent="0" algn="l">
               <a:lnSpc>
                 <a:spcPts val="900"/>
               </a:lnSpc>
@@ -10589,7 +10362,7 @@
           </a:bodyPr>
           <a:lstStyle/>
           <a:p>
-            <a:pPr algn="l" indent="0" marL="0">
+            <a:pPr marL="0" indent="0" algn="l">
               <a:lnSpc>
                 <a:spcPts val="900"/>
               </a:lnSpc>
@@ -10633,7 +10406,7 @@
           </a:bodyPr>
           <a:lstStyle/>
           <a:p>
-            <a:pPr algn="l" indent="0" marL="0">
+            <a:pPr marL="0" indent="0" algn="l">
               <a:lnSpc>
                 <a:spcPts val="900"/>
               </a:lnSpc>
@@ -10677,7 +10450,7 @@
           </a:bodyPr>
           <a:lstStyle/>
           <a:p>
-            <a:pPr algn="l" indent="0" marL="0">
+            <a:pPr marL="0" indent="0" algn="l">
               <a:lnSpc>
                 <a:spcPts val="900"/>
               </a:lnSpc>
@@ -10692,42 +10465,8 @@
                 <a:ea typeface="JetBrains Mono" pitchFamily="34" charset="-122"/>
                 <a:cs typeface="JetBrains Mono" pitchFamily="34" charset="-120"/>
               </a:rPr>
-              <a:t>*Estimations basées sur ~25 000 tokens par génération.</a:t>
-            </a:r>
-            <a:pPr algn="l" indent="0" marL="0">
-              <a:lnSpc>
-                <a:spcPts val="900"/>
-              </a:lnSpc>
-              <a:buNone/>
-            </a:pPr>
-            <a:r>
-              <a:rPr lang="en-US" sz="568" dirty="0">
-                <a:solidFill>
-                  <a:srgbClr val="999999"/>
-                </a:solidFill>
-                <a:latin typeface="JetBrains Mono" pitchFamily="34" charset="0"/>
-                <a:ea typeface="JetBrains Mono" pitchFamily="34" charset="-122"/>
-                <a:cs typeface="JetBrains Mono" pitchFamily="34" charset="-120"/>
-              </a:rPr>
-              <a:t>
-</a:t>
-            </a:r>
-            <a:pPr algn="l" indent="0" marL="0">
-              <a:lnSpc>
-                <a:spcPts val="900"/>
-              </a:lnSpc>
-              <a:buNone/>
-            </a:pPr>
-            <a:r>
-              <a:rPr lang="en-US" sz="568" dirty="0">
-                <a:solidFill>
-                  <a:srgbClr val="999999"/>
-                </a:solidFill>
-                <a:latin typeface="JetBrains Mono" pitchFamily="34" charset="0"/>
-                <a:ea typeface="JetBrains Mono" pitchFamily="34" charset="-122"/>
-                <a:cs typeface="JetBrains Mono" pitchFamily="34" charset="-120"/>
-              </a:rPr>
-              <a:t> Taux de change : 1 € ≈ 11 MAD. Prix indicatifs, mars 2026.</a:t>
+              <a:t>*Estimations basées sur ~25 000 tokens par génération.
+ Taux de change : 1 € ≈ 11 MAD. Prix indicatifs, mars 2026.</a:t>
             </a:r>
             <a:endParaRPr lang="en-US" sz="568" dirty="0"/>
           </a:p>
@@ -10752,6 +10491,13 @@
           </a:solidFill>
           <a:ln/>
         </p:spPr>
+        <p:txBody>
+          <a:bodyPr/>
+          <a:lstStyle/>
+          <a:p>
+            <a:endParaRPr lang="fr-FR"/>
+          </a:p>
+        </p:txBody>
       </p:sp>
       <p:sp>
         <p:nvSpPr>
@@ -10776,7 +10522,7 @@
           </a:bodyPr>
           <a:lstStyle/>
           <a:p>
-            <a:pPr algn="l" indent="0" marL="0">
+            <a:pPr marL="0" indent="0" algn="l">
               <a:lnSpc>
                 <a:spcPts val="1600"/>
               </a:lnSpc>
@@ -10820,7 +10566,7 @@
           </a:bodyPr>
           <a:lstStyle/>
           <a:p>
-            <a:pPr algn="l" indent="0" marL="0">
+            <a:pPr marL="0" indent="0" algn="l">
               <a:lnSpc>
                 <a:spcPts val="900"/>
               </a:lnSpc>
@@ -10864,7 +10610,7 @@
           </a:bodyPr>
           <a:lstStyle/>
           <a:p>
-            <a:pPr algn="l" indent="0" marL="0">
+            <a:pPr marL="0" indent="0" algn="l">
               <a:lnSpc>
                 <a:spcPts val="900"/>
               </a:lnSpc>
@@ -10908,7 +10654,7 @@
           </a:bodyPr>
           <a:lstStyle/>
           <a:p>
-            <a:pPr algn="l" indent="0" marL="0">
+            <a:pPr marL="0" indent="0" algn="l">
               <a:lnSpc>
                 <a:spcPts val="900"/>
               </a:lnSpc>
@@ -10952,7 +10698,7 @@
           </a:bodyPr>
           <a:lstStyle/>
           <a:p>
-            <a:pPr algn="l" indent="0" marL="0">
+            <a:pPr marL="0" indent="0" algn="l">
               <a:lnSpc>
                 <a:spcPts val="900"/>
               </a:lnSpc>
@@ -10996,7 +10742,7 @@
           </a:bodyPr>
           <a:lstStyle/>
           <a:p>
-            <a:pPr algn="l" indent="0" marL="0">
+            <a:pPr marL="0" indent="0" algn="l">
               <a:lnSpc>
                 <a:spcPts val="900"/>
               </a:lnSpc>
@@ -11040,7 +10786,7 @@
           </a:bodyPr>
           <a:lstStyle/>
           <a:p>
-            <a:pPr algn="l" indent="0" marL="0">
+            <a:pPr marL="0" indent="0" algn="l">
               <a:lnSpc>
                 <a:spcPts val="900"/>
               </a:lnSpc>
@@ -11084,7 +10830,7 @@
           </a:bodyPr>
           <a:lstStyle/>
           <a:p>
-            <a:pPr algn="l" indent="0" marL="0">
+            <a:pPr marL="0" indent="0" algn="l">
               <a:lnSpc>
                 <a:spcPts val="900"/>
               </a:lnSpc>
@@ -11128,7 +10874,7 @@
           </a:bodyPr>
           <a:lstStyle/>
           <a:p>
-            <a:pPr algn="l" indent="0" marL="0">
+            <a:pPr marL="0" indent="0" algn="l">
               <a:lnSpc>
                 <a:spcPts val="900"/>
               </a:lnSpc>
@@ -11168,6 +10914,13 @@
           </a:solidFill>
           <a:ln/>
         </p:spPr>
+        <p:txBody>
+          <a:bodyPr/>
+          <a:lstStyle/>
+          <a:p>
+            <a:endParaRPr lang="fr-FR"/>
+          </a:p>
+        </p:txBody>
       </p:sp>
       <p:sp>
         <p:nvSpPr>
@@ -11192,14 +10945,14 @@
           </a:bodyPr>
           <a:lstStyle/>
           <a:p>
-            <a:pPr algn="ctr" indent="0" marL="0">
+            <a:pPr marL="0" indent="0" algn="ctr">
               <a:lnSpc>
                 <a:spcPts val="700"/>
               </a:lnSpc>
               <a:buNone/>
             </a:pPr>
             <a:r>
-              <a:rPr lang="en-US" sz="568" spc="1" kern="0" dirty="0">
+              <a:rPr lang="en-US" sz="568" kern="0" spc="1" dirty="0">
                 <a:solidFill>
                   <a:srgbClr val="FFFFFF">
                     <a:alpha val="70000"/>
@@ -11238,7 +10991,7 @@
           </a:bodyPr>
           <a:lstStyle/>
           <a:p>
-            <a:pPr algn="ctr" indent="0" marL="0">
+            <a:pPr marL="0" indent="0" algn="ctr">
               <a:lnSpc>
                 <a:spcPts val="2200"/>
               </a:lnSpc>
@@ -11282,7 +11035,7 @@
           </a:bodyPr>
           <a:lstStyle/>
           <a:p>
-            <a:pPr algn="l" indent="0" marL="0">
+            <a:pPr marL="0" indent="0" algn="l">
               <a:lnSpc>
                 <a:spcPts val="1600"/>
               </a:lnSpc>
@@ -11328,14 +11081,14 @@
           </a:bodyPr>
           <a:lstStyle/>
           <a:p>
-            <a:pPr algn="ctr" indent="0" marL="0">
+            <a:pPr marL="0" indent="0" algn="ctr">
               <a:lnSpc>
                 <a:spcPts val="700"/>
               </a:lnSpc>
               <a:buNone/>
             </a:pPr>
             <a:r>
-              <a:rPr lang="en-US" sz="568" spc="1" kern="0" dirty="0">
+              <a:rPr lang="en-US" sz="568" kern="0" spc="1" dirty="0">
                 <a:solidFill>
                   <a:srgbClr val="FFFFFF">
                     <a:alpha val="70000"/>
@@ -11374,7 +11127,7 @@
           </a:bodyPr>
           <a:lstStyle/>
           <a:p>
-            <a:pPr algn="ctr" indent="0" marL="0">
+            <a:pPr marL="0" indent="0" algn="ctr">
               <a:lnSpc>
                 <a:spcPts val="2200"/>
               </a:lnSpc>
@@ -11418,7 +11171,7 @@
           </a:bodyPr>
           <a:lstStyle/>
           <a:p>
-            <a:pPr algn="ctr" indent="0" marL="0">
+            <a:pPr marL="0" indent="0" algn="ctr">
               <a:lnSpc>
                 <a:spcPts val="3200"/>
               </a:lnSpc>
@@ -11462,14 +11215,14 @@
           </a:bodyPr>
           <a:lstStyle/>
           <a:p>
-            <a:pPr algn="ctr" indent="0" marL="0">
+            <a:pPr marL="0" indent="0" algn="ctr">
               <a:lnSpc>
                 <a:spcPts val="800"/>
               </a:lnSpc>
               <a:buNone/>
             </a:pPr>
             <a:r>
-              <a:rPr lang="en-US" sz="621" spc="1" kern="0" dirty="0">
+              <a:rPr lang="en-US" sz="621" kern="0" spc="1" dirty="0">
                 <a:solidFill>
                   <a:srgbClr val="999999"/>
                 </a:solidFill>
@@ -11510,14 +11263,14 @@
       </p:grpSpPr>
       <p:pic>
         <p:nvPicPr>
-          <p:cNvPr id="3" name="Image 0" descr="preencoded.png">    </p:cNvPr>
+          <p:cNvPr id="3" name="Image 0" descr="preencoded.png"/>
           <p:cNvPicPr>
             <a:picLocks noChangeAspect="1"/>
           </p:cNvPicPr>
           <p:nvPr/>
         </p:nvPicPr>
         <p:blipFill>
-          <a:blip r:embed="rId1"/>
+          <a:blip r:embed="rId3"/>
           <a:stretch>
             <a:fillRect/>
           </a:stretch>
@@ -11553,6 +11306,13 @@
           </a:solidFill>
           <a:ln/>
         </p:spPr>
+        <p:txBody>
+          <a:bodyPr/>
+          <a:lstStyle/>
+          <a:p>
+            <a:endParaRPr lang="fr-FR"/>
+          </a:p>
+        </p:txBody>
       </p:sp>
       <p:sp>
         <p:nvSpPr>
@@ -11573,6 +11333,13 @@
           </a:solidFill>
           <a:ln/>
         </p:spPr>
+        <p:txBody>
+          <a:bodyPr/>
+          <a:lstStyle/>
+          <a:p>
+            <a:endParaRPr lang="fr-FR"/>
+          </a:p>
+        </p:txBody>
       </p:sp>
       <p:sp>
         <p:nvSpPr>
@@ -11598,6 +11365,13 @@
             <a:prstDash val="solid"/>
           </a:ln>
         </p:spPr>
+        <p:txBody>
+          <a:bodyPr/>
+          <a:lstStyle/>
+          <a:p>
+            <a:endParaRPr lang="fr-FR"/>
+          </a:p>
+        </p:txBody>
       </p:sp>
       <p:sp>
         <p:nvSpPr>
@@ -11622,7 +11396,7 @@
           </a:bodyPr>
           <a:lstStyle/>
           <a:p>
-            <a:pPr algn="ctr" indent="0" marL="0">
+            <a:pPr marL="0" indent="0" algn="ctr">
               <a:lnSpc>
                 <a:spcPts val="900"/>
               </a:lnSpc>
@@ -11662,6 +11436,13 @@
           </a:solidFill>
           <a:ln/>
         </p:spPr>
+        <p:txBody>
+          <a:bodyPr/>
+          <a:lstStyle/>
+          <a:p>
+            <a:endParaRPr lang="fr-FR"/>
+          </a:p>
+        </p:txBody>
       </p:sp>
       <p:sp>
         <p:nvSpPr>
@@ -11686,7 +11467,7 @@
           </a:bodyPr>
           <a:lstStyle/>
           <a:p>
-            <a:pPr algn="ctr" indent="0" marL="0">
+            <a:pPr marL="0" indent="0" algn="ctr">
               <a:lnSpc>
                 <a:spcPts val="900"/>
               </a:lnSpc>
@@ -11731,6 +11512,13 @@
             <a:prstDash val="solid"/>
           </a:ln>
         </p:spPr>
+        <p:txBody>
+          <a:bodyPr/>
+          <a:lstStyle/>
+          <a:p>
+            <a:endParaRPr lang="fr-FR"/>
+          </a:p>
+        </p:txBody>
       </p:sp>
       <p:sp>
         <p:nvSpPr>
@@ -11755,7 +11543,7 @@
           </a:bodyPr>
           <a:lstStyle/>
           <a:p>
-            <a:pPr algn="ctr" indent="0" marL="0">
+            <a:pPr marL="0" indent="0" algn="ctr">
               <a:lnSpc>
                 <a:spcPts val="900"/>
               </a:lnSpc>
@@ -11795,6 +11583,13 @@
           </a:solidFill>
           <a:ln/>
         </p:spPr>
+        <p:txBody>
+          <a:bodyPr/>
+          <a:lstStyle/>
+          <a:p>
+            <a:endParaRPr lang="fr-FR"/>
+          </a:p>
+        </p:txBody>
       </p:sp>
       <p:sp>
         <p:nvSpPr>
@@ -11819,7 +11614,7 @@
           </a:bodyPr>
           <a:lstStyle/>
           <a:p>
-            <a:pPr algn="l" indent="0" marL="0">
+            <a:pPr marL="0" indent="0" algn="l">
               <a:lnSpc>
                 <a:spcPts val="800"/>
               </a:lnSpc>
@@ -11864,6 +11659,13 @@
             <a:prstDash val="solid"/>
           </a:ln>
         </p:spPr>
+        <p:txBody>
+          <a:bodyPr/>
+          <a:lstStyle/>
+          <a:p>
+            <a:endParaRPr lang="fr-FR"/>
+          </a:p>
+        </p:txBody>
       </p:sp>
       <p:sp>
         <p:nvSpPr>
@@ -11888,7 +11690,7 @@
           </a:bodyPr>
           <a:lstStyle/>
           <a:p>
-            <a:pPr algn="l" indent="0" marL="0">
+            <a:pPr marL="0" indent="0" algn="l">
               <a:lnSpc>
                 <a:spcPts val="700"/>
               </a:lnSpc>
@@ -11903,42 +11705,8 @@
                 <a:ea typeface="Times New Roman" pitchFamily="34" charset="-122"/>
                 <a:cs typeface="Times New Roman" pitchFamily="34" charset="-120"/>
               </a:rPr>
-              <a:t>RAG Context</a:t>
-            </a:r>
-            <a:pPr algn="l" indent="0" marL="0">
-              <a:lnSpc>
-                <a:spcPts val="700"/>
-              </a:lnSpc>
-              <a:buNone/>
-            </a:pPr>
-            <a:r>
-              <a:rPr lang="en-US" sz="568" dirty="0">
-                <a:solidFill>
-                  <a:srgbClr val="000000"/>
-                </a:solidFill>
-                <a:latin typeface="Times New Roman" pitchFamily="34" charset="0"/>
-                <a:ea typeface="Times New Roman" pitchFamily="34" charset="-122"/>
-                <a:cs typeface="Times New Roman" pitchFamily="34" charset="-120"/>
-              </a:rPr>
-              <a:t>
-</a:t>
-            </a:r>
-            <a:pPr algn="l" indent="0" marL="0">
-              <a:lnSpc>
-                <a:spcPts val="700"/>
-              </a:lnSpc>
-              <a:buNone/>
-            </a:pPr>
-            <a:r>
-              <a:rPr lang="en-US" sz="568" dirty="0">
-                <a:solidFill>
-                  <a:srgbClr val="000000"/>
-                </a:solidFill>
-                <a:latin typeface="Times New Roman" pitchFamily="34" charset="0"/>
-                <a:ea typeface="Times New Roman" pitchFamily="34" charset="-122"/>
-                <a:cs typeface="Times New Roman" pitchFamily="34" charset="-120"/>
-              </a:rPr>
-              <a:t>(Qdrant)</a:t>
+              <a:t>RAG Context
+(Qdrant)</a:t>
             </a:r>
             <a:endParaRPr lang="en-US" sz="568" dirty="0"/>
           </a:p>
@@ -11968,6 +11736,13 @@
             <a:prstDash val="solid"/>
           </a:ln>
         </p:spPr>
+        <p:txBody>
+          <a:bodyPr/>
+          <a:lstStyle/>
+          <a:p>
+            <a:endParaRPr lang="fr-FR"/>
+          </a:p>
+        </p:txBody>
       </p:sp>
       <p:sp>
         <p:nvSpPr>
@@ -11992,7 +11767,7 @@
           </a:bodyPr>
           <a:lstStyle/>
           <a:p>
-            <a:pPr algn="l" indent="0" marL="0">
+            <a:pPr marL="0" indent="0" algn="l">
               <a:lnSpc>
                 <a:spcPts val="700"/>
               </a:lnSpc>
@@ -12007,42 +11782,8 @@
                 <a:ea typeface="Times New Roman" pitchFamily="34" charset="-122"/>
                 <a:cs typeface="Times New Roman" pitchFamily="34" charset="-120"/>
               </a:rPr>
-              <a:t>Prompt</a:t>
-            </a:r>
-            <a:pPr algn="l" indent="0" marL="0">
-              <a:lnSpc>
-                <a:spcPts val="700"/>
-              </a:lnSpc>
-              <a:buNone/>
-            </a:pPr>
-            <a:r>
-              <a:rPr lang="en-US" sz="568" dirty="0">
-                <a:solidFill>
-                  <a:srgbClr val="000000"/>
-                </a:solidFill>
-                <a:latin typeface="Times New Roman" pitchFamily="34" charset="0"/>
-                <a:ea typeface="Times New Roman" pitchFamily="34" charset="-122"/>
-                <a:cs typeface="Times New Roman" pitchFamily="34" charset="-120"/>
-              </a:rPr>
-              <a:t>
-</a:t>
-            </a:r>
-            <a:pPr algn="l" indent="0" marL="0">
-              <a:lnSpc>
-                <a:spcPts val="700"/>
-              </a:lnSpc>
-              <a:buNone/>
-            </a:pPr>
-            <a:r>
-              <a:rPr lang="en-US" sz="568" dirty="0">
-                <a:solidFill>
-                  <a:srgbClr val="000000"/>
-                </a:solidFill>
-                <a:latin typeface="Times New Roman" pitchFamily="34" charset="0"/>
-                <a:ea typeface="Times New Roman" pitchFamily="34" charset="-122"/>
-                <a:cs typeface="Times New Roman" pitchFamily="34" charset="-120"/>
-              </a:rPr>
-              <a:t>Builder</a:t>
+              <a:t>Prompt
+Builder</a:t>
             </a:r>
             <a:endParaRPr lang="en-US" sz="568" dirty="0"/>
           </a:p>
@@ -12072,6 +11813,13 @@
             <a:prstDash val="solid"/>
           </a:ln>
         </p:spPr>
+        <p:txBody>
+          <a:bodyPr/>
+          <a:lstStyle/>
+          <a:p>
+            <a:endParaRPr lang="fr-FR"/>
+          </a:p>
+        </p:txBody>
       </p:sp>
       <p:sp>
         <p:nvSpPr>
@@ -12096,7 +11844,7 @@
           </a:bodyPr>
           <a:lstStyle/>
           <a:p>
-            <a:pPr algn="l" indent="0" marL="0">
+            <a:pPr marL="0" indent="0" algn="l">
               <a:lnSpc>
                 <a:spcPts val="700"/>
               </a:lnSpc>
@@ -12111,42 +11859,8 @@
                 <a:ea typeface="Times New Roman" pitchFamily="34" charset="-122"/>
                 <a:cs typeface="Times New Roman" pitchFamily="34" charset="-120"/>
               </a:rPr>
-              <a:t>Appel LLM</a:t>
-            </a:r>
-            <a:pPr algn="l" indent="0" marL="0">
-              <a:lnSpc>
-                <a:spcPts val="700"/>
-              </a:lnSpc>
-              <a:buNone/>
-            </a:pPr>
-            <a:r>
-              <a:rPr lang="en-US" sz="568" dirty="0">
-                <a:solidFill>
-                  <a:srgbClr val="000000"/>
-                </a:solidFill>
-                <a:latin typeface="Times New Roman" pitchFamily="34" charset="0"/>
-                <a:ea typeface="Times New Roman" pitchFamily="34" charset="-122"/>
-                <a:cs typeface="Times New Roman" pitchFamily="34" charset="-120"/>
-              </a:rPr>
-              <a:t>
-</a:t>
-            </a:r>
-            <a:pPr algn="l" indent="0" marL="0">
-              <a:lnSpc>
-                <a:spcPts val="700"/>
-              </a:lnSpc>
-              <a:buNone/>
-            </a:pPr>
-            <a:r>
-              <a:rPr lang="en-US" sz="568" dirty="0">
-                <a:solidFill>
-                  <a:srgbClr val="000000"/>
-                </a:solidFill>
-                <a:latin typeface="Times New Roman" pitchFamily="34" charset="0"/>
-                <a:ea typeface="Times New Roman" pitchFamily="34" charset="-122"/>
-                <a:cs typeface="Times New Roman" pitchFamily="34" charset="-120"/>
-              </a:rPr>
-              <a:t>(Claude/GPT)</a:t>
+              <a:t>Appel LLM
+(Claude/GPT)</a:t>
             </a:r>
             <a:endParaRPr lang="en-US" sz="568" dirty="0"/>
           </a:p>
@@ -12176,6 +11890,13 @@
             <a:prstDash val="solid"/>
           </a:ln>
         </p:spPr>
+        <p:txBody>
+          <a:bodyPr/>
+          <a:lstStyle/>
+          <a:p>
+            <a:endParaRPr lang="fr-FR"/>
+          </a:p>
+        </p:txBody>
       </p:sp>
       <p:sp>
         <p:nvSpPr>
@@ -12200,7 +11921,7 @@
           </a:bodyPr>
           <a:lstStyle/>
           <a:p>
-            <a:pPr algn="ctr" indent="0" marL="0">
+            <a:pPr marL="0" indent="0" algn="ctr">
               <a:lnSpc>
                 <a:spcPts val="900"/>
               </a:lnSpc>
@@ -12240,6 +11961,13 @@
           </a:solidFill>
           <a:ln/>
         </p:spPr>
+        <p:txBody>
+          <a:bodyPr/>
+          <a:lstStyle/>
+          <a:p>
+            <a:endParaRPr lang="fr-FR"/>
+          </a:p>
+        </p:txBody>
       </p:sp>
       <p:sp>
         <p:nvSpPr>
@@ -12264,7 +11992,7 @@
           </a:bodyPr>
           <a:lstStyle/>
           <a:p>
-            <a:pPr algn="l" indent="0" marL="0">
+            <a:pPr marL="0" indent="0" algn="l">
               <a:lnSpc>
                 <a:spcPts val="2600"/>
               </a:lnSpc>
@@ -12308,7 +12036,7 @@
           </a:bodyPr>
           <a:lstStyle/>
           <a:p>
-            <a:pPr algn="l" indent="0" marL="0">
+            <a:pPr marL="0" indent="0" algn="l">
               <a:lnSpc>
                 <a:spcPts val="1600"/>
               </a:lnSpc>
@@ -12352,7 +12080,7 @@
           </a:bodyPr>
           <a:lstStyle/>
           <a:p>
-            <a:pPr algn="l" indent="0" marL="0">
+            <a:pPr marL="0" indent="0" algn="l">
               <a:lnSpc>
                 <a:spcPts val="1100"/>
               </a:lnSpc>
@@ -12396,7 +12124,7 @@
           </a:bodyPr>
           <a:lstStyle/>
           <a:p>
-            <a:pPr algn="l" indent="0" marL="0">
+            <a:pPr marL="0" indent="0" algn="l">
               <a:lnSpc>
                 <a:spcPts val="1100"/>
               </a:lnSpc>
@@ -12440,7 +12168,7 @@
           </a:bodyPr>
           <a:lstStyle/>
           <a:p>
-            <a:pPr algn="l" indent="0" marL="0">
+            <a:pPr marL="0" indent="0" algn="l">
               <a:lnSpc>
                 <a:spcPts val="1100"/>
               </a:lnSpc>
@@ -12484,7 +12212,7 @@
           </a:bodyPr>
           <a:lstStyle/>
           <a:p>
-            <a:pPr algn="l" indent="0" marL="0">
+            <a:pPr marL="0" indent="0" algn="l">
               <a:lnSpc>
                 <a:spcPts val="1100"/>
               </a:lnSpc>
@@ -12529,6 +12257,13 @@
             <a:prstDash val="solid"/>
           </a:ln>
         </p:spPr>
+        <p:txBody>
+          <a:bodyPr/>
+          <a:lstStyle/>
+          <a:p>
+            <a:endParaRPr lang="fr-FR"/>
+          </a:p>
+        </p:txBody>
       </p:sp>
       <p:sp>
         <p:nvSpPr>
@@ -12553,18 +12288,12 @@
           </a:bodyPr>
           <a:lstStyle/>
           <a:p>
-            <a:pPr algn="l" indent="0" marL="0">
+            <a:pPr marL="0" indent="0" algn="l">
               <a:lnSpc>
                 <a:spcPts val="1100"/>
               </a:lnSpc>
               <a:buNone/>
             </a:pPr>
-            <a:pPr algn="l" indent="0" marL="0">
-              <a:lnSpc>
-                <a:spcPts val="1100"/>
-              </a:lnSpc>
-              <a:buNone/>
-            </a:pPr>
             <a:r>
               <a:rPr lang="en-US" sz="634" b="1" dirty="0">
                 <a:solidFill>
@@ -12576,12 +12305,6 @@
               </a:rPr>
               <a:t>Microservice RAG-ETL</a:t>
             </a:r>
-            <a:pPr algn="l" indent="0" marL="0">
-              <a:lnSpc>
-                <a:spcPts val="1100"/>
-              </a:lnSpc>
-              <a:buNone/>
-            </a:pPr>
             <a:r>
               <a:rPr lang="en-US" sz="674" dirty="0">
                 <a:solidFill>
@@ -12591,41 +12314,7 @@
                 <a:ea typeface="JetBrains Mono" pitchFamily="34" charset="-122"/>
                 <a:cs typeface="JetBrains Mono" pitchFamily="34" charset="-120"/>
               </a:rPr>
-              <a:t> indépendant pour </a:t>
-            </a:r>
-            <a:pPr algn="l" indent="0" marL="0">
-              <a:lnSpc>
-                <a:spcPts val="1100"/>
-              </a:lnSpc>
-              <a:buNone/>
-            </a:pPr>
-            <a:r>
-              <a:rPr lang="en-US" sz="674" dirty="0">
-                <a:solidFill>
-                  <a:srgbClr val="666666"/>
-                </a:solidFill>
-                <a:latin typeface="JetBrains Mono" pitchFamily="34" charset="0"/>
-                <a:ea typeface="JetBrains Mono" pitchFamily="34" charset="-122"/>
-                <a:cs typeface="JetBrains Mono" pitchFamily="34" charset="-120"/>
-              </a:rPr>
-              <a:t>l'indexation de vos documents (PDF, </a:t>
-            </a:r>
-            <a:pPr algn="l" indent="0" marL="0">
-              <a:lnSpc>
-                <a:spcPts val="1100"/>
-              </a:lnSpc>
-              <a:buNone/>
-            </a:pPr>
-            <a:r>
-              <a:rPr lang="en-US" sz="674" dirty="0">
-                <a:solidFill>
-                  <a:srgbClr val="666666"/>
-                </a:solidFill>
-                <a:latin typeface="JetBrains Mono" pitchFamily="34" charset="0"/>
-                <a:ea typeface="JetBrains Mono" pitchFamily="34" charset="-122"/>
-                <a:cs typeface="JetBrains Mono" pitchFamily="34" charset="-120"/>
-              </a:rPr>
-              <a:t>DOCX, TXT).</a:t>
+              <a:t> indépendant pour l'indexation de vos documents (PDF, DOCX, TXT).</a:t>
             </a:r>
             <a:endParaRPr lang="en-US" sz="674" dirty="0"/>
           </a:p>
@@ -12658,14 +12347,14 @@
       </p:grpSpPr>
       <p:pic>
         <p:nvPicPr>
-          <p:cNvPr id="3" name="Image 0" descr="preencoded.png">    </p:cNvPr>
+          <p:cNvPr id="3" name="Image 0" descr="preencoded.png"/>
           <p:cNvPicPr>
             <a:picLocks noChangeAspect="1"/>
           </p:cNvPicPr>
           <p:nvPr/>
         </p:nvPicPr>
         <p:blipFill>
-          <a:blip r:embed="rId1"/>
+          <a:blip r:embed="rId3"/>
           <a:stretch>
             <a:fillRect/>
           </a:stretch>
@@ -12701,6 +12390,13 @@
           </a:solidFill>
           <a:ln/>
         </p:spPr>
+        <p:txBody>
+          <a:bodyPr/>
+          <a:lstStyle/>
+          <a:p>
+            <a:endParaRPr lang="fr-FR"/>
+          </a:p>
+        </p:txBody>
       </p:sp>
       <p:sp>
         <p:nvSpPr>
@@ -12721,6 +12417,13 @@
           </a:solidFill>
           <a:ln/>
         </p:spPr>
+        <p:txBody>
+          <a:bodyPr/>
+          <a:lstStyle/>
+          <a:p>
+            <a:endParaRPr lang="fr-FR"/>
+          </a:p>
+        </p:txBody>
       </p:sp>
       <p:sp>
         <p:nvSpPr>
@@ -12745,7 +12448,7 @@
           </a:bodyPr>
           <a:lstStyle/>
           <a:p>
-            <a:pPr algn="l" indent="0" marL="0">
+            <a:pPr marL="0" indent="0" algn="l">
               <a:lnSpc>
                 <a:spcPts val="3200"/>
               </a:lnSpc>
@@ -12789,7 +12492,7 @@
           </a:bodyPr>
           <a:lstStyle/>
           <a:p>
-            <a:pPr algn="l" indent="0" marL="0">
+            <a:pPr marL="0" indent="0" algn="l">
               <a:lnSpc>
                 <a:spcPts val="900"/>
               </a:lnSpc>
@@ -12833,7 +12536,7 @@
           </a:bodyPr>
           <a:lstStyle/>
           <a:p>
-            <a:pPr algn="l" indent="0" marL="0">
+            <a:pPr marL="0" indent="0" algn="l">
               <a:lnSpc>
                 <a:spcPts val="900"/>
               </a:lnSpc>
@@ -12877,7 +12580,7 @@
           </a:bodyPr>
           <a:lstStyle/>
           <a:p>
-            <a:pPr algn="l" indent="0" marL="0">
+            <a:pPr marL="0" indent="0" algn="l">
               <a:lnSpc>
                 <a:spcPts val="900"/>
               </a:lnSpc>
@@ -12921,7 +12624,7 @@
           </a:bodyPr>
           <a:lstStyle/>
           <a:p>
-            <a:pPr algn="l" indent="0" marL="0">
+            <a:pPr marL="0" indent="0" algn="l">
               <a:lnSpc>
                 <a:spcPts val="900"/>
               </a:lnSpc>
@@ -12965,14 +12668,14 @@
           </a:bodyPr>
           <a:lstStyle/>
           <a:p>
-            <a:pPr algn="l" indent="0" marL="0">
+            <a:pPr marL="0" indent="0" algn="l">
               <a:lnSpc>
                 <a:spcPts val="800"/>
               </a:lnSpc>
               <a:buNone/>
             </a:pPr>
             <a:r>
-              <a:rPr lang="en-US" sz="584" b="1" spc="1" kern="0" dirty="0">
+              <a:rPr lang="en-US" sz="584" b="1" kern="0" spc="1" dirty="0">
                 <a:solidFill>
                   <a:srgbClr val="FF4D4D"/>
                 </a:solidFill>
@@ -13009,7 +12712,7 @@
           </a:bodyPr>
           <a:lstStyle/>
           <a:p>
-            <a:pPr algn="l" indent="0" marL="0">
+            <a:pPr marL="0" indent="0" algn="l">
               <a:lnSpc>
                 <a:spcPts val="900"/>
               </a:lnSpc>
@@ -13053,7 +12756,7 @@
           </a:bodyPr>
           <a:lstStyle/>
           <a:p>
-            <a:pPr algn="l" indent="0" marL="0">
+            <a:pPr marL="0" indent="0" algn="l">
               <a:lnSpc>
                 <a:spcPts val="900"/>
               </a:lnSpc>
@@ -13097,14 +12800,14 @@
           </a:bodyPr>
           <a:lstStyle/>
           <a:p>
-            <a:pPr algn="l" indent="0" marL="0">
+            <a:pPr marL="0" indent="0" algn="l">
               <a:lnSpc>
                 <a:spcPts val="800"/>
               </a:lnSpc>
               <a:buNone/>
             </a:pPr>
             <a:r>
-              <a:rPr lang="en-US" sz="584" b="1" spc="1" kern="0" dirty="0">
+              <a:rPr lang="en-US" sz="584" b="1" kern="0" spc="1" dirty="0">
                 <a:solidFill>
                   <a:srgbClr val="FF4D4D"/>
                 </a:solidFill>
@@ -13141,7 +12844,7 @@
           </a:bodyPr>
           <a:lstStyle/>
           <a:p>
-            <a:pPr algn="l" indent="0" marL="0">
+            <a:pPr marL="0" indent="0" algn="l">
               <a:lnSpc>
                 <a:spcPts val="900"/>
               </a:lnSpc>
@@ -13185,7 +12888,7 @@
           </a:bodyPr>
           <a:lstStyle/>
           <a:p>
-            <a:pPr algn="l" indent="0" marL="0">
+            <a:pPr marL="0" indent="0" algn="l">
               <a:lnSpc>
                 <a:spcPts val="900"/>
               </a:lnSpc>
@@ -13229,14 +12932,14 @@
           </a:bodyPr>
           <a:lstStyle/>
           <a:p>
-            <a:pPr algn="l" indent="0" marL="0">
+            <a:pPr marL="0" indent="0" algn="l">
               <a:lnSpc>
                 <a:spcPts val="800"/>
               </a:lnSpc>
               <a:buNone/>
             </a:pPr>
             <a:r>
-              <a:rPr lang="en-US" sz="584" b="1" spc="1" kern="0" dirty="0">
+              <a:rPr lang="en-US" sz="584" b="1" kern="0" spc="1" dirty="0">
                 <a:solidFill>
                   <a:srgbClr val="1A1A1A"/>
                 </a:solidFill>
@@ -13273,7 +12976,7 @@
           </a:bodyPr>
           <a:lstStyle/>
           <a:p>
-            <a:pPr algn="l" indent="0" marL="0">
+            <a:pPr marL="0" indent="0" algn="l">
               <a:lnSpc>
                 <a:spcPts val="900"/>
               </a:lnSpc>
@@ -13317,7 +13020,7 @@
           </a:bodyPr>
           <a:lstStyle/>
           <a:p>
-            <a:pPr algn="l" indent="0" marL="0">
+            <a:pPr marL="0" indent="0" algn="l">
               <a:lnSpc>
                 <a:spcPts val="900"/>
               </a:lnSpc>
@@ -13361,14 +13064,14 @@
           </a:bodyPr>
           <a:lstStyle/>
           <a:p>
-            <a:pPr algn="l" indent="0" marL="0">
+            <a:pPr marL="0" indent="0" algn="l">
               <a:lnSpc>
                 <a:spcPts val="800"/>
               </a:lnSpc>
               <a:buNone/>
             </a:pPr>
             <a:r>
-              <a:rPr lang="en-US" sz="584" b="1" spc="1" kern="0" dirty="0">
+              <a:rPr lang="en-US" sz="584" b="1" kern="0" spc="1" dirty="0">
                 <a:solidFill>
                   <a:srgbClr val="1A1A1A"/>
                 </a:solidFill>
@@ -13405,7 +13108,7 @@
           </a:bodyPr>
           <a:lstStyle/>
           <a:p>
-            <a:pPr algn="l" indent="0" marL="0">
+            <a:pPr marL="0" indent="0" algn="l">
               <a:lnSpc>
                 <a:spcPts val="900"/>
               </a:lnSpc>
@@ -13727,4 +13430,613 @@
     </a:ext>
   </a:extLst>
 </a:theme>
+</file>
+
+<file path=ppt/theme/theme2.xml><?xml version="1.0" encoding="utf-8"?>
+<a:theme xmlns:a="http://schemas.openxmlformats.org/drawingml/2006/main" name="Thème Office">
+  <a:themeElements>
+    <a:clrScheme name="Office">
+      <a:dk1>
+        <a:sysClr val="windowText" lastClr="000000"/>
+      </a:dk1>
+      <a:lt1>
+        <a:sysClr val="window" lastClr="FFFFFF"/>
+      </a:lt1>
+      <a:dk2>
+        <a:srgbClr val="0E2841"/>
+      </a:dk2>
+      <a:lt2>
+        <a:srgbClr val="E8E8E8"/>
+      </a:lt2>
+      <a:accent1>
+        <a:srgbClr val="156082"/>
+      </a:accent1>
+      <a:accent2>
+        <a:srgbClr val="E97132"/>
+      </a:accent2>
+      <a:accent3>
+        <a:srgbClr val="196B24"/>
+      </a:accent3>
+      <a:accent4>
+        <a:srgbClr val="0F9ED5"/>
+      </a:accent4>
+      <a:accent5>
+        <a:srgbClr val="A02B93"/>
+      </a:accent5>
+      <a:accent6>
+        <a:srgbClr val="4EA72E"/>
+      </a:accent6>
+      <a:hlink>
+        <a:srgbClr val="467886"/>
+      </a:hlink>
+      <a:folHlink>
+        <a:srgbClr val="96607D"/>
+      </a:folHlink>
+    </a:clrScheme>
+    <a:fontScheme name="Office">
+      <a:majorFont>
+        <a:latin typeface="Aptos Display" panose="02110004020202020204"/>
+        <a:ea typeface=""/>
+        <a:cs typeface=""/>
+        <a:font script="Jpan" typeface="游ゴシック Light"/>
+        <a:font script="Hang" typeface="맑은 고딕"/>
+        <a:font script="Hans" typeface="等线 Light"/>
+        <a:font script="Hant" typeface="新細明體"/>
+        <a:font script="Arab" typeface="Times New Roman"/>
+        <a:font script="Hebr" typeface="Times New Roman"/>
+        <a:font script="Thai" typeface="Angsana New"/>
+        <a:font script="Ethi" typeface="Nyala"/>
+        <a:font script="Beng" typeface="Vrinda"/>
+        <a:font script="Gujr" typeface="Shruti"/>
+        <a:font script="Khmr" typeface="MoolBoran"/>
+        <a:font script="Knda" typeface="Tunga"/>
+        <a:font script="Guru" typeface="Raavi"/>
+        <a:font script="Cans" typeface="Euphemia"/>
+        <a:font script="Cher" typeface="Plantagenet Cherokee"/>
+        <a:font script="Yiii" typeface="Microsoft Yi Baiti"/>
+        <a:font script="Tibt" typeface="Microsoft Himalaya"/>
+        <a:font script="Thaa" typeface="MV Boli"/>
+        <a:font script="Deva" typeface="Mangal"/>
+        <a:font script="Telu" typeface="Gautami"/>
+        <a:font script="Taml" typeface="Latha"/>
+        <a:font script="Syrc" typeface="Estrangelo Edessa"/>
+        <a:font script="Orya" typeface="Kalinga"/>
+        <a:font script="Mlym" typeface="Kartika"/>
+        <a:font script="Laoo" typeface="DokChampa"/>
+        <a:font script="Sinh" typeface="Iskoola Pota"/>
+        <a:font script="Mong" typeface="Mongolian Baiti"/>
+        <a:font script="Viet" typeface="Times New Roman"/>
+        <a:font script="Uigh" typeface="Microsoft Uighur"/>
+        <a:font script="Geor" typeface="Sylfaen"/>
+        <a:font script="Armn" typeface="Arial"/>
+        <a:font script="Bugi" typeface="Leelawadee UI"/>
+        <a:font script="Bopo" typeface="Microsoft JhengHei"/>
+        <a:font script="Java" typeface="Javanese Text"/>
+        <a:font script="Lisu" typeface="Segoe UI"/>
+        <a:font script="Mymr" typeface="Myanmar Text"/>
+        <a:font script="Nkoo" typeface="Ebrima"/>
+        <a:font script="Olck" typeface="Nirmala UI"/>
+        <a:font script="Osma" typeface="Ebrima"/>
+        <a:font script="Phag" typeface="Phagspa"/>
+        <a:font script="Syrn" typeface="Estrangelo Edessa"/>
+        <a:font script="Syrj" typeface="Estrangelo Edessa"/>
+        <a:font script="Syre" typeface="Estrangelo Edessa"/>
+        <a:font script="Sora" typeface="Nirmala UI"/>
+        <a:font script="Tale" typeface="Microsoft Tai Le"/>
+        <a:font script="Talu" typeface="Microsoft New Tai Lue"/>
+        <a:font script="Tfng" typeface="Ebrima"/>
+      </a:majorFont>
+      <a:minorFont>
+        <a:latin typeface="Aptos" panose="02110004020202020204"/>
+        <a:ea typeface=""/>
+        <a:cs typeface=""/>
+        <a:font script="Jpan" typeface="游ゴシック"/>
+        <a:font script="Hang" typeface="맑은 고딕"/>
+        <a:font script="Hans" typeface="等线"/>
+        <a:font script="Hant" typeface="新細明體"/>
+        <a:font script="Arab" typeface="Arial"/>
+        <a:font script="Hebr" typeface="Arial"/>
+        <a:font script="Thai" typeface="Cordia New"/>
+        <a:font script="Ethi" typeface="Nyala"/>
+        <a:font script="Beng" typeface="Vrinda"/>
+        <a:font script="Gujr" typeface="Shruti"/>
+        <a:font script="Khmr" typeface="DaunPenh"/>
+        <a:font script="Knda" typeface="Tunga"/>
+        <a:font script="Guru" typeface="Raavi"/>
+        <a:font script="Cans" typeface="Euphemia"/>
+        <a:font script="Cher" typeface="Plantagenet Cherokee"/>
+        <a:font script="Yiii" typeface="Microsoft Yi Baiti"/>
+        <a:font script="Tibt" typeface="Microsoft Himalaya"/>
+        <a:font script="Thaa" typeface="MV Boli"/>
+        <a:font script="Deva" typeface="Mangal"/>
+        <a:font script="Telu" typeface="Gautami"/>
+        <a:font script="Taml" typeface="Latha"/>
+        <a:font script="Syrc" typeface="Estrangelo Edessa"/>
+        <a:font script="Orya" typeface="Kalinga"/>
+        <a:font script="Mlym" typeface="Kartika"/>
+        <a:font script="Laoo" typeface="DokChampa"/>
+        <a:font script="Sinh" typeface="Iskoola Pota"/>
+        <a:font script="Mong" typeface="Mongolian Baiti"/>
+        <a:font script="Viet" typeface="Arial"/>
+        <a:font script="Uigh" typeface="Microsoft Uighur"/>
+        <a:font script="Geor" typeface="Sylfaen"/>
+        <a:font script="Armn" typeface="Arial"/>
+        <a:font script="Bugi" typeface="Leelawadee UI"/>
+        <a:font script="Bopo" typeface="Microsoft JhengHei"/>
+        <a:font script="Java" typeface="Javanese Text"/>
+        <a:font script="Lisu" typeface="Segoe UI"/>
+        <a:font script="Mymr" typeface="Myanmar Text"/>
+        <a:font script="Nkoo" typeface="Ebrima"/>
+        <a:font script="Olck" typeface="Nirmala UI"/>
+        <a:font script="Osma" typeface="Ebrima"/>
+        <a:font script="Phag" typeface="Phagspa"/>
+        <a:font script="Syrn" typeface="Estrangelo Edessa"/>
+        <a:font script="Syrj" typeface="Estrangelo Edessa"/>
+        <a:font script="Syre" typeface="Estrangelo Edessa"/>
+        <a:font script="Sora" typeface="Nirmala UI"/>
+        <a:font script="Tale" typeface="Microsoft Tai Le"/>
+        <a:font script="Talu" typeface="Microsoft New Tai Lue"/>
+        <a:font script="Tfng" typeface="Ebrima"/>
+      </a:minorFont>
+    </a:fontScheme>
+    <a:fmtScheme name="Office">
+      <a:fillStyleLst>
+        <a:solidFill>
+          <a:schemeClr val="phClr"/>
+        </a:solidFill>
+        <a:gradFill rotWithShape="1">
+          <a:gsLst>
+            <a:gs pos="0">
+              <a:schemeClr val="phClr">
+                <a:lumMod val="110000"/>
+                <a:satMod val="105000"/>
+                <a:tint val="67000"/>
+              </a:schemeClr>
+            </a:gs>
+            <a:gs pos="50000">
+              <a:schemeClr val="phClr">
+                <a:lumMod val="105000"/>
+                <a:satMod val="103000"/>
+                <a:tint val="73000"/>
+              </a:schemeClr>
+            </a:gs>
+            <a:gs pos="100000">
+              <a:schemeClr val="phClr">
+                <a:lumMod val="105000"/>
+                <a:satMod val="109000"/>
+                <a:tint val="81000"/>
+              </a:schemeClr>
+            </a:gs>
+          </a:gsLst>
+          <a:lin ang="5400000" scaled="0"/>
+        </a:gradFill>
+        <a:gradFill rotWithShape="1">
+          <a:gsLst>
+            <a:gs pos="0">
+              <a:schemeClr val="phClr">
+                <a:satMod val="103000"/>
+                <a:lumMod val="102000"/>
+                <a:tint val="94000"/>
+              </a:schemeClr>
+            </a:gs>
+            <a:gs pos="50000">
+              <a:schemeClr val="phClr">
+                <a:satMod val="110000"/>
+                <a:lumMod val="100000"/>
+                <a:shade val="100000"/>
+              </a:schemeClr>
+            </a:gs>
+            <a:gs pos="100000">
+              <a:schemeClr val="phClr">
+                <a:lumMod val="99000"/>
+                <a:satMod val="120000"/>
+                <a:shade val="78000"/>
+              </a:schemeClr>
+            </a:gs>
+          </a:gsLst>
+          <a:lin ang="5400000" scaled="0"/>
+        </a:gradFill>
+      </a:fillStyleLst>
+      <a:lnStyleLst>
+        <a:ln w="12700" cap="flat" cmpd="sng" algn="ctr">
+          <a:solidFill>
+            <a:schemeClr val="phClr"/>
+          </a:solidFill>
+          <a:prstDash val="solid"/>
+          <a:miter lim="800000"/>
+        </a:ln>
+        <a:ln w="19050" cap="flat" cmpd="sng" algn="ctr">
+          <a:solidFill>
+            <a:schemeClr val="phClr"/>
+          </a:solidFill>
+          <a:prstDash val="solid"/>
+          <a:miter lim="800000"/>
+        </a:ln>
+        <a:ln w="25400" cap="flat" cmpd="sng" algn="ctr">
+          <a:solidFill>
+            <a:schemeClr val="phClr"/>
+          </a:solidFill>
+          <a:prstDash val="solid"/>
+          <a:miter lim="800000"/>
+        </a:ln>
+      </a:lnStyleLst>
+      <a:effectStyleLst>
+        <a:effectStyle>
+          <a:effectLst/>
+        </a:effectStyle>
+        <a:effectStyle>
+          <a:effectLst/>
+        </a:effectStyle>
+        <a:effectStyle>
+          <a:effectLst>
+            <a:outerShdw blurRad="57150" dist="19050" dir="5400000" algn="ctr" rotWithShape="0">
+              <a:srgbClr val="000000">
+                <a:alpha val="63000"/>
+              </a:srgbClr>
+            </a:outerShdw>
+          </a:effectLst>
+        </a:effectStyle>
+      </a:effectStyleLst>
+      <a:bgFillStyleLst>
+        <a:solidFill>
+          <a:schemeClr val="phClr"/>
+        </a:solidFill>
+        <a:solidFill>
+          <a:schemeClr val="phClr">
+            <a:tint val="95000"/>
+            <a:satMod val="170000"/>
+          </a:schemeClr>
+        </a:solidFill>
+        <a:gradFill rotWithShape="1">
+          <a:gsLst>
+            <a:gs pos="0">
+              <a:schemeClr val="phClr">
+                <a:tint val="93000"/>
+                <a:satMod val="150000"/>
+                <a:shade val="98000"/>
+                <a:lumMod val="102000"/>
+              </a:schemeClr>
+            </a:gs>
+            <a:gs pos="50000">
+              <a:schemeClr val="phClr">
+                <a:tint val="98000"/>
+                <a:satMod val="130000"/>
+                <a:shade val="90000"/>
+                <a:lumMod val="103000"/>
+              </a:schemeClr>
+            </a:gs>
+            <a:gs pos="100000">
+              <a:schemeClr val="phClr">
+                <a:shade val="63000"/>
+                <a:satMod val="120000"/>
+              </a:schemeClr>
+            </a:gs>
+          </a:gsLst>
+          <a:lin ang="5400000" scaled="0"/>
+        </a:gradFill>
+      </a:bgFillStyleLst>
+    </a:fmtScheme>
+  </a:themeElements>
+  <a:objectDefaults>
+    <a:lnDef>
+      <a:spPr/>
+      <a:bodyPr/>
+      <a:lstStyle/>
+      <a:style>
+        <a:lnRef idx="2">
+          <a:schemeClr val="accent1"/>
+        </a:lnRef>
+        <a:fillRef idx="0">
+          <a:schemeClr val="accent1"/>
+        </a:fillRef>
+        <a:effectRef idx="1">
+          <a:schemeClr val="accent1"/>
+        </a:effectRef>
+        <a:fontRef idx="minor">
+          <a:schemeClr val="tx1"/>
+        </a:fontRef>
+      </a:style>
+    </a:lnDef>
+  </a:objectDefaults>
+  <a:extraClrSchemeLst/>
+  <a:extLst>
+    <a:ext uri="{05A4C25C-085E-4340-85A3-A5531E510DB2}">
+      <thm15:themeFamily xmlns:thm15="http://schemas.microsoft.com/office/thememl/2012/main" name="Office Theme" id="{2E142A2C-CD16-42D6-873A-C26D2A0506FA}" vid="{1BDDFF52-6CD6-40A5-AB3C-68EB2F1E4D0A}"/>
+    </a:ext>
+  </a:extLst>
+</a:theme>
+</file>
+
+<file path=customXml/item1.xml><?xml version="1.0" encoding="utf-8"?>
+<ct:contentTypeSchema xmlns:ct="http://schemas.microsoft.com/office/2006/metadata/contentType" xmlns:ma="http://schemas.microsoft.com/office/2006/metadata/properties/metaAttributes" ct:_="" ma:_="" ma:contentTypeName="Document" ma:contentTypeID="0x010100F5A25A16C00ACF4287C25001CFCE01E1" ma:contentTypeVersion="15" ma:contentTypeDescription="Crée un document." ma:contentTypeScope="" ma:versionID="0713b060406bdd35be1b2785ef28870c">
+  <xsd:schema xmlns:xsd="http://www.w3.org/2001/XMLSchema" xmlns:xs="http://www.w3.org/2001/XMLSchema" xmlns:p="http://schemas.microsoft.com/office/2006/metadata/properties" xmlns:ns3="0764adc3-33d8-4bef-9efd-63aa810ed339" xmlns:ns4="77fa9fd6-26bb-43be-9c10-5ac4f8eb8ce5" targetNamespace="http://schemas.microsoft.com/office/2006/metadata/properties" ma:root="true" ma:fieldsID="fa5d5e4c3ff37dd3e259210489cca80c" ns3:_="" ns4:_="">
+    <xsd:import namespace="0764adc3-33d8-4bef-9efd-63aa810ed339"/>
+    <xsd:import namespace="77fa9fd6-26bb-43be-9c10-5ac4f8eb8ce5"/>
+    <xsd:element name="properties">
+      <xsd:complexType>
+        <xsd:sequence>
+          <xsd:element name="documentManagement">
+            <xsd:complexType>
+              <xsd:all>
+                <xsd:element ref="ns3:MediaServiceMetadata" minOccurs="0"/>
+                <xsd:element ref="ns3:MediaServiceFastMetadata" minOccurs="0"/>
+                <xsd:element ref="ns3:MediaServiceAutoTags" minOccurs="0"/>
+                <xsd:element ref="ns3:MediaLengthInSeconds" minOccurs="0"/>
+                <xsd:element ref="ns3:MediaServiceDateTaken" minOccurs="0"/>
+                <xsd:element ref="ns3:_activity" minOccurs="0"/>
+                <xsd:element ref="ns4:SharedWithUsers" minOccurs="0"/>
+                <xsd:element ref="ns4:SharedWithDetails" minOccurs="0"/>
+                <xsd:element ref="ns4:SharingHintHash" minOccurs="0"/>
+                <xsd:element ref="ns3:MediaServiceObjectDetectorVersions" minOccurs="0"/>
+                <xsd:element ref="ns3:MediaServiceSearchProperties" minOccurs="0"/>
+                <xsd:element ref="ns3:MediaServiceSystemTags" minOccurs="0"/>
+                <xsd:element ref="ns3:MediaServiceOCR" minOccurs="0"/>
+                <xsd:element ref="ns3:MediaServiceGenerationTime" minOccurs="0"/>
+                <xsd:element ref="ns3:MediaServiceEventHashCode" minOccurs="0"/>
+              </xsd:all>
+            </xsd:complexType>
+          </xsd:element>
+        </xsd:sequence>
+      </xsd:complexType>
+    </xsd:element>
+  </xsd:schema>
+  <xsd:schema xmlns:xsd="http://www.w3.org/2001/XMLSchema" xmlns:xs="http://www.w3.org/2001/XMLSchema" xmlns:dms="http://schemas.microsoft.com/office/2006/documentManagement/types" xmlns:pc="http://schemas.microsoft.com/office/infopath/2007/PartnerControls" targetNamespace="0764adc3-33d8-4bef-9efd-63aa810ed339" elementFormDefault="qualified">
+    <xsd:import namespace="http://schemas.microsoft.com/office/2006/documentManagement/types"/>
+    <xsd:import namespace="http://schemas.microsoft.com/office/infopath/2007/PartnerControls"/>
+    <xsd:element name="MediaServiceMetadata" ma:index="8" nillable="true" ma:displayName="MediaServiceMetadata" ma:hidden="true" ma:internalName="MediaServiceMetadata" ma:readOnly="true">
+      <xsd:simpleType>
+        <xsd:restriction base="dms:Note"/>
+      </xsd:simpleType>
+    </xsd:element>
+    <xsd:element name="MediaServiceFastMetadata" ma:index="9" nillable="true" ma:displayName="MediaServiceFastMetadata" ma:hidden="true" ma:internalName="MediaServiceFastMetadata" ma:readOnly="true">
+      <xsd:simpleType>
+        <xsd:restriction base="dms:Note"/>
+      </xsd:simpleType>
+    </xsd:element>
+    <xsd:element name="MediaServiceAutoTags" ma:index="10" nillable="true" ma:displayName="Tags" ma:internalName="MediaServiceAutoTags" ma:readOnly="true">
+      <xsd:simpleType>
+        <xsd:restriction base="dms:Text"/>
+      </xsd:simpleType>
+    </xsd:element>
+    <xsd:element name="MediaLengthInSeconds" ma:index="11" nillable="true" ma:displayName="MediaLengthInSeconds" ma:hidden="true" ma:internalName="MediaLengthInSeconds" ma:readOnly="true">
+      <xsd:simpleType>
+        <xsd:restriction base="dms:Unknown"/>
+      </xsd:simpleType>
+    </xsd:element>
+    <xsd:element name="MediaServiceDateTaken" ma:index="12" nillable="true" ma:displayName="MediaServiceDateTaken" ma:hidden="true" ma:indexed="true" ma:internalName="MediaServiceDateTaken" ma:readOnly="true">
+      <xsd:simpleType>
+        <xsd:restriction base="dms:Text"/>
+      </xsd:simpleType>
+    </xsd:element>
+    <xsd:element name="_activity" ma:index="13" nillable="true" ma:displayName="_activity" ma:hidden="true" ma:internalName="_activity">
+      <xsd:simpleType>
+        <xsd:restriction base="dms:Note"/>
+      </xsd:simpleType>
+    </xsd:element>
+    <xsd:element name="MediaServiceObjectDetectorVersions" ma:index="17" nillable="true" ma:displayName="MediaServiceObjectDetectorVersions" ma:hidden="true" ma:indexed="true" ma:internalName="MediaServiceObjectDetectorVersions" ma:readOnly="true">
+      <xsd:simpleType>
+        <xsd:restriction base="dms:Text"/>
+      </xsd:simpleType>
+    </xsd:element>
+    <xsd:element name="MediaServiceSearchProperties" ma:index="18" nillable="true" ma:displayName="MediaServiceSearchProperties" ma:hidden="true" ma:internalName="MediaServiceSearchProperties" ma:readOnly="true">
+      <xsd:simpleType>
+        <xsd:restriction base="dms:Note"/>
+      </xsd:simpleType>
+    </xsd:element>
+    <xsd:element name="MediaServiceSystemTags" ma:index="19" nillable="true" ma:displayName="MediaServiceSystemTags" ma:hidden="true" ma:internalName="MediaServiceSystemTags" ma:readOnly="true">
+      <xsd:simpleType>
+        <xsd:restriction base="dms:Note"/>
+      </xsd:simpleType>
+    </xsd:element>
+    <xsd:element name="MediaServiceOCR" ma:index="20" nillable="true" ma:displayName="Extracted Text" ma:internalName="MediaServiceOCR" ma:readOnly="true">
+      <xsd:simpleType>
+        <xsd:restriction base="dms:Note">
+          <xsd:maxLength value="255"/>
+        </xsd:restriction>
+      </xsd:simpleType>
+    </xsd:element>
+    <xsd:element name="MediaServiceGenerationTime" ma:index="21" nillable="true" ma:displayName="MediaServiceGenerationTime" ma:hidden="true" ma:internalName="MediaServiceGenerationTime" ma:readOnly="true">
+      <xsd:simpleType>
+        <xsd:restriction base="dms:Text"/>
+      </xsd:simpleType>
+    </xsd:element>
+    <xsd:element name="MediaServiceEventHashCode" ma:index="22" nillable="true" ma:displayName="MediaServiceEventHashCode" ma:hidden="true" ma:internalName="MediaServiceEventHashCode" ma:readOnly="true">
+      <xsd:simpleType>
+        <xsd:restriction base="dms:Text"/>
+      </xsd:simpleType>
+    </xsd:element>
+  </xsd:schema>
+  <xsd:schema xmlns:xsd="http://www.w3.org/2001/XMLSchema" xmlns:xs="http://www.w3.org/2001/XMLSchema" xmlns:dms="http://schemas.microsoft.com/office/2006/documentManagement/types" xmlns:pc="http://schemas.microsoft.com/office/infopath/2007/PartnerControls" targetNamespace="77fa9fd6-26bb-43be-9c10-5ac4f8eb8ce5" elementFormDefault="qualified">
+    <xsd:import namespace="http://schemas.microsoft.com/office/2006/documentManagement/types"/>
+    <xsd:import namespace="http://schemas.microsoft.com/office/infopath/2007/PartnerControls"/>
+    <xsd:element name="SharedWithUsers" ma:index="14" nillable="true" ma:displayName="Partagé avec" ma:internalName="SharedWithUsers" ma:readOnly="true">
+      <xsd:complexType>
+        <xsd:complexContent>
+          <xsd:extension base="dms:UserMulti">
+            <xsd:sequence>
+              <xsd:element name="UserInfo" minOccurs="0" maxOccurs="unbounded">
+                <xsd:complexType>
+                  <xsd:sequence>
+                    <xsd:element name="DisplayName" type="xsd:string" minOccurs="0"/>
+                    <xsd:element name="AccountId" type="dms:UserId" minOccurs="0" nillable="true"/>
+                    <xsd:element name="AccountType" type="xsd:string" minOccurs="0"/>
+                  </xsd:sequence>
+                </xsd:complexType>
+              </xsd:element>
+            </xsd:sequence>
+          </xsd:extension>
+        </xsd:complexContent>
+      </xsd:complexType>
+    </xsd:element>
+    <xsd:element name="SharedWithDetails" ma:index="15" nillable="true" ma:displayName="Partagé avec détails" ma:internalName="SharedWithDetails" ma:readOnly="true">
+      <xsd:simpleType>
+        <xsd:restriction base="dms:Note">
+          <xsd:maxLength value="255"/>
+        </xsd:restriction>
+      </xsd:simpleType>
+    </xsd:element>
+    <xsd:element name="SharingHintHash" ma:index="16" nillable="true" ma:displayName="Partage du hachage d’indicateur" ma:hidden="true" ma:internalName="SharingHintHash" ma:readOnly="true">
+      <xsd:simpleType>
+        <xsd:restriction base="dms:Text"/>
+      </xsd:simpleType>
+    </xsd:element>
+  </xsd:schema>
+  <xsd:schema xmlns="http://schemas.openxmlformats.org/package/2006/metadata/core-properties" xmlns:xsd="http://www.w3.org/2001/XMLSchema" xmlns:xsi="http://www.w3.org/2001/XMLSchema-instance" xmlns:dc="http://purl.org/dc/elements/1.1/" xmlns:dcterms="http://purl.org/dc/terms/" xmlns:odoc="http://schemas.microsoft.com/internal/obd" targetNamespace="http://schemas.openxmlformats.org/package/2006/metadata/core-properties" elementFormDefault="qualified" attributeFormDefault="unqualified" blockDefault="#all">
+    <xsd:import namespace="http://purl.org/dc/elements/1.1/" schemaLocation="http://dublincore.org/schemas/xmls/qdc/2003/04/02/dc.xsd"/>
+    <xsd:import namespace="http://purl.org/dc/terms/" schemaLocation="http://dublincore.org/schemas/xmls/qdc/2003/04/02/dcterms.xsd"/>
+    <xsd:element name="coreProperties" type="CT_coreProperties"/>
+    <xsd:complexType name="CT_coreProperties">
+      <xsd:all>
+        <xsd:element ref="dc:creator" minOccurs="0" maxOccurs="1"/>
+        <xsd:element ref="dcterms:created" minOccurs="0" maxOccurs="1"/>
+        <xsd:element ref="dc:identifier" minOccurs="0" maxOccurs="1"/>
+        <xsd:element name="contentType" minOccurs="0" maxOccurs="1" type="xsd:string" ma:index="0" ma:displayName="Type de contenu"/>
+        <xsd:element ref="dc:title" minOccurs="0" maxOccurs="1" ma:index="4" ma:displayName="Titre"/>
+        <xsd:element ref="dc:subject" minOccurs="0" maxOccurs="1"/>
+        <xsd:element ref="dc:description" minOccurs="0" maxOccurs="1"/>
+        <xsd:element name="keywords" minOccurs="0" maxOccurs="1" type="xsd:string"/>
+        <xsd:element ref="dc:language" minOccurs="0" maxOccurs="1"/>
+        <xsd:element name="category" minOccurs="0" maxOccurs="1" type="xsd:string"/>
+        <xsd:element name="version" minOccurs="0" maxOccurs="1" type="xsd:string"/>
+        <xsd:element name="revision" minOccurs="0" maxOccurs="1" type="xsd:string">
+          <xsd:annotation>
+            <xsd:documentation>
+                        This value indicates the number of saves or revisions. The application is responsible for updating this value after each revision.
+                    </xsd:documentation>
+          </xsd:annotation>
+        </xsd:element>
+        <xsd:element name="lastModifiedBy" minOccurs="0" maxOccurs="1" type="xsd:string"/>
+        <xsd:element ref="dcterms:modified" minOccurs="0" maxOccurs="1"/>
+        <xsd:element name="contentStatus" minOccurs="0" maxOccurs="1" type="xsd:string"/>
+      </xsd:all>
+    </xsd:complexType>
+  </xsd:schema>
+  <xs:schema xmlns:pc="http://schemas.microsoft.com/office/infopath/2007/PartnerControls" xmlns:xs="http://www.w3.org/2001/XMLSchema" targetNamespace="http://schemas.microsoft.com/office/infopath/2007/PartnerControls" elementFormDefault="qualified" attributeFormDefault="unqualified">
+    <xs:element name="Person">
+      <xs:complexType>
+        <xs:sequence>
+          <xs:element ref="pc:DisplayName" minOccurs="0"/>
+          <xs:element ref="pc:AccountId" minOccurs="0"/>
+          <xs:element ref="pc:AccountType" minOccurs="0"/>
+        </xs:sequence>
+      </xs:complexType>
+    </xs:element>
+    <xs:element name="DisplayName" type="xs:string"/>
+    <xs:element name="AccountId" type="xs:string"/>
+    <xs:element name="AccountType" type="xs:string"/>
+    <xs:element name="BDCAssociatedEntity">
+      <xs:complexType>
+        <xs:sequence>
+          <xs:element ref="pc:BDCEntity" minOccurs="0" maxOccurs="unbounded"/>
+        </xs:sequence>
+        <xs:attribute ref="pc:EntityNamespace"/>
+        <xs:attribute ref="pc:EntityName"/>
+        <xs:attribute ref="pc:SystemInstanceName"/>
+        <xs:attribute ref="pc:AssociationName"/>
+      </xs:complexType>
+    </xs:element>
+    <xs:attribute name="EntityNamespace" type="xs:string"/>
+    <xs:attribute name="EntityName" type="xs:string"/>
+    <xs:attribute name="SystemInstanceName" type="xs:string"/>
+    <xs:attribute name="AssociationName" type="xs:string"/>
+    <xs:element name="BDCEntity">
+      <xs:complexType>
+        <xs:sequence>
+          <xs:element ref="pc:EntityDisplayName" minOccurs="0"/>
+          <xs:element ref="pc:EntityInstanceReference" minOccurs="0"/>
+          <xs:element ref="pc:EntityId1" minOccurs="0"/>
+          <xs:element ref="pc:EntityId2" minOccurs="0"/>
+          <xs:element ref="pc:EntityId3" minOccurs="0"/>
+          <xs:element ref="pc:EntityId4" minOccurs="0"/>
+          <xs:element ref="pc:EntityId5" minOccurs="0"/>
+        </xs:sequence>
+      </xs:complexType>
+    </xs:element>
+    <xs:element name="EntityDisplayName" type="xs:string"/>
+    <xs:element name="EntityInstanceReference" type="xs:string"/>
+    <xs:element name="EntityId1" type="xs:string"/>
+    <xs:element name="EntityId2" type="xs:string"/>
+    <xs:element name="EntityId3" type="xs:string"/>
+    <xs:element name="EntityId4" type="xs:string"/>
+    <xs:element name="EntityId5" type="xs:string"/>
+    <xs:element name="Terms">
+      <xs:complexType>
+        <xs:sequence>
+          <xs:element ref="pc:TermInfo" minOccurs="0" maxOccurs="unbounded"/>
+        </xs:sequence>
+      </xs:complexType>
+    </xs:element>
+    <xs:element name="TermInfo">
+      <xs:complexType>
+        <xs:sequence>
+          <xs:element ref="pc:TermName" minOccurs="0"/>
+          <xs:element ref="pc:TermId" minOccurs="0"/>
+        </xs:sequence>
+      </xs:complexType>
+    </xs:element>
+    <xs:element name="TermName" type="xs:string"/>
+    <xs:element name="TermId" type="xs:string"/>
+  </xs:schema>
+</ct:contentTypeSchema>
+</file>
+
+<file path=customXml/item2.xml><?xml version="1.0" encoding="utf-8"?>
+<?mso-contentType ?>
+<FormTemplates xmlns="http://schemas.microsoft.com/sharepoint/v3/contenttype/forms">
+  <Display>DocumentLibraryForm</Display>
+  <Edit>DocumentLibraryForm</Edit>
+  <New>DocumentLibraryForm</New>
+</FormTemplates>
+</file>
+
+<file path=customXml/item3.xml><?xml version="1.0" encoding="utf-8"?>
+<p:properties xmlns:p="http://schemas.microsoft.com/office/2006/metadata/properties" xmlns:xsi="http://www.w3.org/2001/XMLSchema-instance" xmlns:pc="http://schemas.microsoft.com/office/infopath/2007/PartnerControls">
+  <documentManagement>
+    <_activity xmlns="0764adc3-33d8-4bef-9efd-63aa810ed339" xsi:nil="true"/>
+  </documentManagement>
+</p:properties>
+</file>
+
+<file path=customXml/itemProps1.xml><?xml version="1.0" encoding="utf-8"?>
+<ds:datastoreItem xmlns:ds="http://schemas.openxmlformats.org/officeDocument/2006/customXml" ds:itemID="{CA997691-7987-4C25-A321-5114930D1886}">
+  <ds:schemaRefs>
+    <ds:schemaRef ds:uri="http://schemas.microsoft.com/office/2006/metadata/contentType"/>
+    <ds:schemaRef ds:uri="http://schemas.microsoft.com/office/2006/metadata/properties/metaAttributes"/>
+    <ds:schemaRef ds:uri="http://www.w3.org/2001/XMLSchema"/>
+    <ds:schemaRef ds:uri="http://schemas.microsoft.com/office/2006/metadata/properties"/>
+    <ds:schemaRef ds:uri="0764adc3-33d8-4bef-9efd-63aa810ed339"/>
+    <ds:schemaRef ds:uri="77fa9fd6-26bb-43be-9c10-5ac4f8eb8ce5"/>
+    <ds:schemaRef ds:uri="http://schemas.microsoft.com/office/2006/documentManagement/types"/>
+    <ds:schemaRef ds:uri="http://schemas.microsoft.com/office/infopath/2007/PartnerControls"/>
+    <ds:schemaRef ds:uri="http://schemas.openxmlformats.org/package/2006/metadata/core-properties"/>
+    <ds:schemaRef ds:uri="http://purl.org/dc/elements/1.1/"/>
+    <ds:schemaRef ds:uri="http://purl.org/dc/terms/"/>
+    <ds:schemaRef ds:uri="http://schemas.microsoft.com/internal/obd"/>
+  </ds:schemaRefs>
+</ds:datastoreItem>
+</file>
+
+<file path=customXml/itemProps2.xml><?xml version="1.0" encoding="utf-8"?>
+<ds:datastoreItem xmlns:ds="http://schemas.openxmlformats.org/officeDocument/2006/customXml" ds:itemID="{FA0501F3-B601-472F-A92D-1D861779C7D5}">
+  <ds:schemaRefs>
+    <ds:schemaRef ds:uri="http://schemas.microsoft.com/sharepoint/v3/contenttype/forms"/>
+  </ds:schemaRefs>
+</ds:datastoreItem>
+</file>
+
+<file path=customXml/itemProps3.xml><?xml version="1.0" encoding="utf-8"?>
+<ds:datastoreItem xmlns:ds="http://schemas.openxmlformats.org/officeDocument/2006/customXml" ds:itemID="{436938D0-65CE-4FF3-B50D-95926B2D473C}">
+  <ds:schemaRefs>
+    <ds:schemaRef ds:uri="77fa9fd6-26bb-43be-9c10-5ac4f8eb8ce5"/>
+    <ds:schemaRef ds:uri="http://purl.org/dc/terms/"/>
+    <ds:schemaRef ds:uri="http://schemas.microsoft.com/office/2006/metadata/properties"/>
+    <ds:schemaRef ds:uri="http://purl.org/dc/elements/1.1/"/>
+    <ds:schemaRef ds:uri="http://schemas.openxmlformats.org/package/2006/metadata/core-properties"/>
+    <ds:schemaRef ds:uri="http://schemas.microsoft.com/office/infopath/2007/PartnerControls"/>
+    <ds:schemaRef ds:uri="0764adc3-33d8-4bef-9efd-63aa810ed339"/>
+    <ds:schemaRef ds:uri="http://schemas.microsoft.com/office/2006/documentManagement/types"/>
+    <ds:schemaRef ds:uri="http://www.w3.org/XML/1998/namespace"/>
+    <ds:schemaRef ds:uri="http://purl.org/dc/dcmitype/"/>
+  </ds:schemaRefs>
+</ds:datastoreItem>
 </file>